--- a/Proyecto Final/Entrega final - Proyecto final Grupo 2 - Taller de Programación.pptx
+++ b/Proyecto Final/Entrega final - Proyecto final Grupo 2 - Taller de Programación.pptx
@@ -4,13 +4,15 @@
   <p:sldMasterIdLst>
     <p:sldMasterId id="2147483648" r:id="rId1"/>
   </p:sldMasterIdLst>
+  <p:notesMasterIdLst>
+    <p:notesMasterId r:id="rId7"/>
+  </p:notesMasterIdLst>
   <p:sldIdLst>
     <p:sldId id="256" r:id="rId2"/>
-    <p:sldId id="257" r:id="rId3"/>
-    <p:sldId id="258" r:id="rId4"/>
-    <p:sldId id="259" r:id="rId5"/>
-    <p:sldId id="260" r:id="rId6"/>
-    <p:sldId id="261" r:id="rId7"/>
+    <p:sldId id="258" r:id="rId3"/>
+    <p:sldId id="259" r:id="rId4"/>
+    <p:sldId id="260" r:id="rId5"/>
+    <p:sldId id="261" r:id="rId6"/>
   </p:sldIdLst>
   <p:sldSz cx="18288000" cy="10287000"/>
   <p:notesSz cx="6858000" cy="9144000"/>
@@ -20,11 +22,11 @@
       <p:regular r:id="rId8"/>
     </p:embeddedFont>
     <p:embeddedFont>
-      <p:font typeface="Oswald" panose="020F0502020204030204" pitchFamily="2" charset="0"/>
+      <p:font typeface="Oswald" panose="00000500000000000000" pitchFamily="2" charset="0"/>
       <p:regular r:id="rId9"/>
     </p:embeddedFont>
     <p:embeddedFont>
-      <p:font typeface="Oswald Bold" panose="020B0604020202020204" charset="0"/>
+      <p:font typeface="Oswald Bold" panose="00000800000000000000" charset="0"/>
       <p:regular r:id="rId10"/>
     </p:embeddedFont>
   </p:embeddedFontLst>
@@ -142,6 +144,415 @@
 </p:presentation>
 </file>
 
+<file path=ppt/revisionInfo.xml><?xml version="1.0" encoding="utf-8"?>
+<p1510:revInfo xmlns:a="http://schemas.openxmlformats.org/drawingml/2006/main" xmlns:r="http://schemas.openxmlformats.org/officeDocument/2006/relationships" xmlns:p1510="http://schemas.microsoft.com/office/powerpoint/2015/10/main">
+  <p1510:revLst>
+    <p1510:client id="{132DEA35-303A-4C15-9AEB-34A5D0B75E4B}" v="2" dt="2025-12-02T23:24:58.841"/>
+  </p1510:revLst>
+</p1510:revInfo>
+</file>
+
+<file path=ppt/changesInfos/changesInfo1.xml><?xml version="1.0" encoding="utf-8"?>
+<pc:chgInfo xmlns:a="http://schemas.openxmlformats.org/drawingml/2006/main" xmlns:r="http://schemas.openxmlformats.org/officeDocument/2006/relationships" xmlns:ac="http://schemas.microsoft.com/office/drawing/2013/main/command" xmlns:pc="http://schemas.microsoft.com/office/powerpoint/2013/main/command">
+  <pc:docChgLst>
+    <pc:chgData name="Martin Alvarez" userId="10705b4323551338" providerId="LiveId" clId="{132DEA35-303A-4C15-9AEB-34A5D0B75E4B}"/>
+    <pc:docChg chg="undo custSel delSld modSld">
+      <pc:chgData name="Martin Alvarez" userId="10705b4323551338" providerId="LiveId" clId="{132DEA35-303A-4C15-9AEB-34A5D0B75E4B}" dt="2025-12-02T23:21:20.067" v="13" actId="1076"/>
+      <pc:docMkLst>
+        <pc:docMk/>
+      </pc:docMkLst>
+      <pc:sldChg chg="modSp mod">
+        <pc:chgData name="Martin Alvarez" userId="10705b4323551338" providerId="LiveId" clId="{132DEA35-303A-4C15-9AEB-34A5D0B75E4B}" dt="2025-12-02T23:21:20.067" v="13" actId="1076"/>
+        <pc:sldMkLst>
+          <pc:docMk/>
+          <pc:sldMk cId="0" sldId="256"/>
+        </pc:sldMkLst>
+        <pc:grpChg chg="mod">
+          <ac:chgData name="Martin Alvarez" userId="10705b4323551338" providerId="LiveId" clId="{132DEA35-303A-4C15-9AEB-34A5D0B75E4B}" dt="2025-12-02T23:21:20.067" v="13" actId="1076"/>
+          <ac:grpSpMkLst>
+            <pc:docMk/>
+            <pc:sldMk cId="0" sldId="256"/>
+            <ac:grpSpMk id="18" creationId="{00000000-0000-0000-0000-000000000000}"/>
+          </ac:grpSpMkLst>
+        </pc:grpChg>
+      </pc:sldChg>
+      <pc:sldChg chg="del">
+        <pc:chgData name="Martin Alvarez" userId="10705b4323551338" providerId="LiveId" clId="{132DEA35-303A-4C15-9AEB-34A5D0B75E4B}" dt="2025-12-02T23:15:39.301" v="0" actId="47"/>
+        <pc:sldMkLst>
+          <pc:docMk/>
+          <pc:sldMk cId="0" sldId="257"/>
+        </pc:sldMkLst>
+      </pc:sldChg>
+      <pc:sldChg chg="modSp mod">
+        <pc:chgData name="Martin Alvarez" userId="10705b4323551338" providerId="LiveId" clId="{132DEA35-303A-4C15-9AEB-34A5D0B75E4B}" dt="2025-12-02T23:20:46.920" v="11" actId="1076"/>
+        <pc:sldMkLst>
+          <pc:docMk/>
+          <pc:sldMk cId="0" sldId="259"/>
+        </pc:sldMkLst>
+        <pc:spChg chg="mod">
+          <ac:chgData name="Martin Alvarez" userId="10705b4323551338" providerId="LiveId" clId="{132DEA35-303A-4C15-9AEB-34A5D0B75E4B}" dt="2025-12-02T23:20:46.920" v="11" actId="1076"/>
+          <ac:spMkLst>
+            <pc:docMk/>
+            <pc:sldMk cId="0" sldId="259"/>
+            <ac:spMk id="5" creationId="{00000000-0000-0000-0000-000000000000}"/>
+          </ac:spMkLst>
+        </pc:spChg>
+      </pc:sldChg>
+    </pc:docChg>
+  </pc:docChgLst>
+</pc:chgInfo>
+</file>
+
+<file path=ppt/notesMasters/notesMaster1.xml><?xml version="1.0" encoding="utf-8"?>
+<p:notesMaster xmlns:a="http://schemas.openxmlformats.org/drawingml/2006/main" xmlns:r="http://schemas.openxmlformats.org/officeDocument/2006/relationships" xmlns:p="http://schemas.openxmlformats.org/presentationml/2006/main">
+  <p:cSld>
+    <p:bg>
+      <p:bgRef idx="1001">
+        <a:schemeClr val="bg1"/>
+      </p:bgRef>
+    </p:bg>
+    <p:spTree>
+      <p:nvGrpSpPr>
+        <p:cNvPr id="1" name=""/>
+        <p:cNvGrpSpPr/>
+        <p:nvPr/>
+      </p:nvGrpSpPr>
+      <p:grpSpPr>
+        <a:xfrm>
+          <a:off x="0" y="0"/>
+          <a:ext cx="0" cy="0"/>
+          <a:chOff x="0" y="0"/>
+          <a:chExt cx="0" cy="0"/>
+        </a:xfrm>
+      </p:grpSpPr>
+      <p:sp>
+        <p:nvSpPr>
+          <p:cNvPr id="2" name="Marcador de encabezado 1"/>
+          <p:cNvSpPr>
+            <a:spLocks noGrp="1"/>
+          </p:cNvSpPr>
+          <p:nvPr>
+            <p:ph type="hdr" sz="quarter"/>
+          </p:nvPr>
+        </p:nvSpPr>
+        <p:spPr>
+          <a:xfrm>
+            <a:off x="0" y="0"/>
+            <a:ext cx="2971800" cy="458788"/>
+          </a:xfrm>
+          <a:prstGeom prst="rect">
+            <a:avLst/>
+          </a:prstGeom>
+        </p:spPr>
+        <p:txBody>
+          <a:bodyPr vert="horz" lIns="91440" tIns="45720" rIns="91440" bIns="45720" rtlCol="0"/>
+          <a:lstStyle>
+            <a:lvl1pPr algn="l">
+              <a:defRPr sz="1200"/>
+            </a:lvl1pPr>
+          </a:lstStyle>
+          <a:p>
+            <a:endParaRPr lang="es-AR"/>
+          </a:p>
+        </p:txBody>
+      </p:sp>
+      <p:sp>
+        <p:nvSpPr>
+          <p:cNvPr id="3" name="Marcador de fecha 2"/>
+          <p:cNvSpPr>
+            <a:spLocks noGrp="1"/>
+          </p:cNvSpPr>
+          <p:nvPr>
+            <p:ph type="dt" idx="1"/>
+          </p:nvPr>
+        </p:nvSpPr>
+        <p:spPr>
+          <a:xfrm>
+            <a:off x="3884613" y="0"/>
+            <a:ext cx="2971800" cy="458788"/>
+          </a:xfrm>
+          <a:prstGeom prst="rect">
+            <a:avLst/>
+          </a:prstGeom>
+        </p:spPr>
+        <p:txBody>
+          <a:bodyPr vert="horz" lIns="91440" tIns="45720" rIns="91440" bIns="45720" rtlCol="0"/>
+          <a:lstStyle>
+            <a:lvl1pPr algn="r">
+              <a:defRPr sz="1200"/>
+            </a:lvl1pPr>
+          </a:lstStyle>
+          <a:p>
+            <a:fld id="{96AE6B78-C38B-4B5C-9A59-4F2CB90A0972}" type="datetimeFigureOut">
+              <a:rPr lang="es-AR" smtClean="0"/>
+              <a:t>2/12/2025</a:t>
+            </a:fld>
+            <a:endParaRPr lang="es-AR"/>
+          </a:p>
+        </p:txBody>
+      </p:sp>
+      <p:sp>
+        <p:nvSpPr>
+          <p:cNvPr id="4" name="Marcador de imagen de diapositiva 3"/>
+          <p:cNvSpPr>
+            <a:spLocks noGrp="1" noRot="1" noChangeAspect="1"/>
+          </p:cNvSpPr>
+          <p:nvPr>
+            <p:ph type="sldImg" idx="2"/>
+          </p:nvPr>
+        </p:nvSpPr>
+        <p:spPr>
+          <a:xfrm>
+            <a:off x="685800" y="1143000"/>
+            <a:ext cx="5486400" cy="3086100"/>
+          </a:xfrm>
+          <a:prstGeom prst="rect">
+            <a:avLst/>
+          </a:prstGeom>
+          <a:noFill/>
+          <a:ln w="12700">
+            <a:solidFill>
+              <a:prstClr val="black"/>
+            </a:solidFill>
+          </a:ln>
+        </p:spPr>
+        <p:txBody>
+          <a:bodyPr vert="horz" lIns="91440" tIns="45720" rIns="91440" bIns="45720" rtlCol="0" anchor="ctr"/>
+          <a:lstStyle/>
+          <a:p>
+            <a:endParaRPr lang="es-AR"/>
+          </a:p>
+        </p:txBody>
+      </p:sp>
+      <p:sp>
+        <p:nvSpPr>
+          <p:cNvPr id="5" name="Marcador de notas 4"/>
+          <p:cNvSpPr>
+            <a:spLocks noGrp="1"/>
+          </p:cNvSpPr>
+          <p:nvPr>
+            <p:ph type="body" sz="quarter" idx="3"/>
+          </p:nvPr>
+        </p:nvSpPr>
+        <p:spPr>
+          <a:xfrm>
+            <a:off x="685800" y="4400550"/>
+            <a:ext cx="5486400" cy="3600450"/>
+          </a:xfrm>
+          <a:prstGeom prst="rect">
+            <a:avLst/>
+          </a:prstGeom>
+        </p:spPr>
+        <p:txBody>
+          <a:bodyPr vert="horz" lIns="91440" tIns="45720" rIns="91440" bIns="45720" rtlCol="0"/>
+          <a:lstStyle/>
+          <a:p>
+            <a:pPr lvl="0"/>
+            <a:r>
+              <a:rPr lang="es-ES"/>
+              <a:t>Haga clic para modificar los estilos de texto del patrón</a:t>
+            </a:r>
+          </a:p>
+          <a:p>
+            <a:pPr lvl="1"/>
+            <a:r>
+              <a:rPr lang="es-ES"/>
+              <a:t>Segundo nivel</a:t>
+            </a:r>
+          </a:p>
+          <a:p>
+            <a:pPr lvl="2"/>
+            <a:r>
+              <a:rPr lang="es-ES"/>
+              <a:t>Tercer nivel</a:t>
+            </a:r>
+          </a:p>
+          <a:p>
+            <a:pPr lvl="3"/>
+            <a:r>
+              <a:rPr lang="es-ES"/>
+              <a:t>Cuarto nivel</a:t>
+            </a:r>
+          </a:p>
+          <a:p>
+            <a:pPr lvl="4"/>
+            <a:r>
+              <a:rPr lang="es-ES"/>
+              <a:t>Quinto nivel</a:t>
+            </a:r>
+            <a:endParaRPr lang="es-AR"/>
+          </a:p>
+        </p:txBody>
+      </p:sp>
+      <p:sp>
+        <p:nvSpPr>
+          <p:cNvPr id="6" name="Marcador de pie de página 5"/>
+          <p:cNvSpPr>
+            <a:spLocks noGrp="1"/>
+          </p:cNvSpPr>
+          <p:nvPr>
+            <p:ph type="ftr" sz="quarter" idx="4"/>
+          </p:nvPr>
+        </p:nvSpPr>
+        <p:spPr>
+          <a:xfrm>
+            <a:off x="0" y="8685213"/>
+            <a:ext cx="2971800" cy="458787"/>
+          </a:xfrm>
+          <a:prstGeom prst="rect">
+            <a:avLst/>
+          </a:prstGeom>
+        </p:spPr>
+        <p:txBody>
+          <a:bodyPr vert="horz" lIns="91440" tIns="45720" rIns="91440" bIns="45720" rtlCol="0" anchor="b"/>
+          <a:lstStyle>
+            <a:lvl1pPr algn="l">
+              <a:defRPr sz="1200"/>
+            </a:lvl1pPr>
+          </a:lstStyle>
+          <a:p>
+            <a:endParaRPr lang="es-AR"/>
+          </a:p>
+        </p:txBody>
+      </p:sp>
+      <p:sp>
+        <p:nvSpPr>
+          <p:cNvPr id="7" name="Marcador de número de diapositiva 6"/>
+          <p:cNvSpPr>
+            <a:spLocks noGrp="1"/>
+          </p:cNvSpPr>
+          <p:nvPr>
+            <p:ph type="sldNum" sz="quarter" idx="5"/>
+          </p:nvPr>
+        </p:nvSpPr>
+        <p:spPr>
+          <a:xfrm>
+            <a:off x="3884613" y="8685213"/>
+            <a:ext cx="2971800" cy="458787"/>
+          </a:xfrm>
+          <a:prstGeom prst="rect">
+            <a:avLst/>
+          </a:prstGeom>
+        </p:spPr>
+        <p:txBody>
+          <a:bodyPr vert="horz" lIns="91440" tIns="45720" rIns="91440" bIns="45720" rtlCol="0" anchor="b"/>
+          <a:lstStyle>
+            <a:lvl1pPr algn="r">
+              <a:defRPr sz="1200"/>
+            </a:lvl1pPr>
+          </a:lstStyle>
+          <a:p>
+            <a:fld id="{C43209A0-CD1A-4331-85B8-A8CF64E15EE0}" type="slidenum">
+              <a:rPr lang="es-AR" smtClean="0"/>
+              <a:t>‹Nº›</a:t>
+            </a:fld>
+            <a:endParaRPr lang="es-AR"/>
+          </a:p>
+        </p:txBody>
+      </p:sp>
+    </p:spTree>
+    <p:extLst>
+      <p:ext uri="{BB962C8B-B14F-4D97-AF65-F5344CB8AC3E}">
+        <p14:creationId xmlns:p14="http://schemas.microsoft.com/office/powerpoint/2010/main" val="2250660096"/>
+      </p:ext>
+    </p:extLst>
+  </p:cSld>
+  <p:clrMap bg1="lt1" tx1="dk1" bg2="lt2" tx2="dk2" accent1="accent1" accent2="accent2" accent3="accent3" accent4="accent4" accent5="accent5" accent6="accent6" hlink="hlink" folHlink="folHlink"/>
+  <p:notesStyle>
+    <a:lvl1pPr marL="0" algn="l" defTabSz="914400" rtl="0" eaLnBrk="1" latinLnBrk="0" hangingPunct="1">
+      <a:defRPr sz="1200" kern="1200">
+        <a:solidFill>
+          <a:schemeClr val="tx1"/>
+        </a:solidFill>
+        <a:latin typeface="+mn-lt"/>
+        <a:ea typeface="+mn-ea"/>
+        <a:cs typeface="+mn-cs"/>
+      </a:defRPr>
+    </a:lvl1pPr>
+    <a:lvl2pPr marL="457200" algn="l" defTabSz="914400" rtl="0" eaLnBrk="1" latinLnBrk="0" hangingPunct="1">
+      <a:defRPr sz="1200" kern="1200">
+        <a:solidFill>
+          <a:schemeClr val="tx1"/>
+        </a:solidFill>
+        <a:latin typeface="+mn-lt"/>
+        <a:ea typeface="+mn-ea"/>
+        <a:cs typeface="+mn-cs"/>
+      </a:defRPr>
+    </a:lvl2pPr>
+    <a:lvl3pPr marL="914400" algn="l" defTabSz="914400" rtl="0" eaLnBrk="1" latinLnBrk="0" hangingPunct="1">
+      <a:defRPr sz="1200" kern="1200">
+        <a:solidFill>
+          <a:schemeClr val="tx1"/>
+        </a:solidFill>
+        <a:latin typeface="+mn-lt"/>
+        <a:ea typeface="+mn-ea"/>
+        <a:cs typeface="+mn-cs"/>
+      </a:defRPr>
+    </a:lvl3pPr>
+    <a:lvl4pPr marL="1371600" algn="l" defTabSz="914400" rtl="0" eaLnBrk="1" latinLnBrk="0" hangingPunct="1">
+      <a:defRPr sz="1200" kern="1200">
+        <a:solidFill>
+          <a:schemeClr val="tx1"/>
+        </a:solidFill>
+        <a:latin typeface="+mn-lt"/>
+        <a:ea typeface="+mn-ea"/>
+        <a:cs typeface="+mn-cs"/>
+      </a:defRPr>
+    </a:lvl4pPr>
+    <a:lvl5pPr marL="1828800" algn="l" defTabSz="914400" rtl="0" eaLnBrk="1" latinLnBrk="0" hangingPunct="1">
+      <a:defRPr sz="1200" kern="1200">
+        <a:solidFill>
+          <a:schemeClr val="tx1"/>
+        </a:solidFill>
+        <a:latin typeface="+mn-lt"/>
+        <a:ea typeface="+mn-ea"/>
+        <a:cs typeface="+mn-cs"/>
+      </a:defRPr>
+    </a:lvl5pPr>
+    <a:lvl6pPr marL="2286000" algn="l" defTabSz="914400" rtl="0" eaLnBrk="1" latinLnBrk="0" hangingPunct="1">
+      <a:defRPr sz="1200" kern="1200">
+        <a:solidFill>
+          <a:schemeClr val="tx1"/>
+        </a:solidFill>
+        <a:latin typeface="+mn-lt"/>
+        <a:ea typeface="+mn-ea"/>
+        <a:cs typeface="+mn-cs"/>
+      </a:defRPr>
+    </a:lvl6pPr>
+    <a:lvl7pPr marL="2743200" algn="l" defTabSz="914400" rtl="0" eaLnBrk="1" latinLnBrk="0" hangingPunct="1">
+      <a:defRPr sz="1200" kern="1200">
+        <a:solidFill>
+          <a:schemeClr val="tx1"/>
+        </a:solidFill>
+        <a:latin typeface="+mn-lt"/>
+        <a:ea typeface="+mn-ea"/>
+        <a:cs typeface="+mn-cs"/>
+      </a:defRPr>
+    </a:lvl7pPr>
+    <a:lvl8pPr marL="3200400" algn="l" defTabSz="914400" rtl="0" eaLnBrk="1" latinLnBrk="0" hangingPunct="1">
+      <a:defRPr sz="1200" kern="1200">
+        <a:solidFill>
+          <a:schemeClr val="tx1"/>
+        </a:solidFill>
+        <a:latin typeface="+mn-lt"/>
+        <a:ea typeface="+mn-ea"/>
+        <a:cs typeface="+mn-cs"/>
+      </a:defRPr>
+    </a:lvl8pPr>
+    <a:lvl9pPr marL="3657600" algn="l" defTabSz="914400" rtl="0" eaLnBrk="1" latinLnBrk="0" hangingPunct="1">
+      <a:defRPr sz="1200" kern="1200">
+        <a:solidFill>
+          <a:schemeClr val="tx1"/>
+        </a:solidFill>
+        <a:latin typeface="+mn-lt"/>
+        <a:ea typeface="+mn-ea"/>
+        <a:cs typeface="+mn-cs"/>
+      </a:defRPr>
+    </a:lvl9pPr>
+  </p:notesStyle>
+</p:notesMaster>
+</file>
+
 <file path=ppt/slideLayouts/slideLayout1.xml><?xml version="1.0" encoding="utf-8"?>
 <p:sldLayout xmlns:a="http://schemas.openxmlformats.org/drawingml/2006/main" xmlns:r="http://schemas.openxmlformats.org/officeDocument/2006/relationships" xmlns:p="http://schemas.openxmlformats.org/presentationml/2006/main" type="title" preserve="1">
   <p:cSld name="Title Slide">
@@ -319,10 +730,9 @@
           <a:bodyPr/>
           <a:lstStyle/>
           <a:p>
-            <a:fld id="{1D8BD707-D9CF-40AE-B4C6-C98DA3205C09}" type="datetimeFigureOut">
+            <a:fld id="{2A427CD1-653D-4C01-A70A-EBF02967BB01}" type="datetime1">
               <a:rPr lang="en-US" smtClean="0"/>
-              <a:pPr/>
-              <a:t>11/30/2025</a:t>
+              <a:t>12/2/2025</a:t>
             </a:fld>
             <a:endParaRPr lang="en-US"/>
           </a:p>
@@ -484,10 +894,9 @@
           <a:bodyPr/>
           <a:lstStyle/>
           <a:p>
-            <a:fld id="{1D8BD707-D9CF-40AE-B4C6-C98DA3205C09}" type="datetimeFigureOut">
+            <a:fld id="{5A062DD9-77C6-4C51-913D-36C0A901D8E2}" type="datetime1">
               <a:rPr lang="en-US" smtClean="0"/>
-              <a:pPr/>
-              <a:t>11/30/2025</a:t>
+              <a:t>12/2/2025</a:t>
             </a:fld>
             <a:endParaRPr lang="en-US"/>
           </a:p>
@@ -659,10 +1068,9 @@
           <a:bodyPr/>
           <a:lstStyle/>
           <a:p>
-            <a:fld id="{1D8BD707-D9CF-40AE-B4C6-C98DA3205C09}" type="datetimeFigureOut">
+            <a:fld id="{CE16C94D-AE0F-4C46-9C46-222085FAE477}" type="datetime1">
               <a:rPr lang="en-US" smtClean="0"/>
-              <a:pPr/>
-              <a:t>11/30/2025</a:t>
+              <a:t>12/2/2025</a:t>
             </a:fld>
             <a:endParaRPr lang="en-US"/>
           </a:p>
@@ -824,10 +1232,9 @@
           <a:bodyPr/>
           <a:lstStyle/>
           <a:p>
-            <a:fld id="{1D8BD707-D9CF-40AE-B4C6-C98DA3205C09}" type="datetimeFigureOut">
+            <a:fld id="{52B56737-861B-4959-9C60-074AAC73B472}" type="datetime1">
               <a:rPr lang="en-US" smtClean="0"/>
-              <a:pPr/>
-              <a:t>11/30/2025</a:t>
+              <a:t>12/2/2025</a:t>
             </a:fld>
             <a:endParaRPr lang="en-US"/>
           </a:p>
@@ -1066,10 +1473,9 @@
           <a:bodyPr/>
           <a:lstStyle/>
           <a:p>
-            <a:fld id="{1D8BD707-D9CF-40AE-B4C6-C98DA3205C09}" type="datetimeFigureOut">
+            <a:fld id="{C966D4B1-8A13-4251-A41C-372CBDDB8917}" type="datetime1">
               <a:rPr lang="en-US" smtClean="0"/>
-              <a:pPr/>
-              <a:t>11/30/2025</a:t>
+              <a:t>12/2/2025</a:t>
             </a:fld>
             <a:endParaRPr lang="en-US"/>
           </a:p>
@@ -1348,10 +1754,9 @@
           <a:bodyPr/>
           <a:lstStyle/>
           <a:p>
-            <a:fld id="{1D8BD707-D9CF-40AE-B4C6-C98DA3205C09}" type="datetimeFigureOut">
+            <a:fld id="{754A917F-4E98-4D41-8796-1B2CF10B83E5}" type="datetime1">
               <a:rPr lang="en-US" smtClean="0"/>
-              <a:pPr/>
-              <a:t>11/30/2025</a:t>
+              <a:t>12/2/2025</a:t>
             </a:fld>
             <a:endParaRPr lang="en-US"/>
           </a:p>
@@ -1764,10 +2169,9 @@
           <a:bodyPr/>
           <a:lstStyle/>
           <a:p>
-            <a:fld id="{1D8BD707-D9CF-40AE-B4C6-C98DA3205C09}" type="datetimeFigureOut">
+            <a:fld id="{A3824CCE-5EF6-4015-9F67-6658875882EC}" type="datetime1">
               <a:rPr lang="en-US" smtClean="0"/>
-              <a:pPr/>
-              <a:t>11/30/2025</a:t>
+              <a:t>12/2/2025</a:t>
             </a:fld>
             <a:endParaRPr lang="en-US"/>
           </a:p>
@@ -1878,10 +2282,9 @@
           <a:bodyPr/>
           <a:lstStyle/>
           <a:p>
-            <a:fld id="{1D8BD707-D9CF-40AE-B4C6-C98DA3205C09}" type="datetimeFigureOut">
+            <a:fld id="{9ED0D5BB-E8D6-43D6-AA60-0B8C64A0FD9D}" type="datetime1">
               <a:rPr lang="en-US" smtClean="0"/>
-              <a:pPr/>
-              <a:t>11/30/2025</a:t>
+              <a:t>12/2/2025</a:t>
             </a:fld>
             <a:endParaRPr lang="en-US"/>
           </a:p>
@@ -1970,10 +2373,9 @@
           <a:bodyPr/>
           <a:lstStyle/>
           <a:p>
-            <a:fld id="{1D8BD707-D9CF-40AE-B4C6-C98DA3205C09}" type="datetimeFigureOut">
+            <a:fld id="{315A25CB-95E4-442F-A0D2-0AFD9D7B51BC}" type="datetime1">
               <a:rPr lang="en-US" smtClean="0"/>
-              <a:pPr/>
-              <a:t>11/30/2025</a:t>
+              <a:t>12/2/2025</a:t>
             </a:fld>
             <a:endParaRPr lang="en-US"/>
           </a:p>
@@ -2242,10 +2644,9 @@
           <a:bodyPr/>
           <a:lstStyle/>
           <a:p>
-            <a:fld id="{1D8BD707-D9CF-40AE-B4C6-C98DA3205C09}" type="datetimeFigureOut">
+            <a:fld id="{DAF29532-E92F-4FB5-B3B8-2C218D994B91}" type="datetime1">
               <a:rPr lang="en-US" smtClean="0"/>
-              <a:pPr/>
-              <a:t>11/30/2025</a:t>
+              <a:t>12/2/2025</a:t>
             </a:fld>
             <a:endParaRPr lang="en-US"/>
           </a:p>
@@ -2491,10 +2892,9 @@
           <a:bodyPr/>
           <a:lstStyle/>
           <a:p>
-            <a:fld id="{1D8BD707-D9CF-40AE-B4C6-C98DA3205C09}" type="datetimeFigureOut">
+            <a:fld id="{A6FBAB1A-DAE0-424E-B439-31162A1F4D39}" type="datetime1">
               <a:rPr lang="en-US" smtClean="0"/>
-              <a:pPr/>
-              <a:t>11/30/2025</a:t>
+              <a:t>12/2/2025</a:t>
             </a:fld>
             <a:endParaRPr lang="en-US"/>
           </a:p>
@@ -2699,10 +3099,9 @@
             </a:lvl1pPr>
           </a:lstStyle>
           <a:p>
-            <a:fld id="{1D8BD707-D9CF-40AE-B4C6-C98DA3205C09}" type="datetimeFigureOut">
+            <a:fld id="{C08AAA80-E11B-44F0-B01B-889CA5A8CBB2}" type="datetime1">
               <a:rPr lang="en-US" smtClean="0"/>
-              <a:pPr/>
-              <a:t>11/30/2025</a:t>
+              <a:t>12/2/2025</a:t>
             </a:fld>
             <a:endParaRPr lang="en-US"/>
           </a:p>
@@ -2803,6 +3202,7 @@
     <p:sldLayoutId id="2147483658" r:id="rId10"/>
     <p:sldLayoutId id="2147483659" r:id="rId11"/>
   </p:sldLayoutIdLst>
+  <p:hf hdr="0" ftr="0" dt="0"/>
   <p:txStyles>
     <p:titleStyle>
       <a:lvl1pPr algn="ctr" defTabSz="914400" rtl="0" eaLnBrk="1" latinLnBrk="0" hangingPunct="1">
@@ -4391,252 +4791,33 @@
           </p:txBody>
         </p:sp>
       </p:grpSp>
-    </p:spTree>
-  </p:cSld>
-  <p:clrMapOvr>
-    <a:masterClrMapping/>
-  </p:clrMapOvr>
-</p:sld>
-</file>
-
-<file path=ppt/slides/slide2.xml><?xml version="1.0" encoding="utf-8"?>
-<p:sld xmlns:a="http://schemas.openxmlformats.org/drawingml/2006/main" xmlns:r="http://schemas.openxmlformats.org/officeDocument/2006/relationships" xmlns:p="http://schemas.openxmlformats.org/presentationml/2006/main">
-  <p:cSld>
-    <p:bg>
-      <p:bgPr>
-        <a:solidFill>
-          <a:srgbClr val="132232"/>
-        </a:solidFill>
-        <a:effectLst/>
-      </p:bgPr>
-    </p:bg>
-    <p:spTree>
-      <p:nvGrpSpPr>
-        <p:cNvPr id="1" name=""/>
-        <p:cNvGrpSpPr/>
-        <p:nvPr/>
-      </p:nvGrpSpPr>
-      <p:grpSpPr>
-        <a:xfrm>
-          <a:off x="0" y="0"/>
-          <a:ext cx="0" cy="0"/>
-          <a:chOff x="0" y="0"/>
-          <a:chExt cx="0" cy="0"/>
-        </a:xfrm>
-      </p:grpSpPr>
       <p:sp>
         <p:nvSpPr>
-          <p:cNvPr id="2" name="AutoShape 2"/>
-          <p:cNvSpPr/>
-          <p:nvPr/>
+          <p:cNvPr id="21" name="Marcador de número de diapositiva 20">
+            <a:extLst>
+              <a:ext uri="{FF2B5EF4-FFF2-40B4-BE49-F238E27FC236}">
+                <a16:creationId xmlns:a16="http://schemas.microsoft.com/office/drawing/2014/main" id="{5E2C91B6-2B7A-03A4-443C-CC0A9A68A58E}"/>
+              </a:ext>
+            </a:extLst>
+          </p:cNvPr>
+          <p:cNvSpPr>
+            <a:spLocks noGrp="1"/>
+          </p:cNvSpPr>
+          <p:nvPr>
+            <p:ph type="sldNum" sz="quarter" idx="12"/>
+          </p:nvPr>
         </p:nvSpPr>
-        <p:spPr>
-          <a:xfrm>
-            <a:off x="4940584" y="6465400"/>
-            <a:ext cx="13347416" cy="0"/>
-          </a:xfrm>
-          <a:prstGeom prst="line">
-            <a:avLst/>
-          </a:prstGeom>
-          <a:ln w="28575" cap="flat">
-            <a:solidFill>
-              <a:srgbClr val="FFFFFF"/>
-            </a:solidFill>
-            <a:prstDash val="solid"/>
-            <a:headEnd type="oval" w="lg" len="lg"/>
-            <a:tailEnd type="none" w="sm" len="sm"/>
-          </a:ln>
-        </p:spPr>
+        <p:spPr/>
         <p:txBody>
           <a:bodyPr/>
           <a:lstStyle/>
           <a:p>
-            <a:endParaRPr lang="es-AR"/>
-          </a:p>
-        </p:txBody>
-      </p:sp>
-      <p:sp>
-        <p:nvSpPr>
-          <p:cNvPr id="3" name="AutoShape 3"/>
-          <p:cNvSpPr/>
-          <p:nvPr/>
-        </p:nvSpPr>
-        <p:spPr>
-          <a:xfrm>
-            <a:off x="0" y="3285380"/>
-            <a:ext cx="13347416" cy="0"/>
-          </a:xfrm>
-          <a:prstGeom prst="line">
-            <a:avLst/>
-          </a:prstGeom>
-          <a:ln w="28575" cap="flat">
-            <a:solidFill>
-              <a:srgbClr val="FFFFFF"/>
-            </a:solidFill>
-            <a:prstDash val="solid"/>
-            <a:headEnd type="none" w="sm" len="sm"/>
-            <a:tailEnd type="oval" w="lg" len="lg"/>
-          </a:ln>
-        </p:spPr>
-        <p:txBody>
-          <a:bodyPr/>
-          <a:lstStyle/>
-          <a:p>
-            <a:endParaRPr lang="es-AR"/>
-          </a:p>
-        </p:txBody>
-      </p:sp>
-      <p:sp>
-        <p:nvSpPr>
-          <p:cNvPr id="4" name="TextBox 4"/>
-          <p:cNvSpPr txBox="1"/>
-          <p:nvPr/>
-        </p:nvSpPr>
-        <p:spPr>
-          <a:xfrm>
-            <a:off x="2413184" y="4223785"/>
-            <a:ext cx="12318716" cy="1174750"/>
-          </a:xfrm>
-          <a:prstGeom prst="rect">
-            <a:avLst/>
-          </a:prstGeom>
-        </p:spPr>
-        <p:txBody>
-          <a:bodyPr lIns="0" tIns="0" rIns="0" bIns="0" rtlCol="0" anchor="t">
-            <a:spAutoFit/>
-          </a:bodyPr>
-          <a:lstStyle/>
-          <a:p>
-            <a:pPr algn="l">
-              <a:lnSpc>
-                <a:spcPts val="9200"/>
-              </a:lnSpc>
-            </a:pPr>
-            <a:r>
-              <a:rPr lang="en-US" sz="8000" spc="344">
-                <a:solidFill>
-                  <a:srgbClr val="FFFFFF"/>
-                </a:solidFill>
-                <a:latin typeface="Oswald"/>
-                <a:ea typeface="Oswald"/>
-                <a:cs typeface="Oswald"/>
-                <a:sym typeface="Oswald"/>
-              </a:rPr>
-              <a:t>PROPUESTA DE TRABAJO</a:t>
-            </a:r>
-          </a:p>
-        </p:txBody>
-      </p:sp>
-      <p:sp>
-        <p:nvSpPr>
-          <p:cNvPr id="5" name="TextBox 5"/>
-          <p:cNvSpPr txBox="1"/>
-          <p:nvPr/>
-        </p:nvSpPr>
-        <p:spPr>
-          <a:xfrm>
-            <a:off x="2413184" y="5430501"/>
-            <a:ext cx="14519718" cy="2295371"/>
-          </a:xfrm>
-          <a:prstGeom prst="rect">
-            <a:avLst/>
-          </a:prstGeom>
-        </p:spPr>
-        <p:txBody>
-          <a:bodyPr lIns="0" tIns="0" rIns="0" bIns="0" rtlCol="0" anchor="t">
-            <a:spAutoFit/>
-          </a:bodyPr>
-          <a:lstStyle/>
-          <a:p>
-            <a:pPr algn="just">
-              <a:lnSpc>
-                <a:spcPts val="4480"/>
-              </a:lnSpc>
-            </a:pPr>
-            <a:r>
-              <a:rPr lang="en-US" sz="3420" spc="68">
-                <a:solidFill>
-                  <a:srgbClr val="FFFFFF"/>
-                </a:solidFill>
-                <a:latin typeface="Codec Pro"/>
-                <a:ea typeface="Codec Pro"/>
-                <a:cs typeface="Codec Pro"/>
-                <a:sym typeface="Codec Pro"/>
-              </a:rPr>
-              <a:t>SE APLICARON CLUSTER DINAMICOS SOBRE LA BASE INMOBILIARIA MENSUAL DE ZONA PROP DURANTE EL PERIODO 2016-2025. EL OBJETIVO ES IFDENTIFICAR COMO EVOLUCIONARON LOS PRECIOS DEL M2 EN CADA UNO DE LOS CLUSTER DESIGNADOS</a:t>
-            </a:r>
-          </a:p>
-        </p:txBody>
-      </p:sp>
-      <p:sp>
-        <p:nvSpPr>
-          <p:cNvPr id="6" name="TextBox 6"/>
-          <p:cNvSpPr txBox="1"/>
-          <p:nvPr/>
-        </p:nvSpPr>
-        <p:spPr>
-          <a:xfrm>
-            <a:off x="442957" y="3854852"/>
-            <a:ext cx="1728747" cy="2388683"/>
-          </a:xfrm>
-          <a:prstGeom prst="rect">
-            <a:avLst/>
-          </a:prstGeom>
-        </p:spPr>
-        <p:txBody>
-          <a:bodyPr lIns="0" tIns="0" rIns="0" bIns="0" rtlCol="0" anchor="t">
-            <a:spAutoFit/>
-          </a:bodyPr>
-          <a:lstStyle/>
-          <a:p>
-            <a:pPr algn="ctr">
-              <a:lnSpc>
-                <a:spcPts val="18616"/>
-              </a:lnSpc>
-            </a:pPr>
-            <a:r>
-              <a:rPr lang="en-US" sz="16188" spc="696">
-                <a:solidFill>
-                  <a:srgbClr val="FFFFFF"/>
-                </a:solidFill>
-                <a:latin typeface="Oswald"/>
-                <a:ea typeface="Oswald"/>
-                <a:cs typeface="Oswald"/>
-                <a:sym typeface="Oswald"/>
-              </a:rPr>
+            <a:fld id="{B6F15528-21DE-4FAA-801E-634DDDAF4B2B}" type="slidenum">
+              <a:rPr lang="en-US" smtClean="0"/>
+              <a:pPr/>
               <a:t>1</a:t>
-            </a:r>
-          </a:p>
-        </p:txBody>
-      </p:sp>
-      <p:sp>
-        <p:nvSpPr>
-          <p:cNvPr id="7" name="AutoShape 7"/>
-          <p:cNvSpPr/>
-          <p:nvPr/>
-        </p:nvSpPr>
-        <p:spPr>
-          <a:xfrm>
-            <a:off x="1732555" y="5114925"/>
-            <a:ext cx="439149" cy="0"/>
-          </a:xfrm>
-          <a:prstGeom prst="line">
-            <a:avLst/>
-          </a:prstGeom>
-          <a:ln w="19050" cap="flat">
-            <a:solidFill>
-              <a:srgbClr val="FFFFFF"/>
-            </a:solidFill>
-            <a:prstDash val="solid"/>
-            <a:headEnd type="none" w="sm" len="sm"/>
-            <a:tailEnd type="none" w="sm" len="sm"/>
-          </a:ln>
-        </p:spPr>
-        <p:txBody>
-          <a:bodyPr/>
-          <a:lstStyle/>
-          <a:p>
-            <a:endParaRPr lang="es-AR"/>
+            </a:fld>
+            <a:endParaRPr lang="en-US"/>
           </a:p>
         </p:txBody>
       </p:sp>
@@ -4648,7 +4829,7 @@
 </p:sld>
 </file>
 
-<file path=ppt/slides/slide3.xml><?xml version="1.0" encoding="utf-8"?>
+<file path=ppt/slides/slide2.xml><?xml version="1.0" encoding="utf-8"?>
 <p:sld xmlns:a="http://schemas.openxmlformats.org/drawingml/2006/main" xmlns:r="http://schemas.openxmlformats.org/officeDocument/2006/relationships" xmlns:p="http://schemas.openxmlformats.org/presentationml/2006/main">
   <p:cSld>
     <p:spTree>
@@ -4784,16 +4965,124 @@
               <a:buChar char="•"/>
             </a:pPr>
             <a:r>
-              <a:rPr lang="en-US" sz="2799" u="none" spc="55">
-                <a:solidFill>
-                  <a:srgbClr val="000000"/>
-                </a:solidFill>
-                <a:latin typeface="Codec Pro"/>
-                <a:ea typeface="Codec Pro"/>
-                <a:cs typeface="Codec Pro"/>
-                <a:sym typeface="Codec Pro"/>
-              </a:rPr>
-              <a:t>Aplicación de clustering dinámico a datos inmobiliarios de ZonaProp (2016–2025).</a:t>
+              <a:rPr lang="en-US" sz="2799" u="none" spc="55" dirty="0" err="1">
+                <a:solidFill>
+                  <a:srgbClr val="000000"/>
+                </a:solidFill>
+                <a:latin typeface="Codec Pro"/>
+                <a:ea typeface="Codec Pro"/>
+                <a:cs typeface="Codec Pro"/>
+                <a:sym typeface="Codec Pro"/>
+              </a:rPr>
+              <a:t>Aplicación</a:t>
+            </a:r>
+            <a:r>
+              <a:rPr lang="en-US" sz="2799" u="none" spc="55" dirty="0">
+                <a:solidFill>
+                  <a:srgbClr val="000000"/>
+                </a:solidFill>
+                <a:latin typeface="Codec Pro"/>
+                <a:ea typeface="Codec Pro"/>
+                <a:cs typeface="Codec Pro"/>
+                <a:sym typeface="Codec Pro"/>
+              </a:rPr>
+              <a:t> de clustering </a:t>
+            </a:r>
+            <a:r>
+              <a:rPr lang="en-US" sz="2799" u="none" spc="55" dirty="0" err="1">
+                <a:solidFill>
+                  <a:srgbClr val="000000"/>
+                </a:solidFill>
+                <a:latin typeface="Codec Pro"/>
+                <a:ea typeface="Codec Pro"/>
+                <a:cs typeface="Codec Pro"/>
+                <a:sym typeface="Codec Pro"/>
+              </a:rPr>
+              <a:t>dinámico</a:t>
+            </a:r>
+            <a:r>
+              <a:rPr lang="en-US" sz="2799" u="none" spc="55" dirty="0">
+                <a:solidFill>
+                  <a:srgbClr val="000000"/>
+                </a:solidFill>
+                <a:latin typeface="Codec Pro"/>
+                <a:ea typeface="Codec Pro"/>
+                <a:cs typeface="Codec Pro"/>
+                <a:sym typeface="Codec Pro"/>
+              </a:rPr>
+              <a:t> a </a:t>
+            </a:r>
+            <a:r>
+              <a:rPr lang="en-US" sz="2799" u="none" spc="55" dirty="0" err="1">
+                <a:solidFill>
+                  <a:srgbClr val="000000"/>
+                </a:solidFill>
+                <a:latin typeface="Codec Pro"/>
+                <a:ea typeface="Codec Pro"/>
+                <a:cs typeface="Codec Pro"/>
+                <a:sym typeface="Codec Pro"/>
+              </a:rPr>
+              <a:t>datos</a:t>
+            </a:r>
+            <a:r>
+              <a:rPr lang="en-US" sz="2799" u="none" spc="55" dirty="0">
+                <a:solidFill>
+                  <a:srgbClr val="000000"/>
+                </a:solidFill>
+                <a:latin typeface="Codec Pro"/>
+                <a:ea typeface="Codec Pro"/>
+                <a:cs typeface="Codec Pro"/>
+                <a:sym typeface="Codec Pro"/>
+              </a:rPr>
+              <a:t> </a:t>
+            </a:r>
+            <a:r>
+              <a:rPr lang="en-US" sz="2799" u="none" spc="55" dirty="0" err="1">
+                <a:solidFill>
+                  <a:srgbClr val="000000"/>
+                </a:solidFill>
+                <a:latin typeface="Codec Pro"/>
+                <a:ea typeface="Codec Pro"/>
+                <a:cs typeface="Codec Pro"/>
+                <a:sym typeface="Codec Pro"/>
+              </a:rPr>
+              <a:t>inmobiliarios</a:t>
+            </a:r>
+            <a:r>
+              <a:rPr lang="en-US" sz="2799" u="none" spc="55" dirty="0">
+                <a:solidFill>
+                  <a:srgbClr val="000000"/>
+                </a:solidFill>
+                <a:latin typeface="Codec Pro"/>
+                <a:ea typeface="Codec Pro"/>
+                <a:cs typeface="Codec Pro"/>
+                <a:sym typeface="Codec Pro"/>
+              </a:rPr>
+              <a:t> de </a:t>
+            </a:r>
+            <a:r>
+              <a:rPr lang="en-US" sz="2799" u="none" spc="55" dirty="0" err="1">
+                <a:solidFill>
+                  <a:srgbClr val="000000"/>
+                </a:solidFill>
+                <a:latin typeface="Codec Pro"/>
+                <a:ea typeface="Codec Pro"/>
+                <a:cs typeface="Codec Pro"/>
+                <a:sym typeface="Codec Pro"/>
+              </a:rPr>
+              <a:t>ZonaProp</a:t>
+            </a:r>
+            <a:r>
+              <a:rPr lang="en-US" sz="2799" u="none" spc="55" dirty="0">
+                <a:solidFill>
+                  <a:srgbClr val="000000"/>
+                </a:solidFill>
+                <a:latin typeface="Codec Pro"/>
+                <a:ea typeface="Codec Pro"/>
+                <a:cs typeface="Codec Pro"/>
+                <a:sym typeface="Codec Pro"/>
+              </a:rPr>
+              <a:t> (2016–2025).</a:t>
             </a:r>
           </a:p>
           <a:p>
@@ -4802,7 +5091,7 @@
                 <a:spcPts val="3667"/>
               </a:lnSpc>
             </a:pPr>
-            <a:endParaRPr lang="en-US" sz="2799" u="none" spc="55">
+            <a:endParaRPr lang="en-US" sz="2799" u="none" spc="55" dirty="0">
               <a:solidFill>
                 <a:srgbClr val="000000"/>
               </a:solidFill>
@@ -4821,16 +5110,124 @@
               <a:buChar char="•"/>
             </a:pPr>
             <a:r>
-              <a:rPr lang="en-US" sz="2799" u="none" spc="55">
-                <a:solidFill>
-                  <a:srgbClr val="000000"/>
-                </a:solidFill>
-                <a:latin typeface="Codec Pro"/>
-                <a:ea typeface="Codec Pro"/>
-                <a:cs typeface="Codec Pro"/>
-                <a:sym typeface="Codec Pro"/>
-              </a:rPr>
-              <a:t>Identificación de grupos de propiedades con características similares.</a:t>
+              <a:rPr lang="en-US" sz="2799" u="none" spc="55" dirty="0" err="1">
+                <a:solidFill>
+                  <a:srgbClr val="000000"/>
+                </a:solidFill>
+                <a:latin typeface="Codec Pro"/>
+                <a:ea typeface="Codec Pro"/>
+                <a:cs typeface="Codec Pro"/>
+                <a:sym typeface="Codec Pro"/>
+              </a:rPr>
+              <a:t>Identificación</a:t>
+            </a:r>
+            <a:r>
+              <a:rPr lang="en-US" sz="2799" u="none" spc="55" dirty="0">
+                <a:solidFill>
+                  <a:srgbClr val="000000"/>
+                </a:solidFill>
+                <a:latin typeface="Codec Pro"/>
+                <a:ea typeface="Codec Pro"/>
+                <a:cs typeface="Codec Pro"/>
+                <a:sym typeface="Codec Pro"/>
+              </a:rPr>
+              <a:t> de </a:t>
+            </a:r>
+            <a:r>
+              <a:rPr lang="en-US" sz="2799" u="none" spc="55" dirty="0" err="1">
+                <a:solidFill>
+                  <a:srgbClr val="000000"/>
+                </a:solidFill>
+                <a:latin typeface="Codec Pro"/>
+                <a:ea typeface="Codec Pro"/>
+                <a:cs typeface="Codec Pro"/>
+                <a:sym typeface="Codec Pro"/>
+              </a:rPr>
+              <a:t>grupos</a:t>
+            </a:r>
+            <a:r>
+              <a:rPr lang="en-US" sz="2799" u="none" spc="55" dirty="0">
+                <a:solidFill>
+                  <a:srgbClr val="000000"/>
+                </a:solidFill>
+                <a:latin typeface="Codec Pro"/>
+                <a:ea typeface="Codec Pro"/>
+                <a:cs typeface="Codec Pro"/>
+                <a:sym typeface="Codec Pro"/>
+              </a:rPr>
+              <a:t> de </a:t>
+            </a:r>
+            <a:r>
+              <a:rPr lang="en-US" sz="2799" u="none" spc="55" dirty="0" err="1">
+                <a:solidFill>
+                  <a:srgbClr val="000000"/>
+                </a:solidFill>
+                <a:latin typeface="Codec Pro"/>
+                <a:ea typeface="Codec Pro"/>
+                <a:cs typeface="Codec Pro"/>
+                <a:sym typeface="Codec Pro"/>
+              </a:rPr>
+              <a:t>propiedades</a:t>
+            </a:r>
+            <a:r>
+              <a:rPr lang="en-US" sz="2799" u="none" spc="55" dirty="0">
+                <a:solidFill>
+                  <a:srgbClr val="000000"/>
+                </a:solidFill>
+                <a:latin typeface="Codec Pro"/>
+                <a:ea typeface="Codec Pro"/>
+                <a:cs typeface="Codec Pro"/>
+                <a:sym typeface="Codec Pro"/>
+              </a:rPr>
+              <a:t> con </a:t>
+            </a:r>
+            <a:r>
+              <a:rPr lang="en-US" sz="2799" u="none" spc="55" dirty="0" err="1">
+                <a:solidFill>
+                  <a:srgbClr val="000000"/>
+                </a:solidFill>
+                <a:latin typeface="Codec Pro"/>
+                <a:ea typeface="Codec Pro"/>
+                <a:cs typeface="Codec Pro"/>
+                <a:sym typeface="Codec Pro"/>
+              </a:rPr>
+              <a:t>características</a:t>
+            </a:r>
+            <a:r>
+              <a:rPr lang="en-US" sz="2799" u="none" spc="55" dirty="0">
+                <a:solidFill>
+                  <a:srgbClr val="000000"/>
+                </a:solidFill>
+                <a:latin typeface="Codec Pro"/>
+                <a:ea typeface="Codec Pro"/>
+                <a:cs typeface="Codec Pro"/>
+                <a:sym typeface="Codec Pro"/>
+              </a:rPr>
+              <a:t> </a:t>
+            </a:r>
+            <a:r>
+              <a:rPr lang="en-US" sz="2799" u="none" spc="55" dirty="0" err="1">
+                <a:solidFill>
+                  <a:srgbClr val="000000"/>
+                </a:solidFill>
+                <a:latin typeface="Codec Pro"/>
+                <a:ea typeface="Codec Pro"/>
+                <a:cs typeface="Codec Pro"/>
+                <a:sym typeface="Codec Pro"/>
+              </a:rPr>
+              <a:t>similares</a:t>
+            </a:r>
+            <a:r>
+              <a:rPr lang="en-US" sz="2799" u="none" spc="55" dirty="0">
+                <a:solidFill>
+                  <a:srgbClr val="000000"/>
+                </a:solidFill>
+                <a:latin typeface="Codec Pro"/>
+                <a:ea typeface="Codec Pro"/>
+                <a:cs typeface="Codec Pro"/>
+                <a:sym typeface="Codec Pro"/>
+              </a:rPr>
+              <a:t>.</a:t>
             </a:r>
           </a:p>
           <a:p>
@@ -4839,7 +5236,7 @@
                 <a:spcPts val="4322"/>
               </a:lnSpc>
             </a:pPr>
-            <a:endParaRPr lang="en-US" sz="2799" u="none" spc="55">
+            <a:endParaRPr lang="en-US" sz="2799" u="none" spc="55" dirty="0">
               <a:solidFill>
                 <a:srgbClr val="000000"/>
               </a:solidFill>
@@ -4858,16 +5255,148 @@
               <a:buChar char="•"/>
             </a:pPr>
             <a:r>
-              <a:rPr lang="en-US" sz="2799" u="none" spc="55">
-                <a:solidFill>
-                  <a:srgbClr val="000000"/>
-                </a:solidFill>
-                <a:latin typeface="Codec Pro"/>
-                <a:ea typeface="Codec Pro"/>
-                <a:cs typeface="Codec Pro"/>
-                <a:sym typeface="Codec Pro"/>
-              </a:rPr>
-              <a:t>Análisis de la evolución temporal de los precios del m² en cada cluster.</a:t>
+              <a:rPr lang="en-US" sz="2799" u="none" spc="55" dirty="0" err="1">
+                <a:solidFill>
+                  <a:srgbClr val="000000"/>
+                </a:solidFill>
+                <a:latin typeface="Codec Pro"/>
+                <a:ea typeface="Codec Pro"/>
+                <a:cs typeface="Codec Pro"/>
+                <a:sym typeface="Codec Pro"/>
+              </a:rPr>
+              <a:t>Análisis</a:t>
+            </a:r>
+            <a:r>
+              <a:rPr lang="en-US" sz="2799" u="none" spc="55" dirty="0">
+                <a:solidFill>
+                  <a:srgbClr val="000000"/>
+                </a:solidFill>
+                <a:latin typeface="Codec Pro"/>
+                <a:ea typeface="Codec Pro"/>
+                <a:cs typeface="Codec Pro"/>
+                <a:sym typeface="Codec Pro"/>
+              </a:rPr>
+              <a:t> de la </a:t>
+            </a:r>
+            <a:r>
+              <a:rPr lang="en-US" sz="2799" u="none" spc="55" dirty="0" err="1">
+                <a:solidFill>
+                  <a:srgbClr val="000000"/>
+                </a:solidFill>
+                <a:latin typeface="Codec Pro"/>
+                <a:ea typeface="Codec Pro"/>
+                <a:cs typeface="Codec Pro"/>
+                <a:sym typeface="Codec Pro"/>
+              </a:rPr>
+              <a:t>evolución</a:t>
+            </a:r>
+            <a:r>
+              <a:rPr lang="en-US" sz="2799" u="none" spc="55" dirty="0">
+                <a:solidFill>
+                  <a:srgbClr val="000000"/>
+                </a:solidFill>
+                <a:latin typeface="Codec Pro"/>
+                <a:ea typeface="Codec Pro"/>
+                <a:cs typeface="Codec Pro"/>
+                <a:sym typeface="Codec Pro"/>
+              </a:rPr>
+              <a:t> temporal de </a:t>
+            </a:r>
+            <a:r>
+              <a:rPr lang="en-US" sz="2799" u="none" spc="55" dirty="0" err="1">
+                <a:solidFill>
+                  <a:srgbClr val="000000"/>
+                </a:solidFill>
+                <a:latin typeface="Codec Pro"/>
+                <a:ea typeface="Codec Pro"/>
+                <a:cs typeface="Codec Pro"/>
+                <a:sym typeface="Codec Pro"/>
+              </a:rPr>
+              <a:t>los</a:t>
+            </a:r>
+            <a:r>
+              <a:rPr lang="en-US" sz="2799" u="none" spc="55" dirty="0">
+                <a:solidFill>
+                  <a:srgbClr val="000000"/>
+                </a:solidFill>
+                <a:latin typeface="Codec Pro"/>
+                <a:ea typeface="Codec Pro"/>
+                <a:cs typeface="Codec Pro"/>
+                <a:sym typeface="Codec Pro"/>
+              </a:rPr>
+              <a:t> </a:t>
+            </a:r>
+            <a:r>
+              <a:rPr lang="en-US" sz="2799" u="none" spc="55" dirty="0" err="1">
+                <a:solidFill>
+                  <a:srgbClr val="000000"/>
+                </a:solidFill>
+                <a:latin typeface="Codec Pro"/>
+                <a:ea typeface="Codec Pro"/>
+                <a:cs typeface="Codec Pro"/>
+                <a:sym typeface="Codec Pro"/>
+              </a:rPr>
+              <a:t>precios</a:t>
+            </a:r>
+            <a:r>
+              <a:rPr lang="en-US" sz="2799" u="none" spc="55" dirty="0">
+                <a:solidFill>
+                  <a:srgbClr val="000000"/>
+                </a:solidFill>
+                <a:latin typeface="Codec Pro"/>
+                <a:ea typeface="Codec Pro"/>
+                <a:cs typeface="Codec Pro"/>
+                <a:sym typeface="Codec Pro"/>
+              </a:rPr>
+              <a:t> del m² </a:t>
+            </a:r>
+            <a:r>
+              <a:rPr lang="en-US" sz="2799" u="none" spc="55" dirty="0" err="1">
+                <a:solidFill>
+                  <a:srgbClr val="000000"/>
+                </a:solidFill>
+                <a:latin typeface="Codec Pro"/>
+                <a:ea typeface="Codec Pro"/>
+                <a:cs typeface="Codec Pro"/>
+                <a:sym typeface="Codec Pro"/>
+              </a:rPr>
+              <a:t>en</a:t>
+            </a:r>
+            <a:r>
+              <a:rPr lang="en-US" sz="2799" u="none" spc="55" dirty="0">
+                <a:solidFill>
+                  <a:srgbClr val="000000"/>
+                </a:solidFill>
+                <a:latin typeface="Codec Pro"/>
+                <a:ea typeface="Codec Pro"/>
+                <a:cs typeface="Codec Pro"/>
+                <a:sym typeface="Codec Pro"/>
+              </a:rPr>
+              <a:t> </a:t>
+            </a:r>
+            <a:r>
+              <a:rPr lang="en-US" sz="2799" u="none" spc="55" dirty="0" err="1">
+                <a:solidFill>
+                  <a:srgbClr val="000000"/>
+                </a:solidFill>
+                <a:latin typeface="Codec Pro"/>
+                <a:ea typeface="Codec Pro"/>
+                <a:cs typeface="Codec Pro"/>
+                <a:sym typeface="Codec Pro"/>
+              </a:rPr>
+              <a:t>cada</a:t>
+            </a:r>
+            <a:r>
+              <a:rPr lang="en-US" sz="2799" u="none" spc="55" dirty="0">
+                <a:solidFill>
+                  <a:srgbClr val="000000"/>
+                </a:solidFill>
+                <a:latin typeface="Codec Pro"/>
+                <a:ea typeface="Codec Pro"/>
+                <a:cs typeface="Codec Pro"/>
+                <a:sym typeface="Codec Pro"/>
+              </a:rPr>
+              <a:t> cluster.</a:t>
             </a:r>
           </a:p>
           <a:p>
@@ -4876,7 +5405,7 @@
                 <a:spcPts val="3667"/>
               </a:lnSpc>
             </a:pPr>
-            <a:endParaRPr lang="en-US" sz="2799" u="none" spc="55">
+            <a:endParaRPr lang="en-US" sz="2799" u="none" spc="55" dirty="0">
               <a:solidFill>
                 <a:srgbClr val="000000"/>
               </a:solidFill>
@@ -4895,16 +5424,172 @@
               <a:buChar char="•"/>
             </a:pPr>
             <a:r>
-              <a:rPr lang="en-US" sz="2799" u="none" spc="55">
-                <a:solidFill>
-                  <a:srgbClr val="000000"/>
-                </a:solidFill>
-                <a:latin typeface="Codec Pro"/>
-                <a:ea typeface="Codec Pro"/>
-                <a:cs typeface="Codec Pro"/>
-                <a:sym typeface="Codec Pro"/>
-              </a:rPr>
-              <a:t>Evaluar cómo cambian los patrones del mercado frente a shocks o ciclos.</a:t>
+              <a:rPr lang="en-US" sz="2799" u="none" spc="55" dirty="0" err="1">
+                <a:solidFill>
+                  <a:srgbClr val="000000"/>
+                </a:solidFill>
+                <a:latin typeface="Codec Pro"/>
+                <a:ea typeface="Codec Pro"/>
+                <a:cs typeface="Codec Pro"/>
+                <a:sym typeface="Codec Pro"/>
+              </a:rPr>
+              <a:t>Evaluar</a:t>
+            </a:r>
+            <a:r>
+              <a:rPr lang="en-US" sz="2799" u="none" spc="55" dirty="0">
+                <a:solidFill>
+                  <a:srgbClr val="000000"/>
+                </a:solidFill>
+                <a:latin typeface="Codec Pro"/>
+                <a:ea typeface="Codec Pro"/>
+                <a:cs typeface="Codec Pro"/>
+                <a:sym typeface="Codec Pro"/>
+              </a:rPr>
+              <a:t> </a:t>
+            </a:r>
+            <a:r>
+              <a:rPr lang="en-US" sz="2799" u="none" spc="55" dirty="0" err="1">
+                <a:solidFill>
+                  <a:srgbClr val="000000"/>
+                </a:solidFill>
+                <a:latin typeface="Codec Pro"/>
+                <a:ea typeface="Codec Pro"/>
+                <a:cs typeface="Codec Pro"/>
+                <a:sym typeface="Codec Pro"/>
+              </a:rPr>
+              <a:t>cómo</a:t>
+            </a:r>
+            <a:r>
+              <a:rPr lang="en-US" sz="2799" u="none" spc="55" dirty="0">
+                <a:solidFill>
+                  <a:srgbClr val="000000"/>
+                </a:solidFill>
+                <a:latin typeface="Codec Pro"/>
+                <a:ea typeface="Codec Pro"/>
+                <a:cs typeface="Codec Pro"/>
+                <a:sym typeface="Codec Pro"/>
+              </a:rPr>
+              <a:t> </a:t>
+            </a:r>
+            <a:r>
+              <a:rPr lang="en-US" sz="2799" u="none" spc="55" dirty="0" err="1">
+                <a:solidFill>
+                  <a:srgbClr val="000000"/>
+                </a:solidFill>
+                <a:latin typeface="Codec Pro"/>
+                <a:ea typeface="Codec Pro"/>
+                <a:cs typeface="Codec Pro"/>
+                <a:sym typeface="Codec Pro"/>
+              </a:rPr>
+              <a:t>cambian</a:t>
+            </a:r>
+            <a:r>
+              <a:rPr lang="en-US" sz="2799" u="none" spc="55" dirty="0">
+                <a:solidFill>
+                  <a:srgbClr val="000000"/>
+                </a:solidFill>
+                <a:latin typeface="Codec Pro"/>
+                <a:ea typeface="Codec Pro"/>
+                <a:cs typeface="Codec Pro"/>
+                <a:sym typeface="Codec Pro"/>
+              </a:rPr>
+              <a:t> </a:t>
+            </a:r>
+            <a:r>
+              <a:rPr lang="en-US" sz="2799" u="none" spc="55" dirty="0" err="1">
+                <a:solidFill>
+                  <a:srgbClr val="000000"/>
+                </a:solidFill>
+                <a:latin typeface="Codec Pro"/>
+                <a:ea typeface="Codec Pro"/>
+                <a:cs typeface="Codec Pro"/>
+                <a:sym typeface="Codec Pro"/>
+              </a:rPr>
+              <a:t>los</a:t>
+            </a:r>
+            <a:r>
+              <a:rPr lang="en-US" sz="2799" u="none" spc="55" dirty="0">
+                <a:solidFill>
+                  <a:srgbClr val="000000"/>
+                </a:solidFill>
+                <a:latin typeface="Codec Pro"/>
+                <a:ea typeface="Codec Pro"/>
+                <a:cs typeface="Codec Pro"/>
+                <a:sym typeface="Codec Pro"/>
+              </a:rPr>
+              <a:t> </a:t>
+            </a:r>
+            <a:r>
+              <a:rPr lang="en-US" sz="2799" u="none" spc="55" dirty="0" err="1">
+                <a:solidFill>
+                  <a:srgbClr val="000000"/>
+                </a:solidFill>
+                <a:latin typeface="Codec Pro"/>
+                <a:ea typeface="Codec Pro"/>
+                <a:cs typeface="Codec Pro"/>
+                <a:sym typeface="Codec Pro"/>
+              </a:rPr>
+              <a:t>patrones</a:t>
+            </a:r>
+            <a:r>
+              <a:rPr lang="en-US" sz="2799" u="none" spc="55" dirty="0">
+                <a:solidFill>
+                  <a:srgbClr val="000000"/>
+                </a:solidFill>
+                <a:latin typeface="Codec Pro"/>
+                <a:ea typeface="Codec Pro"/>
+                <a:cs typeface="Codec Pro"/>
+                <a:sym typeface="Codec Pro"/>
+              </a:rPr>
+              <a:t> del mercado </a:t>
+            </a:r>
+            <a:r>
+              <a:rPr lang="en-US" sz="2799" u="none" spc="55" dirty="0" err="1">
+                <a:solidFill>
+                  <a:srgbClr val="000000"/>
+                </a:solidFill>
+                <a:latin typeface="Codec Pro"/>
+                <a:ea typeface="Codec Pro"/>
+                <a:cs typeface="Codec Pro"/>
+                <a:sym typeface="Codec Pro"/>
+              </a:rPr>
+              <a:t>frente</a:t>
+            </a:r>
+            <a:r>
+              <a:rPr lang="en-US" sz="2799" u="none" spc="55" dirty="0">
+                <a:solidFill>
+                  <a:srgbClr val="000000"/>
+                </a:solidFill>
+                <a:latin typeface="Codec Pro"/>
+                <a:ea typeface="Codec Pro"/>
+                <a:cs typeface="Codec Pro"/>
+                <a:sym typeface="Codec Pro"/>
+              </a:rPr>
+              <a:t> a shocks o </a:t>
+            </a:r>
+            <a:r>
+              <a:rPr lang="en-US" sz="2799" u="none" spc="55" dirty="0" err="1">
+                <a:solidFill>
+                  <a:srgbClr val="000000"/>
+                </a:solidFill>
+                <a:latin typeface="Codec Pro"/>
+                <a:ea typeface="Codec Pro"/>
+                <a:cs typeface="Codec Pro"/>
+                <a:sym typeface="Codec Pro"/>
+              </a:rPr>
+              <a:t>ciclos</a:t>
+            </a:r>
+            <a:r>
+              <a:rPr lang="en-US" sz="2799" u="none" spc="55" dirty="0">
+                <a:solidFill>
+                  <a:srgbClr val="000000"/>
+                </a:solidFill>
+                <a:latin typeface="Codec Pro"/>
+                <a:ea typeface="Codec Pro"/>
+                <a:cs typeface="Codec Pro"/>
+                <a:sym typeface="Codec Pro"/>
+              </a:rPr>
+              <a:t>.</a:t>
             </a:r>
           </a:p>
           <a:p>
@@ -4913,7 +5598,7 @@
                 <a:spcPts val="4453"/>
               </a:lnSpc>
             </a:pPr>
-            <a:endParaRPr lang="en-US" sz="2799" u="none" spc="55">
+            <a:endParaRPr lang="en-US" sz="2799" u="none" spc="55" dirty="0">
               <a:solidFill>
                 <a:srgbClr val="000000"/>
               </a:solidFill>
@@ -4932,16 +5617,172 @@
               <a:buChar char="•"/>
             </a:pPr>
             <a:r>
-              <a:rPr lang="en-US" sz="2799" u="none" spc="55">
-                <a:solidFill>
-                  <a:srgbClr val="000000"/>
-                </a:solidFill>
-                <a:latin typeface="Codec Pro"/>
-                <a:ea typeface="Codec Pro"/>
-                <a:cs typeface="Codec Pro"/>
-                <a:sym typeface="Codec Pro"/>
-              </a:rPr>
-              <a:t>Generar información útil para inversores, desarrolladores y análisis urbano.</a:t>
+              <a:rPr lang="en-US" sz="2799" u="none" spc="55" dirty="0" err="1">
+                <a:solidFill>
+                  <a:srgbClr val="000000"/>
+                </a:solidFill>
+                <a:latin typeface="Codec Pro"/>
+                <a:ea typeface="Codec Pro"/>
+                <a:cs typeface="Codec Pro"/>
+                <a:sym typeface="Codec Pro"/>
+              </a:rPr>
+              <a:t>Generar</a:t>
+            </a:r>
+            <a:r>
+              <a:rPr lang="en-US" sz="2799" u="none" spc="55" dirty="0">
+                <a:solidFill>
+                  <a:srgbClr val="000000"/>
+                </a:solidFill>
+                <a:latin typeface="Codec Pro"/>
+                <a:ea typeface="Codec Pro"/>
+                <a:cs typeface="Codec Pro"/>
+                <a:sym typeface="Codec Pro"/>
+              </a:rPr>
+              <a:t> </a:t>
+            </a:r>
+            <a:r>
+              <a:rPr lang="en-US" sz="2799" u="none" spc="55" dirty="0" err="1">
+                <a:solidFill>
+                  <a:srgbClr val="000000"/>
+                </a:solidFill>
+                <a:latin typeface="Codec Pro"/>
+                <a:ea typeface="Codec Pro"/>
+                <a:cs typeface="Codec Pro"/>
+                <a:sym typeface="Codec Pro"/>
+              </a:rPr>
+              <a:t>información</a:t>
+            </a:r>
+            <a:r>
+              <a:rPr lang="en-US" sz="2799" u="none" spc="55" dirty="0">
+                <a:solidFill>
+                  <a:srgbClr val="000000"/>
+                </a:solidFill>
+                <a:latin typeface="Codec Pro"/>
+                <a:ea typeface="Codec Pro"/>
+                <a:cs typeface="Codec Pro"/>
+                <a:sym typeface="Codec Pro"/>
+              </a:rPr>
+              <a:t> </a:t>
+            </a:r>
+            <a:r>
+              <a:rPr lang="en-US" sz="2799" u="none" spc="55" dirty="0" err="1">
+                <a:solidFill>
+                  <a:srgbClr val="000000"/>
+                </a:solidFill>
+                <a:latin typeface="Codec Pro"/>
+                <a:ea typeface="Codec Pro"/>
+                <a:cs typeface="Codec Pro"/>
+                <a:sym typeface="Codec Pro"/>
+              </a:rPr>
+              <a:t>útil</a:t>
+            </a:r>
+            <a:r>
+              <a:rPr lang="en-US" sz="2799" u="none" spc="55" dirty="0">
+                <a:solidFill>
+                  <a:srgbClr val="000000"/>
+                </a:solidFill>
+                <a:latin typeface="Codec Pro"/>
+                <a:ea typeface="Codec Pro"/>
+                <a:cs typeface="Codec Pro"/>
+                <a:sym typeface="Codec Pro"/>
+              </a:rPr>
+              <a:t> para </a:t>
+            </a:r>
+            <a:r>
+              <a:rPr lang="en-US" sz="2799" u="none" spc="55" dirty="0" err="1">
+                <a:solidFill>
+                  <a:srgbClr val="000000"/>
+                </a:solidFill>
+                <a:latin typeface="Codec Pro"/>
+                <a:ea typeface="Codec Pro"/>
+                <a:cs typeface="Codec Pro"/>
+                <a:sym typeface="Codec Pro"/>
+              </a:rPr>
+              <a:t>inversores</a:t>
+            </a:r>
+            <a:r>
+              <a:rPr lang="en-US" sz="2799" u="none" spc="55" dirty="0">
+                <a:solidFill>
+                  <a:srgbClr val="000000"/>
+                </a:solidFill>
+                <a:latin typeface="Codec Pro"/>
+                <a:ea typeface="Codec Pro"/>
+                <a:cs typeface="Codec Pro"/>
+                <a:sym typeface="Codec Pro"/>
+              </a:rPr>
+              <a:t>, </a:t>
+            </a:r>
+            <a:r>
+              <a:rPr lang="en-US" sz="2799" u="none" spc="55" dirty="0" err="1">
+                <a:solidFill>
+                  <a:srgbClr val="000000"/>
+                </a:solidFill>
+                <a:latin typeface="Codec Pro"/>
+                <a:ea typeface="Codec Pro"/>
+                <a:cs typeface="Codec Pro"/>
+                <a:sym typeface="Codec Pro"/>
+              </a:rPr>
+              <a:t>desarrolladores</a:t>
+            </a:r>
+            <a:r>
+              <a:rPr lang="en-US" sz="2799" u="none" spc="55" dirty="0">
+                <a:solidFill>
+                  <a:srgbClr val="000000"/>
+                </a:solidFill>
+                <a:latin typeface="Codec Pro"/>
+                <a:ea typeface="Codec Pro"/>
+                <a:cs typeface="Codec Pro"/>
+                <a:sym typeface="Codec Pro"/>
+              </a:rPr>
+              <a:t> y </a:t>
+            </a:r>
+            <a:r>
+              <a:rPr lang="en-US" sz="2799" u="none" spc="55" dirty="0" err="1">
+                <a:solidFill>
+                  <a:srgbClr val="000000"/>
+                </a:solidFill>
+                <a:latin typeface="Codec Pro"/>
+                <a:ea typeface="Codec Pro"/>
+                <a:cs typeface="Codec Pro"/>
+                <a:sym typeface="Codec Pro"/>
+              </a:rPr>
+              <a:t>análisis</a:t>
+            </a:r>
+            <a:r>
+              <a:rPr lang="en-US" sz="2799" u="none" spc="55" dirty="0">
+                <a:solidFill>
+                  <a:srgbClr val="000000"/>
+                </a:solidFill>
+                <a:latin typeface="Codec Pro"/>
+                <a:ea typeface="Codec Pro"/>
+                <a:cs typeface="Codec Pro"/>
+                <a:sym typeface="Codec Pro"/>
+              </a:rPr>
+              <a:t> </a:t>
+            </a:r>
+            <a:r>
+              <a:rPr lang="en-US" sz="2799" u="none" spc="55" dirty="0" err="1">
+                <a:solidFill>
+                  <a:srgbClr val="000000"/>
+                </a:solidFill>
+                <a:latin typeface="Codec Pro"/>
+                <a:ea typeface="Codec Pro"/>
+                <a:cs typeface="Codec Pro"/>
+                <a:sym typeface="Codec Pro"/>
+              </a:rPr>
+              <a:t>urbano</a:t>
+            </a:r>
+            <a:r>
+              <a:rPr lang="en-US" sz="2799" u="none" spc="55" dirty="0">
+                <a:solidFill>
+                  <a:srgbClr val="000000"/>
+                </a:solidFill>
+                <a:latin typeface="Codec Pro"/>
+                <a:ea typeface="Codec Pro"/>
+                <a:cs typeface="Codec Pro"/>
+                <a:sym typeface="Codec Pro"/>
+              </a:rPr>
+              <a:t>.</a:t>
             </a:r>
           </a:p>
         </p:txBody>
@@ -4987,6 +5828,36 @@
           </a:p>
         </p:txBody>
       </p:sp>
+      <p:sp>
+        <p:nvSpPr>
+          <p:cNvPr id="7" name="Marcador de número de diapositiva 6">
+            <a:extLst>
+              <a:ext uri="{FF2B5EF4-FFF2-40B4-BE49-F238E27FC236}">
+                <a16:creationId xmlns:a16="http://schemas.microsoft.com/office/drawing/2014/main" id="{A159EAD6-FD8D-7FEE-4CB9-781FD0299B66}"/>
+              </a:ext>
+            </a:extLst>
+          </p:cNvPr>
+          <p:cNvSpPr>
+            <a:spLocks noGrp="1"/>
+          </p:cNvSpPr>
+          <p:nvPr>
+            <p:ph type="sldNum" sz="quarter" idx="12"/>
+          </p:nvPr>
+        </p:nvSpPr>
+        <p:spPr/>
+        <p:txBody>
+          <a:bodyPr/>
+          <a:lstStyle/>
+          <a:p>
+            <a:fld id="{B6F15528-21DE-4FAA-801E-634DDDAF4B2B}" type="slidenum">
+              <a:rPr lang="en-US" smtClean="0"/>
+              <a:pPr/>
+              <a:t>2</a:t>
+            </a:fld>
+            <a:endParaRPr lang="en-US"/>
+          </a:p>
+        </p:txBody>
+      </p:sp>
     </p:spTree>
   </p:cSld>
   <p:clrMapOvr>
@@ -4995,7 +5866,7 @@
 </p:sld>
 </file>
 
-<file path=ppt/slides/slide4.xml><?xml version="1.0" encoding="utf-8"?>
+<file path=ppt/slides/slide3.xml><?xml version="1.0" encoding="utf-8"?>
 <p:sld xmlns:a="http://schemas.openxmlformats.org/drawingml/2006/main" xmlns:r="http://schemas.openxmlformats.org/officeDocument/2006/relationships" xmlns:p="http://schemas.openxmlformats.org/presentationml/2006/main">
   <p:cSld>
     <p:spTree>
@@ -5110,8 +5981,8 @@
         </p:nvSpPr>
         <p:spPr>
           <a:xfrm>
-            <a:off x="732029" y="4293314"/>
-            <a:ext cx="17310674" cy="5066284"/>
+            <a:off x="685800" y="3679530"/>
+            <a:ext cx="17310674" cy="6656374"/>
           </a:xfrm>
           <a:prstGeom prst="rect">
             <a:avLst/>
@@ -5127,32 +5998,194 @@
               <a:lnSpc>
                 <a:spcPts val="3667"/>
               </a:lnSpc>
+              <a:spcBef>
+                <a:spcPts val="600"/>
+              </a:spcBef>
+              <a:spcAft>
+                <a:spcPts val="600"/>
+              </a:spcAft>
               <a:buFont typeface="Arial"/>
               <a:buChar char="•"/>
             </a:pPr>
             <a:r>
-              <a:rPr lang="en-US" sz="2799" spc="55">
-                <a:solidFill>
-                  <a:srgbClr val="000000"/>
-                </a:solidFill>
-                <a:latin typeface="Codec Pro"/>
-                <a:ea typeface="Codec Pro"/>
-                <a:cs typeface="Codec Pro"/>
-                <a:sym typeface="Codec Pro"/>
-              </a:rPr>
-              <a:t>Datos mensuales de </a:t>
-            </a:r>
-            <a:r>
-              <a:rPr lang="en-US" sz="2799" u="none" spc="55">
-                <a:solidFill>
-                  <a:srgbClr val="000000"/>
-                </a:solidFill>
-                <a:latin typeface="Codec Pro"/>
-                <a:ea typeface="Codec Pro"/>
-                <a:cs typeface="Codec Pro"/>
-                <a:sym typeface="Codec Pro"/>
-              </a:rPr>
-              <a:t>publicaciones de ZonaProp, último día hábil de cada mes.</a:t>
+              <a:rPr lang="en-US" sz="2799" spc="55" dirty="0">
+                <a:solidFill>
+                  <a:srgbClr val="000000"/>
+                </a:solidFill>
+                <a:latin typeface="Codec Pro"/>
+                <a:ea typeface="Codec Pro"/>
+                <a:cs typeface="Codec Pro"/>
+                <a:sym typeface="Codec Pro"/>
+              </a:rPr>
+              <a:t>Datos </a:t>
+            </a:r>
+            <a:r>
+              <a:rPr lang="en-US" sz="2799" spc="55" dirty="0" err="1">
+                <a:solidFill>
+                  <a:srgbClr val="000000"/>
+                </a:solidFill>
+                <a:latin typeface="Codec Pro"/>
+                <a:ea typeface="Codec Pro"/>
+                <a:cs typeface="Codec Pro"/>
+                <a:sym typeface="Codec Pro"/>
+              </a:rPr>
+              <a:t>mensuales</a:t>
+            </a:r>
+            <a:r>
+              <a:rPr lang="en-US" sz="2799" spc="55" dirty="0">
+                <a:solidFill>
+                  <a:srgbClr val="000000"/>
+                </a:solidFill>
+                <a:latin typeface="Codec Pro"/>
+                <a:ea typeface="Codec Pro"/>
+                <a:cs typeface="Codec Pro"/>
+                <a:sym typeface="Codec Pro"/>
+              </a:rPr>
+              <a:t> de </a:t>
+            </a:r>
+            <a:r>
+              <a:rPr lang="en-US" sz="2799" u="none" spc="55" dirty="0" err="1">
+                <a:solidFill>
+                  <a:srgbClr val="000000"/>
+                </a:solidFill>
+                <a:latin typeface="Codec Pro"/>
+                <a:ea typeface="Codec Pro"/>
+                <a:cs typeface="Codec Pro"/>
+                <a:sym typeface="Codec Pro"/>
+              </a:rPr>
+              <a:t>publicaciones</a:t>
+            </a:r>
+            <a:r>
+              <a:rPr lang="en-US" sz="2799" u="none" spc="55" dirty="0">
+                <a:solidFill>
+                  <a:srgbClr val="000000"/>
+                </a:solidFill>
+                <a:latin typeface="Codec Pro"/>
+                <a:ea typeface="Codec Pro"/>
+                <a:cs typeface="Codec Pro"/>
+                <a:sym typeface="Codec Pro"/>
+              </a:rPr>
+              <a:t> de </a:t>
+            </a:r>
+            <a:r>
+              <a:rPr lang="en-US" sz="2799" u="none" spc="55" dirty="0" err="1">
+                <a:solidFill>
+                  <a:srgbClr val="000000"/>
+                </a:solidFill>
+                <a:latin typeface="Codec Pro"/>
+                <a:ea typeface="Codec Pro"/>
+                <a:cs typeface="Codec Pro"/>
+                <a:sym typeface="Codec Pro"/>
+              </a:rPr>
+              <a:t>ZonaProp</a:t>
+            </a:r>
+            <a:r>
+              <a:rPr lang="en-US" sz="2799" u="none" spc="55" dirty="0">
+                <a:solidFill>
+                  <a:srgbClr val="000000"/>
+                </a:solidFill>
+                <a:latin typeface="Codec Pro"/>
+                <a:ea typeface="Codec Pro"/>
+                <a:cs typeface="Codec Pro"/>
+                <a:sym typeface="Codec Pro"/>
+              </a:rPr>
+              <a:t>, </a:t>
+            </a:r>
+            <a:r>
+              <a:rPr lang="en-US" sz="2799" u="none" spc="55" dirty="0" err="1">
+                <a:solidFill>
+                  <a:srgbClr val="000000"/>
+                </a:solidFill>
+                <a:latin typeface="Codec Pro"/>
+                <a:ea typeface="Codec Pro"/>
+                <a:cs typeface="Codec Pro"/>
+                <a:sym typeface="Codec Pro"/>
+              </a:rPr>
+              <a:t>último</a:t>
+            </a:r>
+            <a:r>
+              <a:rPr lang="en-US" sz="2799" u="none" spc="55" dirty="0">
+                <a:solidFill>
+                  <a:srgbClr val="000000"/>
+                </a:solidFill>
+                <a:latin typeface="Codec Pro"/>
+                <a:ea typeface="Codec Pro"/>
+                <a:cs typeface="Codec Pro"/>
+                <a:sym typeface="Codec Pro"/>
+              </a:rPr>
+              <a:t> día </a:t>
+            </a:r>
+            <a:r>
+              <a:rPr lang="en-US" sz="2799" u="none" spc="55" dirty="0" err="1">
+                <a:solidFill>
+                  <a:srgbClr val="000000"/>
+                </a:solidFill>
+                <a:latin typeface="Codec Pro"/>
+                <a:ea typeface="Codec Pro"/>
+                <a:cs typeface="Codec Pro"/>
+                <a:sym typeface="Codec Pro"/>
+              </a:rPr>
+              <a:t>hábil</a:t>
+            </a:r>
+            <a:r>
+              <a:rPr lang="en-US" sz="2799" u="none" spc="55" dirty="0">
+                <a:solidFill>
+                  <a:srgbClr val="000000"/>
+                </a:solidFill>
+                <a:latin typeface="Codec Pro"/>
+                <a:ea typeface="Codec Pro"/>
+                <a:cs typeface="Codec Pro"/>
+                <a:sym typeface="Codec Pro"/>
+              </a:rPr>
+              <a:t> de </a:t>
+            </a:r>
+            <a:r>
+              <a:rPr lang="en-US" sz="2799" u="none" spc="55" dirty="0" err="1">
+                <a:solidFill>
+                  <a:srgbClr val="000000"/>
+                </a:solidFill>
+                <a:latin typeface="Codec Pro"/>
+                <a:ea typeface="Codec Pro"/>
+                <a:cs typeface="Codec Pro"/>
+                <a:sym typeface="Codec Pro"/>
+              </a:rPr>
+              <a:t>cada</a:t>
+            </a:r>
+            <a:r>
+              <a:rPr lang="en-US" sz="2799" u="none" spc="55" dirty="0">
+                <a:solidFill>
+                  <a:srgbClr val="000000"/>
+                </a:solidFill>
+                <a:latin typeface="Codec Pro"/>
+                <a:ea typeface="Codec Pro"/>
+                <a:cs typeface="Codec Pro"/>
+                <a:sym typeface="Codec Pro"/>
+              </a:rPr>
+              <a:t> </a:t>
+            </a:r>
+            <a:r>
+              <a:rPr lang="en-US" sz="2799" u="none" spc="55" dirty="0" err="1">
+                <a:solidFill>
+                  <a:srgbClr val="000000"/>
+                </a:solidFill>
+                <a:latin typeface="Codec Pro"/>
+                <a:ea typeface="Codec Pro"/>
+                <a:cs typeface="Codec Pro"/>
+                <a:sym typeface="Codec Pro"/>
+              </a:rPr>
+              <a:t>mes</a:t>
+            </a:r>
+            <a:r>
+              <a:rPr lang="en-US" sz="2799" u="none" spc="55" dirty="0">
+                <a:solidFill>
+                  <a:srgbClr val="000000"/>
+                </a:solidFill>
+                <a:latin typeface="Codec Pro"/>
+                <a:ea typeface="Codec Pro"/>
+                <a:cs typeface="Codec Pro"/>
+                <a:sym typeface="Codec Pro"/>
+              </a:rPr>
+              <a:t>.</a:t>
             </a:r>
           </a:p>
           <a:p>
@@ -5160,20 +6193,62 @@
               <a:lnSpc>
                 <a:spcPts val="3667"/>
               </a:lnSpc>
+              <a:spcBef>
+                <a:spcPts val="600"/>
+              </a:spcBef>
+              <a:spcAft>
+                <a:spcPts val="600"/>
+              </a:spcAft>
               <a:buFont typeface="Arial"/>
               <a:buChar char="•"/>
             </a:pPr>
             <a:r>
-              <a:rPr lang="en-US" sz="2799" u="none" spc="55">
-                <a:solidFill>
-                  <a:srgbClr val="000000"/>
-                </a:solidFill>
-                <a:latin typeface="Codec Pro"/>
-                <a:ea typeface="Codec Pro"/>
-                <a:cs typeface="Codec Pro"/>
-                <a:sym typeface="Codec Pro"/>
-              </a:rPr>
-              <a:t>Período analizado: 2016–2025.</a:t>
+              <a:rPr lang="en-US" sz="2799" u="none" spc="55" dirty="0" err="1">
+                <a:solidFill>
+                  <a:srgbClr val="000000"/>
+                </a:solidFill>
+                <a:latin typeface="Codec Pro"/>
+                <a:ea typeface="Codec Pro"/>
+                <a:cs typeface="Codec Pro"/>
+                <a:sym typeface="Codec Pro"/>
+              </a:rPr>
+              <a:t>Período</a:t>
+            </a:r>
+            <a:r>
+              <a:rPr lang="en-US" sz="2799" u="none" spc="55" dirty="0">
+                <a:solidFill>
+                  <a:srgbClr val="000000"/>
+                </a:solidFill>
+                <a:latin typeface="Codec Pro"/>
+                <a:ea typeface="Codec Pro"/>
+                <a:cs typeface="Codec Pro"/>
+                <a:sym typeface="Codec Pro"/>
+              </a:rPr>
+              <a:t> </a:t>
+            </a:r>
+            <a:r>
+              <a:rPr lang="en-US" sz="2799" u="none" spc="55" dirty="0" err="1">
+                <a:solidFill>
+                  <a:srgbClr val="000000"/>
+                </a:solidFill>
+                <a:latin typeface="Codec Pro"/>
+                <a:ea typeface="Codec Pro"/>
+                <a:cs typeface="Codec Pro"/>
+                <a:sym typeface="Codec Pro"/>
+              </a:rPr>
+              <a:t>analizado</a:t>
+            </a:r>
+            <a:r>
+              <a:rPr lang="en-US" sz="2799" u="none" spc="55" dirty="0">
+                <a:solidFill>
+                  <a:srgbClr val="000000"/>
+                </a:solidFill>
+                <a:latin typeface="Codec Pro"/>
+                <a:ea typeface="Codec Pro"/>
+                <a:cs typeface="Codec Pro"/>
+                <a:sym typeface="Codec Pro"/>
+              </a:rPr>
+              <a:t>: 2016–2025.</a:t>
             </a:r>
           </a:p>
           <a:p>
@@ -5181,20 +6256,86 @@
               <a:lnSpc>
                 <a:spcPts val="3667"/>
               </a:lnSpc>
+              <a:spcBef>
+                <a:spcPts val="600"/>
+              </a:spcBef>
+              <a:spcAft>
+                <a:spcPts val="600"/>
+              </a:spcAft>
               <a:buFont typeface="Arial"/>
               <a:buChar char="•"/>
             </a:pPr>
             <a:r>
-              <a:rPr lang="en-US" sz="2799" u="none" spc="55">
-                <a:solidFill>
-                  <a:srgbClr val="000000"/>
-                </a:solidFill>
-                <a:latin typeface="Codec Pro"/>
-                <a:ea typeface="Codec Pro"/>
-                <a:cs typeface="Codec Pro"/>
-                <a:sym typeface="Codec Pro"/>
-              </a:rPr>
-              <a:t>Observaciones: departamentos, casas, PH, oficinas, etc.</a:t>
+              <a:rPr lang="en-US" sz="2799" u="none" spc="55" dirty="0" err="1">
+                <a:solidFill>
+                  <a:srgbClr val="000000"/>
+                </a:solidFill>
+                <a:latin typeface="Codec Pro"/>
+                <a:ea typeface="Codec Pro"/>
+                <a:cs typeface="Codec Pro"/>
+                <a:sym typeface="Codec Pro"/>
+              </a:rPr>
+              <a:t>Observaciones</a:t>
+            </a:r>
+            <a:r>
+              <a:rPr lang="en-US" sz="2799" u="none" spc="55" dirty="0">
+                <a:solidFill>
+                  <a:srgbClr val="000000"/>
+                </a:solidFill>
+                <a:latin typeface="Codec Pro"/>
+                <a:ea typeface="Codec Pro"/>
+                <a:cs typeface="Codec Pro"/>
+                <a:sym typeface="Codec Pro"/>
+              </a:rPr>
+              <a:t>: </a:t>
+            </a:r>
+            <a:r>
+              <a:rPr lang="en-US" sz="2799" u="none" spc="55" dirty="0" err="1">
+                <a:solidFill>
+                  <a:srgbClr val="000000"/>
+                </a:solidFill>
+                <a:latin typeface="Codec Pro"/>
+                <a:ea typeface="Codec Pro"/>
+                <a:cs typeface="Codec Pro"/>
+                <a:sym typeface="Codec Pro"/>
+              </a:rPr>
+              <a:t>departamentos</a:t>
+            </a:r>
+            <a:r>
+              <a:rPr lang="en-US" sz="2799" u="none" spc="55" dirty="0">
+                <a:solidFill>
+                  <a:srgbClr val="000000"/>
+                </a:solidFill>
+                <a:latin typeface="Codec Pro"/>
+                <a:ea typeface="Codec Pro"/>
+                <a:cs typeface="Codec Pro"/>
+                <a:sym typeface="Codec Pro"/>
+              </a:rPr>
+              <a:t>, casas, PH, </a:t>
+            </a:r>
+            <a:r>
+              <a:rPr lang="en-US" sz="2799" u="none" spc="55" dirty="0" err="1">
+                <a:solidFill>
+                  <a:srgbClr val="000000"/>
+                </a:solidFill>
+                <a:latin typeface="Codec Pro"/>
+                <a:ea typeface="Codec Pro"/>
+                <a:cs typeface="Codec Pro"/>
+                <a:sym typeface="Codec Pro"/>
+              </a:rPr>
+              <a:t>oficinas</a:t>
+            </a:r>
+            <a:r>
+              <a:rPr lang="en-US" sz="2799" u="none" spc="55" dirty="0">
+                <a:solidFill>
+                  <a:srgbClr val="000000"/>
+                </a:solidFill>
+                <a:latin typeface="Codec Pro"/>
+                <a:ea typeface="Codec Pro"/>
+                <a:cs typeface="Codec Pro"/>
+                <a:sym typeface="Codec Pro"/>
+              </a:rPr>
+              <a:t>, etc.</a:t>
             </a:r>
           </a:p>
           <a:p>
@@ -5202,20 +6343,419 @@
               <a:lnSpc>
                 <a:spcPts val="3667"/>
               </a:lnSpc>
+              <a:spcBef>
+                <a:spcPts val="600"/>
+              </a:spcBef>
+              <a:spcAft>
+                <a:spcPts val="600"/>
+              </a:spcAft>
               <a:buFont typeface="Arial"/>
               <a:buChar char="•"/>
             </a:pPr>
             <a:r>
-              <a:rPr lang="en-US" sz="2799" u="none" spc="55">
-                <a:solidFill>
-                  <a:srgbClr val="000000"/>
-                </a:solidFill>
-                <a:latin typeface="Codec Pro"/>
-                <a:ea typeface="Codec Pro"/>
-                <a:cs typeface="Codec Pro"/>
-                <a:sym typeface="Codec Pro"/>
-              </a:rPr>
-              <a:t>Variables principales:</a:t>
+              <a:rPr lang="en-US" sz="2799" u="none" spc="55" dirty="0">
+                <a:solidFill>
+                  <a:srgbClr val="000000"/>
+                </a:solidFill>
+                <a:latin typeface="Codec Pro"/>
+                <a:ea typeface="Codec Pro"/>
+                <a:cs typeface="Codec Pro"/>
+                <a:sym typeface="Codec Pro"/>
+              </a:rPr>
+              <a:t>Variables </a:t>
+            </a:r>
+            <a:r>
+              <a:rPr lang="en-US" sz="2799" u="none" spc="55" dirty="0" err="1">
+                <a:solidFill>
+                  <a:srgbClr val="000000"/>
+                </a:solidFill>
+                <a:latin typeface="Codec Pro"/>
+                <a:ea typeface="Codec Pro"/>
+                <a:cs typeface="Codec Pro"/>
+                <a:sym typeface="Codec Pro"/>
+              </a:rPr>
+              <a:t>principales</a:t>
+            </a:r>
+            <a:r>
+              <a:rPr lang="en-US" sz="2799" u="none" spc="55" dirty="0">
+                <a:solidFill>
+                  <a:srgbClr val="000000"/>
+                </a:solidFill>
+                <a:latin typeface="Codec Pro"/>
+                <a:ea typeface="Codec Pro"/>
+                <a:cs typeface="Codec Pro"/>
+                <a:sym typeface="Codec Pro"/>
+              </a:rPr>
+              <a:t>:</a:t>
+            </a:r>
+          </a:p>
+          <a:p>
+            <a:pPr marL="1216658" lvl="2" indent="-457200" algn="just">
+              <a:lnSpc>
+                <a:spcPts val="3667"/>
+              </a:lnSpc>
+              <a:spcBef>
+                <a:spcPts val="600"/>
+              </a:spcBef>
+              <a:spcAft>
+                <a:spcPts val="600"/>
+              </a:spcAft>
+              <a:buFont typeface="Wingdings" panose="05000000000000000000" pitchFamily="2" charset="2"/>
+              <a:buChar char="Ø"/>
+            </a:pPr>
+            <a:r>
+              <a:rPr lang="en-US" sz="2799" u="none" spc="55" dirty="0" err="1">
+                <a:solidFill>
+                  <a:srgbClr val="000000"/>
+                </a:solidFill>
+                <a:latin typeface="Codec Pro"/>
+                <a:ea typeface="Codec Pro"/>
+                <a:cs typeface="Codec Pro"/>
+                <a:sym typeface="Codec Pro"/>
+              </a:rPr>
+              <a:t>Precio</a:t>
+            </a:r>
+            <a:r>
+              <a:rPr lang="en-US" sz="2799" u="none" spc="55" dirty="0">
+                <a:solidFill>
+                  <a:srgbClr val="000000"/>
+                </a:solidFill>
+                <a:latin typeface="Codec Pro"/>
+                <a:ea typeface="Codec Pro"/>
+                <a:cs typeface="Codec Pro"/>
+                <a:sym typeface="Codec Pro"/>
+              </a:rPr>
+              <a:t> (</a:t>
+            </a:r>
+            <a:r>
+              <a:rPr lang="en-US" sz="2799" u="none" spc="55" dirty="0" err="1">
+                <a:solidFill>
+                  <a:srgbClr val="000000"/>
+                </a:solidFill>
+                <a:latin typeface="Codec Pro"/>
+                <a:ea typeface="Codec Pro"/>
+                <a:cs typeface="Codec Pro"/>
+                <a:sym typeface="Codec Pro"/>
+              </a:rPr>
+              <a:t>MontoOperacion</a:t>
+            </a:r>
+            <a:r>
+              <a:rPr lang="en-US" sz="2799" u="none" spc="55" dirty="0">
+                <a:solidFill>
+                  <a:srgbClr val="000000"/>
+                </a:solidFill>
+                <a:latin typeface="Codec Pro"/>
+                <a:ea typeface="Codec Pro"/>
+                <a:cs typeface="Codec Pro"/>
+                <a:sym typeface="Codec Pro"/>
+              </a:rPr>
+              <a:t>)</a:t>
+            </a:r>
+          </a:p>
+          <a:p>
+            <a:pPr marL="1216658" lvl="2" indent="-457200" algn="just">
+              <a:lnSpc>
+                <a:spcPts val="3667"/>
+              </a:lnSpc>
+              <a:spcBef>
+                <a:spcPts val="600"/>
+              </a:spcBef>
+              <a:spcAft>
+                <a:spcPts val="600"/>
+              </a:spcAft>
+              <a:buFont typeface="Wingdings" panose="05000000000000000000" pitchFamily="2" charset="2"/>
+              <a:buChar char="Ø"/>
+            </a:pPr>
+            <a:r>
+              <a:rPr lang="en-US" sz="2799" u="none" spc="55" dirty="0" err="1">
+                <a:solidFill>
+                  <a:srgbClr val="000000"/>
+                </a:solidFill>
+                <a:latin typeface="Codec Pro"/>
+                <a:ea typeface="Codec Pro"/>
+                <a:cs typeface="Codec Pro"/>
+                <a:sym typeface="Codec Pro"/>
+              </a:rPr>
+              <a:t>Superficie</a:t>
+            </a:r>
+            <a:r>
+              <a:rPr lang="en-US" sz="2799" u="none" spc="55" dirty="0">
+                <a:solidFill>
+                  <a:srgbClr val="000000"/>
+                </a:solidFill>
+                <a:latin typeface="Codec Pro"/>
+                <a:ea typeface="Codec Pro"/>
+                <a:cs typeface="Codec Pro"/>
+                <a:sym typeface="Codec Pro"/>
+              </a:rPr>
+              <a:t> total / </a:t>
+            </a:r>
+            <a:r>
+              <a:rPr lang="en-US" sz="2799" u="none" spc="55" dirty="0" err="1">
+                <a:solidFill>
+                  <a:srgbClr val="000000"/>
+                </a:solidFill>
+                <a:latin typeface="Codec Pro"/>
+                <a:ea typeface="Codec Pro"/>
+                <a:cs typeface="Codec Pro"/>
+                <a:sym typeface="Codec Pro"/>
+              </a:rPr>
+              <a:t>cubierta</a:t>
+            </a:r>
+            <a:r>
+              <a:rPr lang="en-US" sz="2799" u="none" spc="55" dirty="0">
+                <a:solidFill>
+                  <a:srgbClr val="000000"/>
+                </a:solidFill>
+                <a:latin typeface="Codec Pro"/>
+                <a:ea typeface="Codec Pro"/>
+                <a:cs typeface="Codec Pro"/>
+                <a:sym typeface="Codec Pro"/>
+              </a:rPr>
+              <a:t> / </a:t>
+            </a:r>
+            <a:r>
+              <a:rPr lang="en-US" sz="2799" u="none" spc="55" dirty="0" err="1">
+                <a:solidFill>
+                  <a:srgbClr val="000000"/>
+                </a:solidFill>
+                <a:latin typeface="Codec Pro"/>
+                <a:ea typeface="Codec Pro"/>
+                <a:cs typeface="Codec Pro"/>
+                <a:sym typeface="Codec Pro"/>
+              </a:rPr>
+              <a:t>descubierta</a:t>
+            </a:r>
+            <a:endParaRPr lang="en-US" sz="2799" u="none" spc="55" dirty="0">
+              <a:solidFill>
+                <a:srgbClr val="000000"/>
+              </a:solidFill>
+              <a:latin typeface="Codec Pro"/>
+              <a:ea typeface="Codec Pro"/>
+              <a:cs typeface="Codec Pro"/>
+              <a:sym typeface="Codec Pro"/>
+            </a:endParaRPr>
+          </a:p>
+          <a:p>
+            <a:pPr marL="1216658" lvl="2" indent="-457200" algn="just">
+              <a:lnSpc>
+                <a:spcPts val="3667"/>
+              </a:lnSpc>
+              <a:spcBef>
+                <a:spcPts val="600"/>
+              </a:spcBef>
+              <a:spcAft>
+                <a:spcPts val="600"/>
+              </a:spcAft>
+              <a:buFont typeface="Wingdings" panose="05000000000000000000" pitchFamily="2" charset="2"/>
+              <a:buChar char="Ø"/>
+            </a:pPr>
+            <a:r>
+              <a:rPr lang="en-US" sz="2799" u="none" spc="55" dirty="0" err="1">
+                <a:solidFill>
+                  <a:srgbClr val="000000"/>
+                </a:solidFill>
+                <a:latin typeface="Codec Pro"/>
+                <a:ea typeface="Codec Pro"/>
+                <a:cs typeface="Codec Pro"/>
+                <a:sym typeface="Codec Pro"/>
+              </a:rPr>
+              <a:t>Ubicación</a:t>
+            </a:r>
+            <a:r>
+              <a:rPr lang="en-US" sz="2799" u="none" spc="55" dirty="0">
+                <a:solidFill>
+                  <a:srgbClr val="000000"/>
+                </a:solidFill>
+                <a:latin typeface="Codec Pro"/>
+                <a:ea typeface="Codec Pro"/>
+                <a:cs typeface="Codec Pro"/>
+                <a:sym typeface="Codec Pro"/>
+              </a:rPr>
+              <a:t> (Provincia, </a:t>
+            </a:r>
+            <a:r>
+              <a:rPr lang="en-US" sz="2799" u="none" spc="55" dirty="0" err="1">
+                <a:solidFill>
+                  <a:srgbClr val="000000"/>
+                </a:solidFill>
+                <a:latin typeface="Codec Pro"/>
+                <a:ea typeface="Codec Pro"/>
+                <a:cs typeface="Codec Pro"/>
+                <a:sym typeface="Codec Pro"/>
+              </a:rPr>
+              <a:t>Localidad</a:t>
+            </a:r>
+            <a:r>
+              <a:rPr lang="en-US" sz="2799" u="none" spc="55" dirty="0">
+                <a:solidFill>
+                  <a:srgbClr val="000000"/>
+                </a:solidFill>
+                <a:latin typeface="Codec Pro"/>
+                <a:ea typeface="Codec Pro"/>
+                <a:cs typeface="Codec Pro"/>
+                <a:sym typeface="Codec Pro"/>
+              </a:rPr>
+              <a:t>, Barrio, </a:t>
+            </a:r>
+            <a:r>
+              <a:rPr lang="en-US" sz="2799" u="none" spc="55" dirty="0" err="1">
+                <a:solidFill>
+                  <a:srgbClr val="000000"/>
+                </a:solidFill>
+                <a:latin typeface="Codec Pro"/>
+                <a:ea typeface="Codec Pro"/>
+                <a:cs typeface="Codec Pro"/>
+                <a:sym typeface="Codec Pro"/>
+              </a:rPr>
+              <a:t>coordenadas</a:t>
+            </a:r>
+            <a:r>
+              <a:rPr lang="en-US" sz="2799" u="none" spc="55" dirty="0">
+                <a:solidFill>
+                  <a:srgbClr val="000000"/>
+                </a:solidFill>
+                <a:latin typeface="Codec Pro"/>
+                <a:ea typeface="Codec Pro"/>
+                <a:cs typeface="Codec Pro"/>
+                <a:sym typeface="Codec Pro"/>
+              </a:rPr>
+              <a:t>)</a:t>
+            </a:r>
+          </a:p>
+          <a:p>
+            <a:pPr marL="1216658" lvl="2" indent="-457200" algn="just">
+              <a:lnSpc>
+                <a:spcPts val="3667"/>
+              </a:lnSpc>
+              <a:spcBef>
+                <a:spcPts val="600"/>
+              </a:spcBef>
+              <a:spcAft>
+                <a:spcPts val="600"/>
+              </a:spcAft>
+              <a:buFont typeface="Wingdings" panose="05000000000000000000" pitchFamily="2" charset="2"/>
+              <a:buChar char="Ø"/>
+            </a:pPr>
+            <a:r>
+              <a:rPr lang="en-US" sz="2799" u="none" spc="55" dirty="0" err="1">
+                <a:solidFill>
+                  <a:srgbClr val="000000"/>
+                </a:solidFill>
+                <a:latin typeface="Codec Pro"/>
+                <a:ea typeface="Codec Pro"/>
+                <a:cs typeface="Codec Pro"/>
+                <a:sym typeface="Codec Pro"/>
+              </a:rPr>
+              <a:t>Características</a:t>
+            </a:r>
+            <a:r>
+              <a:rPr lang="en-US" sz="2799" u="none" spc="55" dirty="0">
+                <a:solidFill>
+                  <a:srgbClr val="000000"/>
+                </a:solidFill>
+                <a:latin typeface="Codec Pro"/>
+                <a:ea typeface="Codec Pro"/>
+                <a:cs typeface="Codec Pro"/>
+                <a:sym typeface="Codec Pro"/>
+              </a:rPr>
+              <a:t> (ambientes, </a:t>
+            </a:r>
+            <a:r>
+              <a:rPr lang="en-US" sz="2799" u="none" spc="55" dirty="0" err="1">
+                <a:solidFill>
+                  <a:srgbClr val="000000"/>
+                </a:solidFill>
+                <a:latin typeface="Codec Pro"/>
+                <a:ea typeface="Codec Pro"/>
+                <a:cs typeface="Codec Pro"/>
+                <a:sym typeface="Codec Pro"/>
+              </a:rPr>
+              <a:t>dormitorios</a:t>
+            </a:r>
+            <a:r>
+              <a:rPr lang="en-US" sz="2799" u="none" spc="55" dirty="0">
+                <a:solidFill>
+                  <a:srgbClr val="000000"/>
+                </a:solidFill>
+                <a:latin typeface="Codec Pro"/>
+                <a:ea typeface="Codec Pro"/>
+                <a:cs typeface="Codec Pro"/>
+                <a:sym typeface="Codec Pro"/>
+              </a:rPr>
+              <a:t>, </a:t>
+            </a:r>
+            <a:r>
+              <a:rPr lang="en-US" sz="2799" u="none" spc="55" dirty="0" err="1">
+                <a:solidFill>
+                  <a:srgbClr val="000000"/>
+                </a:solidFill>
+                <a:latin typeface="Codec Pro"/>
+                <a:ea typeface="Codec Pro"/>
+                <a:cs typeface="Codec Pro"/>
+                <a:sym typeface="Codec Pro"/>
+              </a:rPr>
+              <a:t>cocheras</a:t>
+            </a:r>
+            <a:r>
+              <a:rPr lang="en-US" sz="2799" u="none" spc="55" dirty="0">
+                <a:solidFill>
+                  <a:srgbClr val="000000"/>
+                </a:solidFill>
+                <a:latin typeface="Codec Pro"/>
+                <a:ea typeface="Codec Pro"/>
+                <a:cs typeface="Codec Pro"/>
+                <a:sym typeface="Codec Pro"/>
+              </a:rPr>
+              <a:t>, </a:t>
+            </a:r>
+            <a:r>
+              <a:rPr lang="en-US" sz="2799" u="none" spc="55" dirty="0" err="1">
+                <a:solidFill>
+                  <a:srgbClr val="000000"/>
+                </a:solidFill>
+                <a:latin typeface="Codec Pro"/>
+                <a:ea typeface="Codec Pro"/>
+                <a:cs typeface="Codec Pro"/>
+                <a:sym typeface="Codec Pro"/>
+              </a:rPr>
+              <a:t>antigüedad</a:t>
+            </a:r>
+            <a:r>
+              <a:rPr lang="en-US" sz="2799" u="none" spc="55" dirty="0">
+                <a:solidFill>
+                  <a:srgbClr val="000000"/>
+                </a:solidFill>
+                <a:latin typeface="Codec Pro"/>
+                <a:ea typeface="Codec Pro"/>
+                <a:cs typeface="Codec Pro"/>
+                <a:sym typeface="Codec Pro"/>
+              </a:rPr>
+              <a:t>, </a:t>
+            </a:r>
+            <a:r>
+              <a:rPr lang="en-US" sz="2799" u="none" spc="55" dirty="0" err="1">
+                <a:solidFill>
+                  <a:srgbClr val="000000"/>
+                </a:solidFill>
+                <a:latin typeface="Codec Pro"/>
+                <a:ea typeface="Codec Pro"/>
+                <a:cs typeface="Codec Pro"/>
+                <a:sym typeface="Codec Pro"/>
+              </a:rPr>
+              <a:t>expensas</a:t>
+            </a:r>
+            <a:r>
+              <a:rPr lang="en-US" sz="2799" u="none" spc="55" dirty="0">
+                <a:solidFill>
+                  <a:srgbClr val="000000"/>
+                </a:solidFill>
+                <a:latin typeface="Codec Pro"/>
+                <a:ea typeface="Codec Pro"/>
+                <a:cs typeface="Codec Pro"/>
+                <a:sym typeface="Codec Pro"/>
+              </a:rPr>
+              <a:t>)</a:t>
             </a:r>
           </a:p>
           <a:p>
@@ -5223,20 +6763,146 @@
               <a:lnSpc>
                 <a:spcPts val="3667"/>
               </a:lnSpc>
+              <a:spcBef>
+                <a:spcPts val="600"/>
+              </a:spcBef>
+              <a:spcAft>
+                <a:spcPts val="600"/>
+              </a:spcAft>
               <a:buFont typeface="Arial"/>
               <a:buChar char="•"/>
             </a:pPr>
             <a:r>
-              <a:rPr lang="en-US" sz="2799" u="none" spc="55">
-                <a:solidFill>
-                  <a:srgbClr val="000000"/>
-                </a:solidFill>
-                <a:latin typeface="Codec Pro"/>
-                <a:ea typeface="Codec Pro"/>
-                <a:cs typeface="Codec Pro"/>
-                <a:sym typeface="Codec Pro"/>
-              </a:rPr>
-              <a:t>Precio (MontoOperacion)</a:t>
+              <a:rPr lang="en-US" sz="2799" u="none" spc="55" dirty="0">
+                <a:solidFill>
+                  <a:srgbClr val="000000"/>
+                </a:solidFill>
+                <a:latin typeface="Codec Pro"/>
+                <a:ea typeface="Codec Pro"/>
+                <a:cs typeface="Codec Pro"/>
+                <a:sym typeface="Codec Pro"/>
+              </a:rPr>
+              <a:t>Se </a:t>
+            </a:r>
+            <a:r>
+              <a:rPr lang="en-US" sz="2799" u="none" spc="55" dirty="0" err="1">
+                <a:solidFill>
+                  <a:srgbClr val="000000"/>
+                </a:solidFill>
+                <a:latin typeface="Codec Pro"/>
+                <a:ea typeface="Codec Pro"/>
+                <a:cs typeface="Codec Pro"/>
+                <a:sym typeface="Codec Pro"/>
+              </a:rPr>
+              <a:t>combinan</a:t>
+            </a:r>
+            <a:r>
+              <a:rPr lang="en-US" sz="2799" u="none" spc="55" dirty="0">
+                <a:solidFill>
+                  <a:srgbClr val="000000"/>
+                </a:solidFill>
+                <a:latin typeface="Codec Pro"/>
+                <a:ea typeface="Codec Pro"/>
+                <a:cs typeface="Codec Pro"/>
+                <a:sym typeface="Codec Pro"/>
+              </a:rPr>
+              <a:t> </a:t>
+            </a:r>
+            <a:r>
+              <a:rPr lang="en-US" sz="2799" u="none" spc="55" dirty="0" err="1">
+                <a:solidFill>
+                  <a:srgbClr val="000000"/>
+                </a:solidFill>
+                <a:latin typeface="Codec Pro"/>
+                <a:ea typeface="Codec Pro"/>
+                <a:cs typeface="Codec Pro"/>
+                <a:sym typeface="Codec Pro"/>
+              </a:rPr>
+              <a:t>todas</a:t>
+            </a:r>
+            <a:r>
+              <a:rPr lang="en-US" sz="2799" u="none" spc="55" dirty="0">
+                <a:solidFill>
+                  <a:srgbClr val="000000"/>
+                </a:solidFill>
+                <a:latin typeface="Codec Pro"/>
+                <a:ea typeface="Codec Pro"/>
+                <a:cs typeface="Codec Pro"/>
+                <a:sym typeface="Codec Pro"/>
+              </a:rPr>
+              <a:t> las bases </a:t>
+            </a:r>
+            <a:r>
+              <a:rPr lang="en-US" sz="2799" u="none" spc="55" dirty="0" err="1">
+                <a:solidFill>
+                  <a:srgbClr val="000000"/>
+                </a:solidFill>
+                <a:latin typeface="Codec Pro"/>
+                <a:ea typeface="Codec Pro"/>
+                <a:cs typeface="Codec Pro"/>
+                <a:sym typeface="Codec Pro"/>
+              </a:rPr>
+              <a:t>en</a:t>
+            </a:r>
+            <a:r>
+              <a:rPr lang="en-US" sz="2799" u="none" spc="55" dirty="0">
+                <a:solidFill>
+                  <a:srgbClr val="000000"/>
+                </a:solidFill>
+                <a:latin typeface="Codec Pro"/>
+                <a:ea typeface="Codec Pro"/>
+                <a:cs typeface="Codec Pro"/>
+                <a:sym typeface="Codec Pro"/>
+              </a:rPr>
+              <a:t> un </a:t>
+            </a:r>
+            <a:r>
+              <a:rPr lang="en-US" sz="2799" u="none" spc="55" dirty="0" err="1">
+                <a:solidFill>
+                  <a:srgbClr val="000000"/>
+                </a:solidFill>
+                <a:latin typeface="Codec Pro"/>
+                <a:ea typeface="Codec Pro"/>
+                <a:cs typeface="Codec Pro"/>
+                <a:sym typeface="Codec Pro"/>
+              </a:rPr>
+              <a:t>único</a:t>
+            </a:r>
+            <a:r>
+              <a:rPr lang="en-US" sz="2799" u="none" spc="55" dirty="0">
+                <a:solidFill>
+                  <a:srgbClr val="000000"/>
+                </a:solidFill>
+                <a:latin typeface="Codec Pro"/>
+                <a:ea typeface="Codec Pro"/>
+                <a:cs typeface="Codec Pro"/>
+                <a:sym typeface="Codec Pro"/>
+              </a:rPr>
+              <a:t> panel </a:t>
+            </a:r>
+            <a:r>
+              <a:rPr lang="en-US" sz="2799" u="none" spc="55" dirty="0" err="1">
+                <a:solidFill>
+                  <a:srgbClr val="000000"/>
+                </a:solidFill>
+                <a:latin typeface="Codec Pro"/>
+                <a:ea typeface="Codec Pro"/>
+                <a:cs typeface="Codec Pro"/>
+                <a:sym typeface="Codec Pro"/>
+              </a:rPr>
+              <a:t>mensual</a:t>
+            </a:r>
+            <a:r>
+              <a:rPr lang="en-US" sz="2799" u="none" spc="55" dirty="0">
+                <a:solidFill>
+                  <a:srgbClr val="000000"/>
+                </a:solidFill>
+                <a:latin typeface="Codec Pro"/>
+                <a:ea typeface="Codec Pro"/>
+                <a:cs typeface="Codec Pro"/>
+                <a:sym typeface="Codec Pro"/>
+              </a:rPr>
+              <a:t>.</a:t>
             </a:r>
           </a:p>
           <a:p>
@@ -5244,104 +6910,158 @@
               <a:lnSpc>
                 <a:spcPts val="3667"/>
               </a:lnSpc>
+              <a:spcBef>
+                <a:spcPts val="600"/>
+              </a:spcBef>
+              <a:spcAft>
+                <a:spcPts val="600"/>
+              </a:spcAft>
               <a:buFont typeface="Arial"/>
               <a:buChar char="•"/>
             </a:pPr>
             <a:r>
-              <a:rPr lang="en-US" sz="2799" u="none" spc="55">
-                <a:solidFill>
-                  <a:srgbClr val="000000"/>
-                </a:solidFill>
-                <a:latin typeface="Codec Pro"/>
-                <a:ea typeface="Codec Pro"/>
-                <a:cs typeface="Codec Pro"/>
-                <a:sym typeface="Codec Pro"/>
-              </a:rPr>
-              <a:t>Superficie total / cubierta / descubierta</a:t>
-            </a:r>
-          </a:p>
-          <a:p>
-            <a:pPr marL="604516" lvl="1" indent="-302258" algn="just">
-              <a:lnSpc>
-                <a:spcPts val="3667"/>
-              </a:lnSpc>
-              <a:buFont typeface="Arial"/>
-              <a:buChar char="•"/>
-            </a:pPr>
-            <a:r>
-              <a:rPr lang="en-US" sz="2799" u="none" spc="55">
-                <a:solidFill>
-                  <a:srgbClr val="000000"/>
-                </a:solidFill>
-                <a:latin typeface="Codec Pro"/>
-                <a:ea typeface="Codec Pro"/>
-                <a:cs typeface="Codec Pro"/>
-                <a:sym typeface="Codec Pro"/>
-              </a:rPr>
-              <a:t>Ubicación (Provincia, Localidad, Barrio, coordenadas)</a:t>
-            </a:r>
-          </a:p>
-          <a:p>
-            <a:pPr marL="604516" lvl="1" indent="-302258" algn="just">
-              <a:lnSpc>
-                <a:spcPts val="3667"/>
-              </a:lnSpc>
-              <a:buFont typeface="Arial"/>
-              <a:buChar char="•"/>
-            </a:pPr>
-            <a:r>
-              <a:rPr lang="en-US" sz="2799" u="none" spc="55">
-                <a:solidFill>
-                  <a:srgbClr val="000000"/>
-                </a:solidFill>
-                <a:latin typeface="Codec Pro"/>
-                <a:ea typeface="Codec Pro"/>
-                <a:cs typeface="Codec Pro"/>
-                <a:sym typeface="Codec Pro"/>
-              </a:rPr>
-              <a:t>Características (ambientes, dormitorios, cocheras, antigüedad, expensas)</a:t>
-            </a:r>
-          </a:p>
-          <a:p>
-            <a:pPr marL="604516" lvl="1" indent="-302258" algn="just">
-              <a:lnSpc>
-                <a:spcPts val="3667"/>
-              </a:lnSpc>
-              <a:buFont typeface="Arial"/>
-              <a:buChar char="•"/>
-            </a:pPr>
-            <a:r>
-              <a:rPr lang="en-US" sz="2799" u="none" spc="55">
-                <a:solidFill>
-                  <a:srgbClr val="000000"/>
-                </a:solidFill>
-                <a:latin typeface="Codec Pro"/>
-                <a:ea typeface="Codec Pro"/>
-                <a:cs typeface="Codec Pro"/>
-                <a:sym typeface="Codec Pro"/>
-              </a:rPr>
-              <a:t>Se combinan todas las bases en un único panel mensual.</a:t>
-            </a:r>
-          </a:p>
-          <a:p>
-            <a:pPr marL="604516" lvl="1" indent="-302258" algn="just">
-              <a:lnSpc>
-                <a:spcPts val="3667"/>
-              </a:lnSpc>
-              <a:buFont typeface="Arial"/>
-              <a:buChar char="•"/>
-            </a:pPr>
-            <a:r>
-              <a:rPr lang="en-US" sz="2799" u="none" spc="55">
-                <a:solidFill>
-                  <a:srgbClr val="000000"/>
-                </a:solidFill>
-                <a:latin typeface="Codec Pro"/>
-                <a:ea typeface="Codec Pro"/>
-                <a:cs typeface="Codec Pro"/>
-                <a:sym typeface="Codec Pro"/>
-              </a:rPr>
-              <a:t>Limpieza: tratamiento de outliers, duplicados, diferencias de formato y georreferencias.</a:t>
+              <a:rPr lang="en-US" sz="2799" u="none" spc="55" dirty="0" err="1">
+                <a:solidFill>
+                  <a:srgbClr val="000000"/>
+                </a:solidFill>
+                <a:latin typeface="Codec Pro"/>
+                <a:ea typeface="Codec Pro"/>
+                <a:cs typeface="Codec Pro"/>
+                <a:sym typeface="Codec Pro"/>
+              </a:rPr>
+              <a:t>Limpieza</a:t>
+            </a:r>
+            <a:r>
+              <a:rPr lang="en-US" sz="2799" u="none" spc="55" dirty="0">
+                <a:solidFill>
+                  <a:srgbClr val="000000"/>
+                </a:solidFill>
+                <a:latin typeface="Codec Pro"/>
+                <a:ea typeface="Codec Pro"/>
+                <a:cs typeface="Codec Pro"/>
+                <a:sym typeface="Codec Pro"/>
+              </a:rPr>
+              <a:t>: </a:t>
+            </a:r>
+            <a:r>
+              <a:rPr lang="en-US" sz="2799" u="none" spc="55" dirty="0" err="1">
+                <a:solidFill>
+                  <a:srgbClr val="000000"/>
+                </a:solidFill>
+                <a:latin typeface="Codec Pro"/>
+                <a:ea typeface="Codec Pro"/>
+                <a:cs typeface="Codec Pro"/>
+                <a:sym typeface="Codec Pro"/>
+              </a:rPr>
+              <a:t>tratamiento</a:t>
+            </a:r>
+            <a:r>
+              <a:rPr lang="en-US" sz="2799" u="none" spc="55" dirty="0">
+                <a:solidFill>
+                  <a:srgbClr val="000000"/>
+                </a:solidFill>
+                <a:latin typeface="Codec Pro"/>
+                <a:ea typeface="Codec Pro"/>
+                <a:cs typeface="Codec Pro"/>
+                <a:sym typeface="Codec Pro"/>
+              </a:rPr>
+              <a:t> de outliers, </a:t>
+            </a:r>
+            <a:r>
+              <a:rPr lang="en-US" sz="2799" u="none" spc="55" dirty="0" err="1">
+                <a:solidFill>
+                  <a:srgbClr val="000000"/>
+                </a:solidFill>
+                <a:latin typeface="Codec Pro"/>
+                <a:ea typeface="Codec Pro"/>
+                <a:cs typeface="Codec Pro"/>
+                <a:sym typeface="Codec Pro"/>
+              </a:rPr>
+              <a:t>duplicados</a:t>
+            </a:r>
+            <a:r>
+              <a:rPr lang="en-US" sz="2799" u="none" spc="55" dirty="0">
+                <a:solidFill>
+                  <a:srgbClr val="000000"/>
+                </a:solidFill>
+                <a:latin typeface="Codec Pro"/>
+                <a:ea typeface="Codec Pro"/>
+                <a:cs typeface="Codec Pro"/>
+                <a:sym typeface="Codec Pro"/>
+              </a:rPr>
+              <a:t>, </a:t>
+            </a:r>
+            <a:r>
+              <a:rPr lang="en-US" sz="2799" u="none" spc="55" dirty="0" err="1">
+                <a:solidFill>
+                  <a:srgbClr val="000000"/>
+                </a:solidFill>
+                <a:latin typeface="Codec Pro"/>
+                <a:ea typeface="Codec Pro"/>
+                <a:cs typeface="Codec Pro"/>
+                <a:sym typeface="Codec Pro"/>
+              </a:rPr>
+              <a:t>diferencias</a:t>
+            </a:r>
+            <a:r>
+              <a:rPr lang="en-US" sz="2799" u="none" spc="55" dirty="0">
+                <a:solidFill>
+                  <a:srgbClr val="000000"/>
+                </a:solidFill>
+                <a:latin typeface="Codec Pro"/>
+                <a:ea typeface="Codec Pro"/>
+                <a:cs typeface="Codec Pro"/>
+                <a:sym typeface="Codec Pro"/>
+              </a:rPr>
+              <a:t> de </a:t>
+            </a:r>
+            <a:r>
+              <a:rPr lang="en-US" sz="2799" u="none" spc="55" dirty="0" err="1">
+                <a:solidFill>
+                  <a:srgbClr val="000000"/>
+                </a:solidFill>
+                <a:latin typeface="Codec Pro"/>
+                <a:ea typeface="Codec Pro"/>
+                <a:cs typeface="Codec Pro"/>
+                <a:sym typeface="Codec Pro"/>
+              </a:rPr>
+              <a:t>formato</a:t>
+            </a:r>
+            <a:r>
+              <a:rPr lang="en-US" sz="2799" u="none" spc="55" dirty="0">
+                <a:solidFill>
+                  <a:srgbClr val="000000"/>
+                </a:solidFill>
+                <a:latin typeface="Codec Pro"/>
+                <a:ea typeface="Codec Pro"/>
+                <a:cs typeface="Codec Pro"/>
+                <a:sym typeface="Codec Pro"/>
+              </a:rPr>
+              <a:t> y </a:t>
+            </a:r>
+            <a:r>
+              <a:rPr lang="en-US" sz="2799" u="none" spc="55" dirty="0" err="1">
+                <a:solidFill>
+                  <a:srgbClr val="000000"/>
+                </a:solidFill>
+                <a:latin typeface="Codec Pro"/>
+                <a:ea typeface="Codec Pro"/>
+                <a:cs typeface="Codec Pro"/>
+                <a:sym typeface="Codec Pro"/>
+              </a:rPr>
+              <a:t>georreferencias</a:t>
+            </a:r>
+            <a:r>
+              <a:rPr lang="en-US" sz="2799" u="none" spc="55" dirty="0">
+                <a:solidFill>
+                  <a:srgbClr val="000000"/>
+                </a:solidFill>
+                <a:latin typeface="Codec Pro"/>
+                <a:ea typeface="Codec Pro"/>
+                <a:cs typeface="Codec Pro"/>
+                <a:sym typeface="Codec Pro"/>
+              </a:rPr>
+              <a:t>.</a:t>
             </a:r>
           </a:p>
           <a:p>
@@ -5350,7 +7070,7 @@
                 <a:spcPts val="3667"/>
               </a:lnSpc>
             </a:pPr>
-            <a:endParaRPr lang="en-US" sz="2799" u="none" spc="55">
+            <a:endParaRPr lang="en-US" sz="2799" u="none" spc="55" dirty="0">
               <a:solidFill>
                 <a:srgbClr val="000000"/>
               </a:solidFill>
@@ -5403,6 +7123,36 @@
           </a:p>
         </p:txBody>
       </p:sp>
+      <p:sp>
+        <p:nvSpPr>
+          <p:cNvPr id="7" name="Marcador de número de diapositiva 6">
+            <a:extLst>
+              <a:ext uri="{FF2B5EF4-FFF2-40B4-BE49-F238E27FC236}">
+                <a16:creationId xmlns:a16="http://schemas.microsoft.com/office/drawing/2014/main" id="{D22855EC-9F0B-96AE-F2E1-1108DF8AD2BE}"/>
+              </a:ext>
+            </a:extLst>
+          </p:cNvPr>
+          <p:cNvSpPr>
+            <a:spLocks noGrp="1"/>
+          </p:cNvSpPr>
+          <p:nvPr>
+            <p:ph type="sldNum" sz="quarter" idx="12"/>
+          </p:nvPr>
+        </p:nvSpPr>
+        <p:spPr/>
+        <p:txBody>
+          <a:bodyPr/>
+          <a:lstStyle/>
+          <a:p>
+            <a:fld id="{B6F15528-21DE-4FAA-801E-634DDDAF4B2B}" type="slidenum">
+              <a:rPr lang="en-US" smtClean="0"/>
+              <a:pPr/>
+              <a:t>3</a:t>
+            </a:fld>
+            <a:endParaRPr lang="en-US"/>
+          </a:p>
+        </p:txBody>
+      </p:sp>
     </p:spTree>
   </p:cSld>
   <p:clrMapOvr>
@@ -5411,7 +7161,7 @@
 </p:sld>
 </file>
 
-<file path=ppt/slides/slide5.xml><?xml version="1.0" encoding="utf-8"?>
+<file path=ppt/slides/slide4.xml><?xml version="1.0" encoding="utf-8"?>
 <p:sld xmlns:a="http://schemas.openxmlformats.org/drawingml/2006/main" xmlns:r="http://schemas.openxmlformats.org/officeDocument/2006/relationships" xmlns:p="http://schemas.openxmlformats.org/presentationml/2006/main">
   <p:cSld>
     <p:spTree>
@@ -5924,6 +7674,36 @@
           </a:p>
         </p:txBody>
       </p:sp>
+      <p:sp>
+        <p:nvSpPr>
+          <p:cNvPr id="7" name="Marcador de número de diapositiva 6">
+            <a:extLst>
+              <a:ext uri="{FF2B5EF4-FFF2-40B4-BE49-F238E27FC236}">
+                <a16:creationId xmlns:a16="http://schemas.microsoft.com/office/drawing/2014/main" id="{D9B2DD55-4652-F457-DA3D-48AA5426013C}"/>
+              </a:ext>
+            </a:extLst>
+          </p:cNvPr>
+          <p:cNvSpPr>
+            <a:spLocks noGrp="1"/>
+          </p:cNvSpPr>
+          <p:nvPr>
+            <p:ph type="sldNum" sz="quarter" idx="12"/>
+          </p:nvPr>
+        </p:nvSpPr>
+        <p:spPr/>
+        <p:txBody>
+          <a:bodyPr/>
+          <a:lstStyle/>
+          <a:p>
+            <a:fld id="{B6F15528-21DE-4FAA-801E-634DDDAF4B2B}" type="slidenum">
+              <a:rPr lang="en-US" smtClean="0"/>
+              <a:pPr/>
+              <a:t>4</a:t>
+            </a:fld>
+            <a:endParaRPr lang="en-US"/>
+          </a:p>
+        </p:txBody>
+      </p:sp>
     </p:spTree>
   </p:cSld>
   <p:clrMapOvr>
@@ -5932,7 +7712,7 @@
 </p:sld>
 </file>
 
-<file path=ppt/slides/slide6.xml><?xml version="1.0" encoding="utf-8"?>
+<file path=ppt/slides/slide5.xml><?xml version="1.0" encoding="utf-8"?>
 <p:sld xmlns:a="http://schemas.openxmlformats.org/drawingml/2006/main" xmlns:r="http://schemas.openxmlformats.org/officeDocument/2006/relationships" xmlns:p="http://schemas.openxmlformats.org/presentationml/2006/main">
   <p:cSld>
     <p:spTree>
@@ -6077,6 +7857,36 @@
               </a:rPr>
               <a:t>RESULTADOS</a:t>
             </a:r>
+          </a:p>
+        </p:txBody>
+      </p:sp>
+      <p:sp>
+        <p:nvSpPr>
+          <p:cNvPr id="6" name="Marcador de número de diapositiva 5">
+            <a:extLst>
+              <a:ext uri="{FF2B5EF4-FFF2-40B4-BE49-F238E27FC236}">
+                <a16:creationId xmlns:a16="http://schemas.microsoft.com/office/drawing/2014/main" id="{CC87CF37-5F02-BC13-1158-BC1EDBFCA41C}"/>
+              </a:ext>
+            </a:extLst>
+          </p:cNvPr>
+          <p:cNvSpPr>
+            <a:spLocks noGrp="1"/>
+          </p:cNvSpPr>
+          <p:nvPr>
+            <p:ph type="sldNum" sz="quarter" idx="12"/>
+          </p:nvPr>
+        </p:nvSpPr>
+        <p:spPr/>
+        <p:txBody>
+          <a:bodyPr/>
+          <a:lstStyle/>
+          <a:p>
+            <a:fld id="{B6F15528-21DE-4FAA-801E-634DDDAF4B2B}" type="slidenum">
+              <a:rPr lang="en-US" smtClean="0"/>
+              <a:pPr/>
+              <a:t>5</a:t>
+            </a:fld>
+            <a:endParaRPr lang="en-US"/>
           </a:p>
         </p:txBody>
       </p:sp>
@@ -6369,4 +8179,319 @@
   <a:objectDefaults/>
   <a:extraClrSchemeLst/>
 </a:theme>
+</file>
+
+<file path=ppt/theme/theme2.xml><?xml version="1.0" encoding="utf-8"?>
+<a:theme xmlns:a="http://schemas.openxmlformats.org/drawingml/2006/main" name="Tema de Office">
+  <a:themeElements>
+    <a:clrScheme name="Office">
+      <a:dk1>
+        <a:sysClr val="windowText" lastClr="000000"/>
+      </a:dk1>
+      <a:lt1>
+        <a:sysClr val="window" lastClr="FFFFFF"/>
+      </a:lt1>
+      <a:dk2>
+        <a:srgbClr val="0E2841"/>
+      </a:dk2>
+      <a:lt2>
+        <a:srgbClr val="E8E8E8"/>
+      </a:lt2>
+      <a:accent1>
+        <a:srgbClr val="156082"/>
+      </a:accent1>
+      <a:accent2>
+        <a:srgbClr val="E97132"/>
+      </a:accent2>
+      <a:accent3>
+        <a:srgbClr val="196B24"/>
+      </a:accent3>
+      <a:accent4>
+        <a:srgbClr val="0F9ED5"/>
+      </a:accent4>
+      <a:accent5>
+        <a:srgbClr val="A02B93"/>
+      </a:accent5>
+      <a:accent6>
+        <a:srgbClr val="4EA72E"/>
+      </a:accent6>
+      <a:hlink>
+        <a:srgbClr val="467886"/>
+      </a:hlink>
+      <a:folHlink>
+        <a:srgbClr val="96607D"/>
+      </a:folHlink>
+    </a:clrScheme>
+    <a:fontScheme name="Office">
+      <a:majorFont>
+        <a:latin typeface="Aptos Display" panose="02110004020202020204"/>
+        <a:ea typeface=""/>
+        <a:cs typeface=""/>
+        <a:font script="Jpan" typeface="游ゴシック Light"/>
+        <a:font script="Hang" typeface="맑은 고딕"/>
+        <a:font script="Hans" typeface="等线 Light"/>
+        <a:font script="Hant" typeface="新細明體"/>
+        <a:font script="Arab" typeface="Times New Roman"/>
+        <a:font script="Hebr" typeface="Times New Roman"/>
+        <a:font script="Thai" typeface="Angsana New"/>
+        <a:font script="Ethi" typeface="Nyala"/>
+        <a:font script="Beng" typeface="Vrinda"/>
+        <a:font script="Gujr" typeface="Shruti"/>
+        <a:font script="Khmr" typeface="MoolBoran"/>
+        <a:font script="Knda" typeface="Tunga"/>
+        <a:font script="Guru" typeface="Raavi"/>
+        <a:font script="Cans" typeface="Euphemia"/>
+        <a:font script="Cher" typeface="Plantagenet Cherokee"/>
+        <a:font script="Yiii" typeface="Microsoft Yi Baiti"/>
+        <a:font script="Tibt" typeface="Microsoft Himalaya"/>
+        <a:font script="Thaa" typeface="MV Boli"/>
+        <a:font script="Deva" typeface="Mangal"/>
+        <a:font script="Telu" typeface="Gautami"/>
+        <a:font script="Taml" typeface="Latha"/>
+        <a:font script="Syrc" typeface="Estrangelo Edessa"/>
+        <a:font script="Orya" typeface="Kalinga"/>
+        <a:font script="Mlym" typeface="Kartika"/>
+        <a:font script="Laoo" typeface="DokChampa"/>
+        <a:font script="Sinh" typeface="Iskoola Pota"/>
+        <a:font script="Mong" typeface="Mongolian Baiti"/>
+        <a:font script="Viet" typeface="Times New Roman"/>
+        <a:font script="Uigh" typeface="Microsoft Uighur"/>
+        <a:font script="Geor" typeface="Sylfaen"/>
+        <a:font script="Armn" typeface="Arial"/>
+        <a:font script="Bugi" typeface="Leelawadee UI"/>
+        <a:font script="Bopo" typeface="Microsoft JhengHei"/>
+        <a:font script="Java" typeface="Javanese Text"/>
+        <a:font script="Lisu" typeface="Segoe UI"/>
+        <a:font script="Mymr" typeface="Myanmar Text"/>
+        <a:font script="Nkoo" typeface="Ebrima"/>
+        <a:font script="Olck" typeface="Nirmala UI"/>
+        <a:font script="Osma" typeface="Ebrima"/>
+        <a:font script="Phag" typeface="Phagspa"/>
+        <a:font script="Syrn" typeface="Estrangelo Edessa"/>
+        <a:font script="Syrj" typeface="Estrangelo Edessa"/>
+        <a:font script="Syre" typeface="Estrangelo Edessa"/>
+        <a:font script="Sora" typeface="Nirmala UI"/>
+        <a:font script="Tale" typeface="Microsoft Tai Le"/>
+        <a:font script="Talu" typeface="Microsoft New Tai Lue"/>
+        <a:font script="Tfng" typeface="Ebrima"/>
+      </a:majorFont>
+      <a:minorFont>
+        <a:latin typeface="Aptos" panose="02110004020202020204"/>
+        <a:ea typeface=""/>
+        <a:cs typeface=""/>
+        <a:font script="Jpan" typeface="游ゴシック"/>
+        <a:font script="Hang" typeface="맑은 고딕"/>
+        <a:font script="Hans" typeface="等线"/>
+        <a:font script="Hant" typeface="新細明體"/>
+        <a:font script="Arab" typeface="Arial"/>
+        <a:font script="Hebr" typeface="Arial"/>
+        <a:font script="Thai" typeface="Cordia New"/>
+        <a:font script="Ethi" typeface="Nyala"/>
+        <a:font script="Beng" typeface="Vrinda"/>
+        <a:font script="Gujr" typeface="Shruti"/>
+        <a:font script="Khmr" typeface="DaunPenh"/>
+        <a:font script="Knda" typeface="Tunga"/>
+        <a:font script="Guru" typeface="Raavi"/>
+        <a:font script="Cans" typeface="Euphemia"/>
+        <a:font script="Cher" typeface="Plantagenet Cherokee"/>
+        <a:font script="Yiii" typeface="Microsoft Yi Baiti"/>
+        <a:font script="Tibt" typeface="Microsoft Himalaya"/>
+        <a:font script="Thaa" typeface="MV Boli"/>
+        <a:font script="Deva" typeface="Mangal"/>
+        <a:font script="Telu" typeface="Gautami"/>
+        <a:font script="Taml" typeface="Latha"/>
+        <a:font script="Syrc" typeface="Estrangelo Edessa"/>
+        <a:font script="Orya" typeface="Kalinga"/>
+        <a:font script="Mlym" typeface="Kartika"/>
+        <a:font script="Laoo" typeface="DokChampa"/>
+        <a:font script="Sinh" typeface="Iskoola Pota"/>
+        <a:font script="Mong" typeface="Mongolian Baiti"/>
+        <a:font script="Viet" typeface="Arial"/>
+        <a:font script="Uigh" typeface="Microsoft Uighur"/>
+        <a:font script="Geor" typeface="Sylfaen"/>
+        <a:font script="Armn" typeface="Arial"/>
+        <a:font script="Bugi" typeface="Leelawadee UI"/>
+        <a:font script="Bopo" typeface="Microsoft JhengHei"/>
+        <a:font script="Java" typeface="Javanese Text"/>
+        <a:font script="Lisu" typeface="Segoe UI"/>
+        <a:font script="Mymr" typeface="Myanmar Text"/>
+        <a:font script="Nkoo" typeface="Ebrima"/>
+        <a:font script="Olck" typeface="Nirmala UI"/>
+        <a:font script="Osma" typeface="Ebrima"/>
+        <a:font script="Phag" typeface="Phagspa"/>
+        <a:font script="Syrn" typeface="Estrangelo Edessa"/>
+        <a:font script="Syrj" typeface="Estrangelo Edessa"/>
+        <a:font script="Syre" typeface="Estrangelo Edessa"/>
+        <a:font script="Sora" typeface="Nirmala UI"/>
+        <a:font script="Tale" typeface="Microsoft Tai Le"/>
+        <a:font script="Talu" typeface="Microsoft New Tai Lue"/>
+        <a:font script="Tfng" typeface="Ebrima"/>
+      </a:minorFont>
+    </a:fontScheme>
+    <a:fmtScheme name="Office">
+      <a:fillStyleLst>
+        <a:solidFill>
+          <a:schemeClr val="phClr"/>
+        </a:solidFill>
+        <a:gradFill rotWithShape="1">
+          <a:gsLst>
+            <a:gs pos="0">
+              <a:schemeClr val="phClr">
+                <a:lumMod val="110000"/>
+                <a:satMod val="105000"/>
+                <a:tint val="67000"/>
+              </a:schemeClr>
+            </a:gs>
+            <a:gs pos="50000">
+              <a:schemeClr val="phClr">
+                <a:lumMod val="105000"/>
+                <a:satMod val="103000"/>
+                <a:tint val="73000"/>
+              </a:schemeClr>
+            </a:gs>
+            <a:gs pos="100000">
+              <a:schemeClr val="phClr">
+                <a:lumMod val="105000"/>
+                <a:satMod val="109000"/>
+                <a:tint val="81000"/>
+              </a:schemeClr>
+            </a:gs>
+          </a:gsLst>
+          <a:lin ang="5400000" scaled="0"/>
+        </a:gradFill>
+        <a:gradFill rotWithShape="1">
+          <a:gsLst>
+            <a:gs pos="0">
+              <a:schemeClr val="phClr">
+                <a:satMod val="103000"/>
+                <a:lumMod val="102000"/>
+                <a:tint val="94000"/>
+              </a:schemeClr>
+            </a:gs>
+            <a:gs pos="50000">
+              <a:schemeClr val="phClr">
+                <a:satMod val="110000"/>
+                <a:lumMod val="100000"/>
+                <a:shade val="100000"/>
+              </a:schemeClr>
+            </a:gs>
+            <a:gs pos="100000">
+              <a:schemeClr val="phClr">
+                <a:lumMod val="99000"/>
+                <a:satMod val="120000"/>
+                <a:shade val="78000"/>
+              </a:schemeClr>
+            </a:gs>
+          </a:gsLst>
+          <a:lin ang="5400000" scaled="0"/>
+        </a:gradFill>
+      </a:fillStyleLst>
+      <a:lnStyleLst>
+        <a:ln w="12700" cap="flat" cmpd="sng" algn="ctr">
+          <a:solidFill>
+            <a:schemeClr val="phClr"/>
+          </a:solidFill>
+          <a:prstDash val="solid"/>
+          <a:miter lim="800000"/>
+        </a:ln>
+        <a:ln w="19050" cap="flat" cmpd="sng" algn="ctr">
+          <a:solidFill>
+            <a:schemeClr val="phClr"/>
+          </a:solidFill>
+          <a:prstDash val="solid"/>
+          <a:miter lim="800000"/>
+        </a:ln>
+        <a:ln w="25400" cap="flat" cmpd="sng" algn="ctr">
+          <a:solidFill>
+            <a:schemeClr val="phClr"/>
+          </a:solidFill>
+          <a:prstDash val="solid"/>
+          <a:miter lim="800000"/>
+        </a:ln>
+      </a:lnStyleLst>
+      <a:effectStyleLst>
+        <a:effectStyle>
+          <a:effectLst/>
+        </a:effectStyle>
+        <a:effectStyle>
+          <a:effectLst/>
+        </a:effectStyle>
+        <a:effectStyle>
+          <a:effectLst>
+            <a:outerShdw blurRad="57150" dist="19050" dir="5400000" algn="ctr" rotWithShape="0">
+              <a:srgbClr val="000000">
+                <a:alpha val="63000"/>
+              </a:srgbClr>
+            </a:outerShdw>
+          </a:effectLst>
+        </a:effectStyle>
+      </a:effectStyleLst>
+      <a:bgFillStyleLst>
+        <a:solidFill>
+          <a:schemeClr val="phClr"/>
+        </a:solidFill>
+        <a:solidFill>
+          <a:schemeClr val="phClr">
+            <a:tint val="95000"/>
+            <a:satMod val="170000"/>
+          </a:schemeClr>
+        </a:solidFill>
+        <a:gradFill rotWithShape="1">
+          <a:gsLst>
+            <a:gs pos="0">
+              <a:schemeClr val="phClr">
+                <a:tint val="93000"/>
+                <a:satMod val="150000"/>
+                <a:shade val="98000"/>
+                <a:lumMod val="102000"/>
+              </a:schemeClr>
+            </a:gs>
+            <a:gs pos="50000">
+              <a:schemeClr val="phClr">
+                <a:tint val="98000"/>
+                <a:satMod val="130000"/>
+                <a:shade val="90000"/>
+                <a:lumMod val="103000"/>
+              </a:schemeClr>
+            </a:gs>
+            <a:gs pos="100000">
+              <a:schemeClr val="phClr">
+                <a:shade val="63000"/>
+                <a:satMod val="120000"/>
+              </a:schemeClr>
+            </a:gs>
+          </a:gsLst>
+          <a:lin ang="5400000" scaled="0"/>
+        </a:gradFill>
+      </a:bgFillStyleLst>
+    </a:fmtScheme>
+  </a:themeElements>
+  <a:objectDefaults>
+    <a:lnDef>
+      <a:spPr/>
+      <a:bodyPr/>
+      <a:lstStyle/>
+      <a:style>
+        <a:lnRef idx="2">
+          <a:schemeClr val="accent1"/>
+        </a:lnRef>
+        <a:fillRef idx="0">
+          <a:schemeClr val="accent1"/>
+        </a:fillRef>
+        <a:effectRef idx="1">
+          <a:schemeClr val="accent1"/>
+        </a:effectRef>
+        <a:fontRef idx="minor">
+          <a:schemeClr val="tx1"/>
+        </a:fontRef>
+      </a:style>
+    </a:lnDef>
+  </a:objectDefaults>
+  <a:extraClrSchemeLst/>
+  <a:extLst>
+    <a:ext uri="{05A4C25C-085E-4340-85A3-A5531E510DB2}">
+      <thm15:themeFamily xmlns:thm15="http://schemas.microsoft.com/office/thememl/2012/main" name="Office Theme" id="{2E142A2C-CD16-42D6-873A-C26D2A0506FA}" vid="{1BDDFF52-6CD6-40A5-AB3C-68EB2F1E4D0A}"/>
+    </a:ext>
+  </a:extLst>
+</a:theme>
 </file>
--- a/Proyecto Final/Entrega final - Proyecto final Grupo 2 - Taller de Programación.pptx
+++ b/Proyecto Final/Entrega final - Proyecto final Grupo 2 - Taller de Programación.pptx
@@ -1,33 +1,31 @@
 
 <file path=ppt/presentation.xml><?xml version="1.0" encoding="utf-8"?>
-<p:presentation xmlns:a="http://schemas.openxmlformats.org/drawingml/2006/main" xmlns:r="http://schemas.openxmlformats.org/officeDocument/2006/relationships" xmlns:p="http://schemas.openxmlformats.org/presentationml/2006/main" embedTrueTypeFonts="1" saveSubsetFonts="1">
+<p:presentation xmlns:a="http://schemas.openxmlformats.org/drawingml/2006/main" xmlns:r="http://schemas.openxmlformats.org/officeDocument/2006/relationships" xmlns:p="http://schemas.openxmlformats.org/presentationml/2006/main" saveSubsetFonts="1" embedTrueTypeFonts="true">
   <p:sldMasterIdLst>
     <p:sldMasterId id="2147483648" r:id="rId1"/>
   </p:sldMasterIdLst>
-  <p:notesMasterIdLst>
-    <p:notesMasterId r:id="rId7"/>
-  </p:notesMasterIdLst>
   <p:sldIdLst>
-    <p:sldId id="256" r:id="rId2"/>
-    <p:sldId id="258" r:id="rId3"/>
-    <p:sldId id="259" r:id="rId4"/>
-    <p:sldId id="260" r:id="rId5"/>
-    <p:sldId id="261" r:id="rId6"/>
+    <p:sldId id="256" r:id="rId6"/>
+    <p:sldId id="257" r:id="rId7"/>
+    <p:sldId id="258" r:id="rId8"/>
+    <p:sldId id="259" r:id="rId9"/>
+    <p:sldId id="260" r:id="rId10"/>
+    <p:sldId id="261" r:id="rId11"/>
   </p:sldIdLst>
   <p:sldSz cx="18288000" cy="10287000"/>
   <p:notesSz cx="6858000" cy="9144000"/>
   <p:embeddedFontLst>
     <p:embeddedFont>
-      <p:font typeface="Codec Pro" panose="020B0604020202020204" charset="0"/>
-      <p:regular r:id="rId8"/>
+      <p:font typeface="Oswald Bold" charset="1" panose="00000800000000000000"/>
+      <p:regular r:id="rId12"/>
     </p:embeddedFont>
     <p:embeddedFont>
-      <p:font typeface="Oswald" panose="00000500000000000000" pitchFamily="2" charset="0"/>
-      <p:regular r:id="rId9"/>
+      <p:font typeface="Codec Pro" charset="1" panose="00000500000000000000"/>
+      <p:regular r:id="rId13"/>
     </p:embeddedFont>
     <p:embeddedFont>
-      <p:font typeface="Oswald Bold" panose="00000800000000000000" charset="0"/>
-      <p:regular r:id="rId10"/>
+      <p:font typeface="Oswald" charset="1" panose="00000500000000000000"/>
+      <p:regular r:id="rId14"/>
     </p:embeddedFont>
   </p:embeddedFontLst>
   <p:defaultTextStyle>
@@ -125,432 +123,7 @@
       </a:defRPr>
     </a:lvl9pPr>
   </p:defaultTextStyle>
-  <p:extLst>
-    <p:ext uri="{EFAFB233-063F-42B5-8137-9DF3F51BA10A}">
-      <p15:sldGuideLst xmlns:p15="http://schemas.microsoft.com/office/powerpoint/2012/main">
-        <p15:guide id="1" orient="horz" pos="2160">
-          <p15:clr>
-            <a:srgbClr val="A4A3A4"/>
-          </p15:clr>
-        </p15:guide>
-        <p15:guide id="2" pos="2880">
-          <p15:clr>
-            <a:srgbClr val="A4A3A4"/>
-          </p15:clr>
-        </p15:guide>
-      </p15:sldGuideLst>
-    </p:ext>
-  </p:extLst>
 </p:presentation>
-</file>
-
-<file path=ppt/revisionInfo.xml><?xml version="1.0" encoding="utf-8"?>
-<p1510:revInfo xmlns:a="http://schemas.openxmlformats.org/drawingml/2006/main" xmlns:r="http://schemas.openxmlformats.org/officeDocument/2006/relationships" xmlns:p1510="http://schemas.microsoft.com/office/powerpoint/2015/10/main">
-  <p1510:revLst>
-    <p1510:client id="{132DEA35-303A-4C15-9AEB-34A5D0B75E4B}" v="2" dt="2025-12-02T23:24:58.841"/>
-  </p1510:revLst>
-</p1510:revInfo>
-</file>
-
-<file path=ppt/changesInfos/changesInfo1.xml><?xml version="1.0" encoding="utf-8"?>
-<pc:chgInfo xmlns:a="http://schemas.openxmlformats.org/drawingml/2006/main" xmlns:r="http://schemas.openxmlformats.org/officeDocument/2006/relationships" xmlns:ac="http://schemas.microsoft.com/office/drawing/2013/main/command" xmlns:pc="http://schemas.microsoft.com/office/powerpoint/2013/main/command">
-  <pc:docChgLst>
-    <pc:chgData name="Martin Alvarez" userId="10705b4323551338" providerId="LiveId" clId="{132DEA35-303A-4C15-9AEB-34A5D0B75E4B}"/>
-    <pc:docChg chg="undo custSel delSld modSld">
-      <pc:chgData name="Martin Alvarez" userId="10705b4323551338" providerId="LiveId" clId="{132DEA35-303A-4C15-9AEB-34A5D0B75E4B}" dt="2025-12-02T23:21:20.067" v="13" actId="1076"/>
-      <pc:docMkLst>
-        <pc:docMk/>
-      </pc:docMkLst>
-      <pc:sldChg chg="modSp mod">
-        <pc:chgData name="Martin Alvarez" userId="10705b4323551338" providerId="LiveId" clId="{132DEA35-303A-4C15-9AEB-34A5D0B75E4B}" dt="2025-12-02T23:21:20.067" v="13" actId="1076"/>
-        <pc:sldMkLst>
-          <pc:docMk/>
-          <pc:sldMk cId="0" sldId="256"/>
-        </pc:sldMkLst>
-        <pc:grpChg chg="mod">
-          <ac:chgData name="Martin Alvarez" userId="10705b4323551338" providerId="LiveId" clId="{132DEA35-303A-4C15-9AEB-34A5D0B75E4B}" dt="2025-12-02T23:21:20.067" v="13" actId="1076"/>
-          <ac:grpSpMkLst>
-            <pc:docMk/>
-            <pc:sldMk cId="0" sldId="256"/>
-            <ac:grpSpMk id="18" creationId="{00000000-0000-0000-0000-000000000000}"/>
-          </ac:grpSpMkLst>
-        </pc:grpChg>
-      </pc:sldChg>
-      <pc:sldChg chg="del">
-        <pc:chgData name="Martin Alvarez" userId="10705b4323551338" providerId="LiveId" clId="{132DEA35-303A-4C15-9AEB-34A5D0B75E4B}" dt="2025-12-02T23:15:39.301" v="0" actId="47"/>
-        <pc:sldMkLst>
-          <pc:docMk/>
-          <pc:sldMk cId="0" sldId="257"/>
-        </pc:sldMkLst>
-      </pc:sldChg>
-      <pc:sldChg chg="modSp mod">
-        <pc:chgData name="Martin Alvarez" userId="10705b4323551338" providerId="LiveId" clId="{132DEA35-303A-4C15-9AEB-34A5D0B75E4B}" dt="2025-12-02T23:20:46.920" v="11" actId="1076"/>
-        <pc:sldMkLst>
-          <pc:docMk/>
-          <pc:sldMk cId="0" sldId="259"/>
-        </pc:sldMkLst>
-        <pc:spChg chg="mod">
-          <ac:chgData name="Martin Alvarez" userId="10705b4323551338" providerId="LiveId" clId="{132DEA35-303A-4C15-9AEB-34A5D0B75E4B}" dt="2025-12-02T23:20:46.920" v="11" actId="1076"/>
-          <ac:spMkLst>
-            <pc:docMk/>
-            <pc:sldMk cId="0" sldId="259"/>
-            <ac:spMk id="5" creationId="{00000000-0000-0000-0000-000000000000}"/>
-          </ac:spMkLst>
-        </pc:spChg>
-      </pc:sldChg>
-    </pc:docChg>
-  </pc:docChgLst>
-</pc:chgInfo>
-</file>
-
-<file path=ppt/notesMasters/notesMaster1.xml><?xml version="1.0" encoding="utf-8"?>
-<p:notesMaster xmlns:a="http://schemas.openxmlformats.org/drawingml/2006/main" xmlns:r="http://schemas.openxmlformats.org/officeDocument/2006/relationships" xmlns:p="http://schemas.openxmlformats.org/presentationml/2006/main">
-  <p:cSld>
-    <p:bg>
-      <p:bgRef idx="1001">
-        <a:schemeClr val="bg1"/>
-      </p:bgRef>
-    </p:bg>
-    <p:spTree>
-      <p:nvGrpSpPr>
-        <p:cNvPr id="1" name=""/>
-        <p:cNvGrpSpPr/>
-        <p:nvPr/>
-      </p:nvGrpSpPr>
-      <p:grpSpPr>
-        <a:xfrm>
-          <a:off x="0" y="0"/>
-          <a:ext cx="0" cy="0"/>
-          <a:chOff x="0" y="0"/>
-          <a:chExt cx="0" cy="0"/>
-        </a:xfrm>
-      </p:grpSpPr>
-      <p:sp>
-        <p:nvSpPr>
-          <p:cNvPr id="2" name="Marcador de encabezado 1"/>
-          <p:cNvSpPr>
-            <a:spLocks noGrp="1"/>
-          </p:cNvSpPr>
-          <p:nvPr>
-            <p:ph type="hdr" sz="quarter"/>
-          </p:nvPr>
-        </p:nvSpPr>
-        <p:spPr>
-          <a:xfrm>
-            <a:off x="0" y="0"/>
-            <a:ext cx="2971800" cy="458788"/>
-          </a:xfrm>
-          <a:prstGeom prst="rect">
-            <a:avLst/>
-          </a:prstGeom>
-        </p:spPr>
-        <p:txBody>
-          <a:bodyPr vert="horz" lIns="91440" tIns="45720" rIns="91440" bIns="45720" rtlCol="0"/>
-          <a:lstStyle>
-            <a:lvl1pPr algn="l">
-              <a:defRPr sz="1200"/>
-            </a:lvl1pPr>
-          </a:lstStyle>
-          <a:p>
-            <a:endParaRPr lang="es-AR"/>
-          </a:p>
-        </p:txBody>
-      </p:sp>
-      <p:sp>
-        <p:nvSpPr>
-          <p:cNvPr id="3" name="Marcador de fecha 2"/>
-          <p:cNvSpPr>
-            <a:spLocks noGrp="1"/>
-          </p:cNvSpPr>
-          <p:nvPr>
-            <p:ph type="dt" idx="1"/>
-          </p:nvPr>
-        </p:nvSpPr>
-        <p:spPr>
-          <a:xfrm>
-            <a:off x="3884613" y="0"/>
-            <a:ext cx="2971800" cy="458788"/>
-          </a:xfrm>
-          <a:prstGeom prst="rect">
-            <a:avLst/>
-          </a:prstGeom>
-        </p:spPr>
-        <p:txBody>
-          <a:bodyPr vert="horz" lIns="91440" tIns="45720" rIns="91440" bIns="45720" rtlCol="0"/>
-          <a:lstStyle>
-            <a:lvl1pPr algn="r">
-              <a:defRPr sz="1200"/>
-            </a:lvl1pPr>
-          </a:lstStyle>
-          <a:p>
-            <a:fld id="{96AE6B78-C38B-4B5C-9A59-4F2CB90A0972}" type="datetimeFigureOut">
-              <a:rPr lang="es-AR" smtClean="0"/>
-              <a:t>2/12/2025</a:t>
-            </a:fld>
-            <a:endParaRPr lang="es-AR"/>
-          </a:p>
-        </p:txBody>
-      </p:sp>
-      <p:sp>
-        <p:nvSpPr>
-          <p:cNvPr id="4" name="Marcador de imagen de diapositiva 3"/>
-          <p:cNvSpPr>
-            <a:spLocks noGrp="1" noRot="1" noChangeAspect="1"/>
-          </p:cNvSpPr>
-          <p:nvPr>
-            <p:ph type="sldImg" idx="2"/>
-          </p:nvPr>
-        </p:nvSpPr>
-        <p:spPr>
-          <a:xfrm>
-            <a:off x="685800" y="1143000"/>
-            <a:ext cx="5486400" cy="3086100"/>
-          </a:xfrm>
-          <a:prstGeom prst="rect">
-            <a:avLst/>
-          </a:prstGeom>
-          <a:noFill/>
-          <a:ln w="12700">
-            <a:solidFill>
-              <a:prstClr val="black"/>
-            </a:solidFill>
-          </a:ln>
-        </p:spPr>
-        <p:txBody>
-          <a:bodyPr vert="horz" lIns="91440" tIns="45720" rIns="91440" bIns="45720" rtlCol="0" anchor="ctr"/>
-          <a:lstStyle/>
-          <a:p>
-            <a:endParaRPr lang="es-AR"/>
-          </a:p>
-        </p:txBody>
-      </p:sp>
-      <p:sp>
-        <p:nvSpPr>
-          <p:cNvPr id="5" name="Marcador de notas 4"/>
-          <p:cNvSpPr>
-            <a:spLocks noGrp="1"/>
-          </p:cNvSpPr>
-          <p:nvPr>
-            <p:ph type="body" sz="quarter" idx="3"/>
-          </p:nvPr>
-        </p:nvSpPr>
-        <p:spPr>
-          <a:xfrm>
-            <a:off x="685800" y="4400550"/>
-            <a:ext cx="5486400" cy="3600450"/>
-          </a:xfrm>
-          <a:prstGeom prst="rect">
-            <a:avLst/>
-          </a:prstGeom>
-        </p:spPr>
-        <p:txBody>
-          <a:bodyPr vert="horz" lIns="91440" tIns="45720" rIns="91440" bIns="45720" rtlCol="0"/>
-          <a:lstStyle/>
-          <a:p>
-            <a:pPr lvl="0"/>
-            <a:r>
-              <a:rPr lang="es-ES"/>
-              <a:t>Haga clic para modificar los estilos de texto del patrón</a:t>
-            </a:r>
-          </a:p>
-          <a:p>
-            <a:pPr lvl="1"/>
-            <a:r>
-              <a:rPr lang="es-ES"/>
-              <a:t>Segundo nivel</a:t>
-            </a:r>
-          </a:p>
-          <a:p>
-            <a:pPr lvl="2"/>
-            <a:r>
-              <a:rPr lang="es-ES"/>
-              <a:t>Tercer nivel</a:t>
-            </a:r>
-          </a:p>
-          <a:p>
-            <a:pPr lvl="3"/>
-            <a:r>
-              <a:rPr lang="es-ES"/>
-              <a:t>Cuarto nivel</a:t>
-            </a:r>
-          </a:p>
-          <a:p>
-            <a:pPr lvl="4"/>
-            <a:r>
-              <a:rPr lang="es-ES"/>
-              <a:t>Quinto nivel</a:t>
-            </a:r>
-            <a:endParaRPr lang="es-AR"/>
-          </a:p>
-        </p:txBody>
-      </p:sp>
-      <p:sp>
-        <p:nvSpPr>
-          <p:cNvPr id="6" name="Marcador de pie de página 5"/>
-          <p:cNvSpPr>
-            <a:spLocks noGrp="1"/>
-          </p:cNvSpPr>
-          <p:nvPr>
-            <p:ph type="ftr" sz="quarter" idx="4"/>
-          </p:nvPr>
-        </p:nvSpPr>
-        <p:spPr>
-          <a:xfrm>
-            <a:off x="0" y="8685213"/>
-            <a:ext cx="2971800" cy="458787"/>
-          </a:xfrm>
-          <a:prstGeom prst="rect">
-            <a:avLst/>
-          </a:prstGeom>
-        </p:spPr>
-        <p:txBody>
-          <a:bodyPr vert="horz" lIns="91440" tIns="45720" rIns="91440" bIns="45720" rtlCol="0" anchor="b"/>
-          <a:lstStyle>
-            <a:lvl1pPr algn="l">
-              <a:defRPr sz="1200"/>
-            </a:lvl1pPr>
-          </a:lstStyle>
-          <a:p>
-            <a:endParaRPr lang="es-AR"/>
-          </a:p>
-        </p:txBody>
-      </p:sp>
-      <p:sp>
-        <p:nvSpPr>
-          <p:cNvPr id="7" name="Marcador de número de diapositiva 6"/>
-          <p:cNvSpPr>
-            <a:spLocks noGrp="1"/>
-          </p:cNvSpPr>
-          <p:nvPr>
-            <p:ph type="sldNum" sz="quarter" idx="5"/>
-          </p:nvPr>
-        </p:nvSpPr>
-        <p:spPr>
-          <a:xfrm>
-            <a:off x="3884613" y="8685213"/>
-            <a:ext cx="2971800" cy="458787"/>
-          </a:xfrm>
-          <a:prstGeom prst="rect">
-            <a:avLst/>
-          </a:prstGeom>
-        </p:spPr>
-        <p:txBody>
-          <a:bodyPr vert="horz" lIns="91440" tIns="45720" rIns="91440" bIns="45720" rtlCol="0" anchor="b"/>
-          <a:lstStyle>
-            <a:lvl1pPr algn="r">
-              <a:defRPr sz="1200"/>
-            </a:lvl1pPr>
-          </a:lstStyle>
-          <a:p>
-            <a:fld id="{C43209A0-CD1A-4331-85B8-A8CF64E15EE0}" type="slidenum">
-              <a:rPr lang="es-AR" smtClean="0"/>
-              <a:t>‹Nº›</a:t>
-            </a:fld>
-            <a:endParaRPr lang="es-AR"/>
-          </a:p>
-        </p:txBody>
-      </p:sp>
-    </p:spTree>
-    <p:extLst>
-      <p:ext uri="{BB962C8B-B14F-4D97-AF65-F5344CB8AC3E}">
-        <p14:creationId xmlns:p14="http://schemas.microsoft.com/office/powerpoint/2010/main" val="2250660096"/>
-      </p:ext>
-    </p:extLst>
-  </p:cSld>
-  <p:clrMap bg1="lt1" tx1="dk1" bg2="lt2" tx2="dk2" accent1="accent1" accent2="accent2" accent3="accent3" accent4="accent4" accent5="accent5" accent6="accent6" hlink="hlink" folHlink="folHlink"/>
-  <p:notesStyle>
-    <a:lvl1pPr marL="0" algn="l" defTabSz="914400" rtl="0" eaLnBrk="1" latinLnBrk="0" hangingPunct="1">
-      <a:defRPr sz="1200" kern="1200">
-        <a:solidFill>
-          <a:schemeClr val="tx1"/>
-        </a:solidFill>
-        <a:latin typeface="+mn-lt"/>
-        <a:ea typeface="+mn-ea"/>
-        <a:cs typeface="+mn-cs"/>
-      </a:defRPr>
-    </a:lvl1pPr>
-    <a:lvl2pPr marL="457200" algn="l" defTabSz="914400" rtl="0" eaLnBrk="1" latinLnBrk="0" hangingPunct="1">
-      <a:defRPr sz="1200" kern="1200">
-        <a:solidFill>
-          <a:schemeClr val="tx1"/>
-        </a:solidFill>
-        <a:latin typeface="+mn-lt"/>
-        <a:ea typeface="+mn-ea"/>
-        <a:cs typeface="+mn-cs"/>
-      </a:defRPr>
-    </a:lvl2pPr>
-    <a:lvl3pPr marL="914400" algn="l" defTabSz="914400" rtl="0" eaLnBrk="1" latinLnBrk="0" hangingPunct="1">
-      <a:defRPr sz="1200" kern="1200">
-        <a:solidFill>
-          <a:schemeClr val="tx1"/>
-        </a:solidFill>
-        <a:latin typeface="+mn-lt"/>
-        <a:ea typeface="+mn-ea"/>
-        <a:cs typeface="+mn-cs"/>
-      </a:defRPr>
-    </a:lvl3pPr>
-    <a:lvl4pPr marL="1371600" algn="l" defTabSz="914400" rtl="0" eaLnBrk="1" latinLnBrk="0" hangingPunct="1">
-      <a:defRPr sz="1200" kern="1200">
-        <a:solidFill>
-          <a:schemeClr val="tx1"/>
-        </a:solidFill>
-        <a:latin typeface="+mn-lt"/>
-        <a:ea typeface="+mn-ea"/>
-        <a:cs typeface="+mn-cs"/>
-      </a:defRPr>
-    </a:lvl4pPr>
-    <a:lvl5pPr marL="1828800" algn="l" defTabSz="914400" rtl="0" eaLnBrk="1" latinLnBrk="0" hangingPunct="1">
-      <a:defRPr sz="1200" kern="1200">
-        <a:solidFill>
-          <a:schemeClr val="tx1"/>
-        </a:solidFill>
-        <a:latin typeface="+mn-lt"/>
-        <a:ea typeface="+mn-ea"/>
-        <a:cs typeface="+mn-cs"/>
-      </a:defRPr>
-    </a:lvl5pPr>
-    <a:lvl6pPr marL="2286000" algn="l" defTabSz="914400" rtl="0" eaLnBrk="1" latinLnBrk="0" hangingPunct="1">
-      <a:defRPr sz="1200" kern="1200">
-        <a:solidFill>
-          <a:schemeClr val="tx1"/>
-        </a:solidFill>
-        <a:latin typeface="+mn-lt"/>
-        <a:ea typeface="+mn-ea"/>
-        <a:cs typeface="+mn-cs"/>
-      </a:defRPr>
-    </a:lvl6pPr>
-    <a:lvl7pPr marL="2743200" algn="l" defTabSz="914400" rtl="0" eaLnBrk="1" latinLnBrk="0" hangingPunct="1">
-      <a:defRPr sz="1200" kern="1200">
-        <a:solidFill>
-          <a:schemeClr val="tx1"/>
-        </a:solidFill>
-        <a:latin typeface="+mn-lt"/>
-        <a:ea typeface="+mn-ea"/>
-        <a:cs typeface="+mn-cs"/>
-      </a:defRPr>
-    </a:lvl7pPr>
-    <a:lvl8pPr marL="3200400" algn="l" defTabSz="914400" rtl="0" eaLnBrk="1" latinLnBrk="0" hangingPunct="1">
-      <a:defRPr sz="1200" kern="1200">
-        <a:solidFill>
-          <a:schemeClr val="tx1"/>
-        </a:solidFill>
-        <a:latin typeface="+mn-lt"/>
-        <a:ea typeface="+mn-ea"/>
-        <a:cs typeface="+mn-cs"/>
-      </a:defRPr>
-    </a:lvl8pPr>
-    <a:lvl9pPr marL="3657600" algn="l" defTabSz="914400" rtl="0" eaLnBrk="1" latinLnBrk="0" hangingPunct="1">
-      <a:defRPr sz="1200" kern="1200">
-        <a:solidFill>
-          <a:schemeClr val="tx1"/>
-        </a:solidFill>
-        <a:latin typeface="+mn-lt"/>
-        <a:ea typeface="+mn-ea"/>
-        <a:cs typeface="+mn-cs"/>
-      </a:defRPr>
-    </a:lvl9pPr>
-  </p:notesStyle>
-</p:notesMaster>
 </file>
 
 <file path=ppt/slideLayouts/slideLayout1.xml><?xml version="1.0" encoding="utf-8"?>
@@ -591,9 +164,10 @@
           <a:lstStyle/>
           <a:p>
             <a:r>
-              <a:rPr lang="en-US"/>
+              <a:rPr lang="en-US" smtClean="0"/>
               <a:t>Click to edit Master title style</a:t>
             </a:r>
+            <a:endParaRPr lang="en-US"/>
           </a:p>
         </p:txBody>
       </p:sp>
@@ -709,9 +283,10 @@
           </a:lstStyle>
           <a:p>
             <a:r>
-              <a:rPr lang="en-US"/>
+              <a:rPr lang="en-US" smtClean="0"/>
               <a:t>Click to edit Master subtitle style</a:t>
             </a:r>
+            <a:endParaRPr lang="en-US"/>
           </a:p>
         </p:txBody>
       </p:sp>
@@ -730,9 +305,10 @@
           <a:bodyPr/>
           <a:lstStyle/>
           <a:p>
-            <a:fld id="{2A427CD1-653D-4C01-A70A-EBF02967BB01}" type="datetime1">
-              <a:rPr lang="en-US" smtClean="0"/>
-              <a:t>12/2/2025</a:t>
+            <a:fld id="{1D8BD707-D9CF-40AE-B4C6-C98DA3205C09}" type="datetimeFigureOut">
+              <a:rPr lang="en-US" smtClean="0"/>
+              <a:pPr/>
+              <a:t>8/1/2011</a:t>
             </a:fld>
             <a:endParaRPr lang="en-US"/>
           </a:p>
@@ -775,7 +351,7 @@
             <a:fld id="{B6F15528-21DE-4FAA-801E-634DDDAF4B2B}" type="slidenum">
               <a:rPr lang="en-US" smtClean="0"/>
               <a:pPr/>
-              <a:t>‹Nº›</a:t>
+              <a:t>‹#›</a:t>
             </a:fld>
             <a:endParaRPr lang="en-US"/>
           </a:p>
@@ -822,9 +398,10 @@
           <a:lstStyle/>
           <a:p>
             <a:r>
-              <a:rPr lang="en-US"/>
+              <a:rPr lang="en-US" smtClean="0"/>
               <a:t>Click to edit Master title style</a:t>
             </a:r>
+            <a:endParaRPr lang="en-US"/>
           </a:p>
         </p:txBody>
       </p:sp>
@@ -845,37 +422,38 @@
           <a:p>
             <a:pPr lvl="0"/>
             <a:r>
-              <a:rPr lang="en-US"/>
+              <a:rPr lang="en-US" smtClean="0"/>
               <a:t>Click to edit Master text styles</a:t>
             </a:r>
           </a:p>
           <a:p>
             <a:pPr lvl="1"/>
             <a:r>
-              <a:rPr lang="en-US"/>
+              <a:rPr lang="en-US" smtClean="0"/>
               <a:t>Second level</a:t>
             </a:r>
           </a:p>
           <a:p>
             <a:pPr lvl="2"/>
             <a:r>
-              <a:rPr lang="en-US"/>
+              <a:rPr lang="en-US" smtClean="0"/>
               <a:t>Third level</a:t>
             </a:r>
           </a:p>
           <a:p>
             <a:pPr lvl="3"/>
             <a:r>
-              <a:rPr lang="en-US"/>
+              <a:rPr lang="en-US" smtClean="0"/>
               <a:t>Fourth level</a:t>
             </a:r>
           </a:p>
           <a:p>
             <a:pPr lvl="4"/>
             <a:r>
-              <a:rPr lang="en-US"/>
+              <a:rPr lang="en-US" smtClean="0"/>
               <a:t>Fifth level</a:t>
             </a:r>
+            <a:endParaRPr lang="en-US"/>
           </a:p>
         </p:txBody>
       </p:sp>
@@ -894,9 +472,10 @@
           <a:bodyPr/>
           <a:lstStyle/>
           <a:p>
-            <a:fld id="{5A062DD9-77C6-4C51-913D-36C0A901D8E2}" type="datetime1">
-              <a:rPr lang="en-US" smtClean="0"/>
-              <a:t>12/2/2025</a:t>
+            <a:fld id="{1D8BD707-D9CF-40AE-B4C6-C98DA3205C09}" type="datetimeFigureOut">
+              <a:rPr lang="en-US" smtClean="0"/>
+              <a:pPr/>
+              <a:t>8/1/2011</a:t>
             </a:fld>
             <a:endParaRPr lang="en-US"/>
           </a:p>
@@ -939,7 +518,7 @@
             <a:fld id="{B6F15528-21DE-4FAA-801E-634DDDAF4B2B}" type="slidenum">
               <a:rPr lang="en-US" smtClean="0"/>
               <a:pPr/>
-              <a:t>‹Nº›</a:t>
+              <a:t>‹#›</a:t>
             </a:fld>
             <a:endParaRPr lang="en-US"/>
           </a:p>
@@ -991,9 +570,10 @@
           <a:lstStyle/>
           <a:p>
             <a:r>
-              <a:rPr lang="en-US"/>
+              <a:rPr lang="en-US" smtClean="0"/>
               <a:t>Click to edit Master title style</a:t>
             </a:r>
+            <a:endParaRPr lang="en-US"/>
           </a:p>
         </p:txBody>
       </p:sp>
@@ -1019,37 +599,38 @@
           <a:p>
             <a:pPr lvl="0"/>
             <a:r>
-              <a:rPr lang="en-US"/>
+              <a:rPr lang="en-US" smtClean="0"/>
               <a:t>Click to edit Master text styles</a:t>
             </a:r>
           </a:p>
           <a:p>
             <a:pPr lvl="1"/>
             <a:r>
-              <a:rPr lang="en-US"/>
+              <a:rPr lang="en-US" smtClean="0"/>
               <a:t>Second level</a:t>
             </a:r>
           </a:p>
           <a:p>
             <a:pPr lvl="2"/>
             <a:r>
-              <a:rPr lang="en-US"/>
+              <a:rPr lang="en-US" smtClean="0"/>
               <a:t>Third level</a:t>
             </a:r>
           </a:p>
           <a:p>
             <a:pPr lvl="3"/>
             <a:r>
-              <a:rPr lang="en-US"/>
+              <a:rPr lang="en-US" smtClean="0"/>
               <a:t>Fourth level</a:t>
             </a:r>
           </a:p>
           <a:p>
             <a:pPr lvl="4"/>
             <a:r>
-              <a:rPr lang="en-US"/>
+              <a:rPr lang="en-US" smtClean="0"/>
               <a:t>Fifth level</a:t>
             </a:r>
+            <a:endParaRPr lang="en-US"/>
           </a:p>
         </p:txBody>
       </p:sp>
@@ -1068,9 +649,10 @@
           <a:bodyPr/>
           <a:lstStyle/>
           <a:p>
-            <a:fld id="{CE16C94D-AE0F-4C46-9C46-222085FAE477}" type="datetime1">
-              <a:rPr lang="en-US" smtClean="0"/>
-              <a:t>12/2/2025</a:t>
+            <a:fld id="{1D8BD707-D9CF-40AE-B4C6-C98DA3205C09}" type="datetimeFigureOut">
+              <a:rPr lang="en-US" smtClean="0"/>
+              <a:pPr/>
+              <a:t>8/1/2011</a:t>
             </a:fld>
             <a:endParaRPr lang="en-US"/>
           </a:p>
@@ -1113,7 +695,7 @@
             <a:fld id="{B6F15528-21DE-4FAA-801E-634DDDAF4B2B}" type="slidenum">
               <a:rPr lang="en-US" smtClean="0"/>
               <a:pPr/>
-              <a:t>‹Nº›</a:t>
+              <a:t>‹#›</a:t>
             </a:fld>
             <a:endParaRPr lang="en-US"/>
           </a:p>
@@ -1160,9 +742,10 @@
           <a:lstStyle/>
           <a:p>
             <a:r>
-              <a:rPr lang="en-US"/>
+              <a:rPr lang="en-US" smtClean="0"/>
               <a:t>Click to edit Master title style</a:t>
             </a:r>
+            <a:endParaRPr lang="en-US"/>
           </a:p>
         </p:txBody>
       </p:sp>
@@ -1183,37 +766,38 @@
           <a:p>
             <a:pPr lvl="0"/>
             <a:r>
-              <a:rPr lang="en-US"/>
+              <a:rPr lang="en-US" smtClean="0"/>
               <a:t>Click to edit Master text styles</a:t>
             </a:r>
           </a:p>
           <a:p>
             <a:pPr lvl="1"/>
             <a:r>
-              <a:rPr lang="en-US"/>
+              <a:rPr lang="en-US" smtClean="0"/>
               <a:t>Second level</a:t>
             </a:r>
           </a:p>
           <a:p>
             <a:pPr lvl="2"/>
             <a:r>
-              <a:rPr lang="en-US"/>
+              <a:rPr lang="en-US" smtClean="0"/>
               <a:t>Third level</a:t>
             </a:r>
           </a:p>
           <a:p>
             <a:pPr lvl="3"/>
             <a:r>
-              <a:rPr lang="en-US"/>
+              <a:rPr lang="en-US" smtClean="0"/>
               <a:t>Fourth level</a:t>
             </a:r>
           </a:p>
           <a:p>
             <a:pPr lvl="4"/>
             <a:r>
-              <a:rPr lang="en-US"/>
+              <a:rPr lang="en-US" smtClean="0"/>
               <a:t>Fifth level</a:t>
             </a:r>
+            <a:endParaRPr lang="en-US"/>
           </a:p>
         </p:txBody>
       </p:sp>
@@ -1232,9 +816,10 @@
           <a:bodyPr/>
           <a:lstStyle/>
           <a:p>
-            <a:fld id="{52B56737-861B-4959-9C60-074AAC73B472}" type="datetime1">
-              <a:rPr lang="en-US" smtClean="0"/>
-              <a:t>12/2/2025</a:t>
+            <a:fld id="{1D8BD707-D9CF-40AE-B4C6-C98DA3205C09}" type="datetimeFigureOut">
+              <a:rPr lang="en-US" smtClean="0"/>
+              <a:pPr/>
+              <a:t>8/1/2011</a:t>
             </a:fld>
             <a:endParaRPr lang="en-US"/>
           </a:p>
@@ -1277,7 +862,7 @@
             <a:fld id="{B6F15528-21DE-4FAA-801E-634DDDAF4B2B}" type="slidenum">
               <a:rPr lang="en-US" smtClean="0"/>
               <a:pPr/>
-              <a:t>‹Nº›</a:t>
+              <a:t>‹#›</a:t>
             </a:fld>
             <a:endParaRPr lang="en-US"/>
           </a:p>
@@ -1333,9 +918,10 @@
           </a:lstStyle>
           <a:p>
             <a:r>
-              <a:rPr lang="en-US"/>
+              <a:rPr lang="en-US" smtClean="0"/>
               <a:t>Click to edit Master title style</a:t>
             </a:r>
+            <a:endParaRPr lang="en-US"/>
           </a:p>
         </p:txBody>
       </p:sp>
@@ -1452,7 +1038,7 @@
           <a:p>
             <a:pPr lvl="0"/>
             <a:r>
-              <a:rPr lang="en-US"/>
+              <a:rPr lang="en-US" smtClean="0"/>
               <a:t>Click to edit Master text styles</a:t>
             </a:r>
           </a:p>
@@ -1473,9 +1059,10 @@
           <a:bodyPr/>
           <a:lstStyle/>
           <a:p>
-            <a:fld id="{C966D4B1-8A13-4251-A41C-372CBDDB8917}" type="datetime1">
-              <a:rPr lang="en-US" smtClean="0"/>
-              <a:t>12/2/2025</a:t>
+            <a:fld id="{1D8BD707-D9CF-40AE-B4C6-C98DA3205C09}" type="datetimeFigureOut">
+              <a:rPr lang="en-US" smtClean="0"/>
+              <a:pPr/>
+              <a:t>8/1/2011</a:t>
             </a:fld>
             <a:endParaRPr lang="en-US"/>
           </a:p>
@@ -1518,7 +1105,7 @@
             <a:fld id="{B6F15528-21DE-4FAA-801E-634DDDAF4B2B}" type="slidenum">
               <a:rPr lang="en-US" smtClean="0"/>
               <a:pPr/>
-              <a:t>‹Nº›</a:t>
+              <a:t>‹#›</a:t>
             </a:fld>
             <a:endParaRPr lang="en-US"/>
           </a:p>
@@ -1565,9 +1152,10 @@
           <a:lstStyle/>
           <a:p>
             <a:r>
-              <a:rPr lang="en-US"/>
+              <a:rPr lang="en-US" smtClean="0"/>
               <a:t>Click to edit Master title style</a:t>
             </a:r>
+            <a:endParaRPr lang="en-US"/>
           </a:p>
         </p:txBody>
       </p:sp>
@@ -1621,37 +1209,38 @@
           <a:p>
             <a:pPr lvl="0"/>
             <a:r>
-              <a:rPr lang="en-US"/>
+              <a:rPr lang="en-US" smtClean="0"/>
               <a:t>Click to edit Master text styles</a:t>
             </a:r>
           </a:p>
           <a:p>
             <a:pPr lvl="1"/>
             <a:r>
-              <a:rPr lang="en-US"/>
+              <a:rPr lang="en-US" smtClean="0"/>
               <a:t>Second level</a:t>
             </a:r>
           </a:p>
           <a:p>
             <a:pPr lvl="2"/>
             <a:r>
-              <a:rPr lang="en-US"/>
+              <a:rPr lang="en-US" smtClean="0"/>
               <a:t>Third level</a:t>
             </a:r>
           </a:p>
           <a:p>
             <a:pPr lvl="3"/>
             <a:r>
-              <a:rPr lang="en-US"/>
+              <a:rPr lang="en-US" smtClean="0"/>
               <a:t>Fourth level</a:t>
             </a:r>
           </a:p>
           <a:p>
             <a:pPr lvl="4"/>
             <a:r>
-              <a:rPr lang="en-US"/>
+              <a:rPr lang="en-US" smtClean="0"/>
               <a:t>Fifth level</a:t>
             </a:r>
+            <a:endParaRPr lang="en-US"/>
           </a:p>
         </p:txBody>
       </p:sp>
@@ -1705,37 +1294,38 @@
           <a:p>
             <a:pPr lvl="0"/>
             <a:r>
-              <a:rPr lang="en-US"/>
+              <a:rPr lang="en-US" smtClean="0"/>
               <a:t>Click to edit Master text styles</a:t>
             </a:r>
           </a:p>
           <a:p>
             <a:pPr lvl="1"/>
             <a:r>
-              <a:rPr lang="en-US"/>
+              <a:rPr lang="en-US" smtClean="0"/>
               <a:t>Second level</a:t>
             </a:r>
           </a:p>
           <a:p>
             <a:pPr lvl="2"/>
             <a:r>
-              <a:rPr lang="en-US"/>
+              <a:rPr lang="en-US" smtClean="0"/>
               <a:t>Third level</a:t>
             </a:r>
           </a:p>
           <a:p>
             <a:pPr lvl="3"/>
             <a:r>
-              <a:rPr lang="en-US"/>
+              <a:rPr lang="en-US" smtClean="0"/>
               <a:t>Fourth level</a:t>
             </a:r>
           </a:p>
           <a:p>
             <a:pPr lvl="4"/>
             <a:r>
-              <a:rPr lang="en-US"/>
+              <a:rPr lang="en-US" smtClean="0"/>
               <a:t>Fifth level</a:t>
             </a:r>
+            <a:endParaRPr lang="en-US"/>
           </a:p>
         </p:txBody>
       </p:sp>
@@ -1754,9 +1344,10 @@
           <a:bodyPr/>
           <a:lstStyle/>
           <a:p>
-            <a:fld id="{754A917F-4E98-4D41-8796-1B2CF10B83E5}" type="datetime1">
-              <a:rPr lang="en-US" smtClean="0"/>
-              <a:t>12/2/2025</a:t>
+            <a:fld id="{1D8BD707-D9CF-40AE-B4C6-C98DA3205C09}" type="datetimeFigureOut">
+              <a:rPr lang="en-US" smtClean="0"/>
+              <a:pPr/>
+              <a:t>8/1/2011</a:t>
             </a:fld>
             <a:endParaRPr lang="en-US"/>
           </a:p>
@@ -1799,7 +1390,7 @@
             <a:fld id="{B6F15528-21DE-4FAA-801E-634DDDAF4B2B}" type="slidenum">
               <a:rPr lang="en-US" smtClean="0"/>
               <a:pPr/>
-              <a:t>‹Nº›</a:t>
+              <a:t>‹#›</a:t>
             </a:fld>
             <a:endParaRPr lang="en-US"/>
           </a:p>
@@ -1850,9 +1441,10 @@
           </a:lstStyle>
           <a:p>
             <a:r>
-              <a:rPr lang="en-US"/>
+              <a:rPr lang="en-US" smtClean="0"/>
               <a:t>Click to edit Master title style</a:t>
             </a:r>
+            <a:endParaRPr lang="en-US"/>
           </a:p>
         </p:txBody>
       </p:sp>
@@ -1915,7 +1507,7 @@
           <a:p>
             <a:pPr lvl="0"/>
             <a:r>
-              <a:rPr lang="en-US"/>
+              <a:rPr lang="en-US" smtClean="0"/>
               <a:t>Click to edit Master text styles</a:t>
             </a:r>
           </a:p>
@@ -1971,37 +1563,38 @@
           <a:p>
             <a:pPr lvl="0"/>
             <a:r>
-              <a:rPr lang="en-US"/>
+              <a:rPr lang="en-US" smtClean="0"/>
               <a:t>Click to edit Master text styles</a:t>
             </a:r>
           </a:p>
           <a:p>
             <a:pPr lvl="1"/>
             <a:r>
-              <a:rPr lang="en-US"/>
+              <a:rPr lang="en-US" smtClean="0"/>
               <a:t>Second level</a:t>
             </a:r>
           </a:p>
           <a:p>
             <a:pPr lvl="2"/>
             <a:r>
-              <a:rPr lang="en-US"/>
+              <a:rPr lang="en-US" smtClean="0"/>
               <a:t>Third level</a:t>
             </a:r>
           </a:p>
           <a:p>
             <a:pPr lvl="3"/>
             <a:r>
-              <a:rPr lang="en-US"/>
+              <a:rPr lang="en-US" smtClean="0"/>
               <a:t>Fourth level</a:t>
             </a:r>
           </a:p>
           <a:p>
             <a:pPr lvl="4"/>
             <a:r>
-              <a:rPr lang="en-US"/>
+              <a:rPr lang="en-US" smtClean="0"/>
               <a:t>Fifth level</a:t>
             </a:r>
+            <a:endParaRPr lang="en-US"/>
           </a:p>
         </p:txBody>
       </p:sp>
@@ -2064,7 +1657,7 @@
           <a:p>
             <a:pPr lvl="0"/>
             <a:r>
-              <a:rPr lang="en-US"/>
+              <a:rPr lang="en-US" smtClean="0"/>
               <a:t>Click to edit Master text styles</a:t>
             </a:r>
           </a:p>
@@ -2120,37 +1713,38 @@
           <a:p>
             <a:pPr lvl="0"/>
             <a:r>
-              <a:rPr lang="en-US"/>
+              <a:rPr lang="en-US" smtClean="0"/>
               <a:t>Click to edit Master text styles</a:t>
             </a:r>
           </a:p>
           <a:p>
             <a:pPr lvl="1"/>
             <a:r>
-              <a:rPr lang="en-US"/>
+              <a:rPr lang="en-US" smtClean="0"/>
               <a:t>Second level</a:t>
             </a:r>
           </a:p>
           <a:p>
             <a:pPr lvl="2"/>
             <a:r>
-              <a:rPr lang="en-US"/>
+              <a:rPr lang="en-US" smtClean="0"/>
               <a:t>Third level</a:t>
             </a:r>
           </a:p>
           <a:p>
             <a:pPr lvl="3"/>
             <a:r>
-              <a:rPr lang="en-US"/>
+              <a:rPr lang="en-US" smtClean="0"/>
               <a:t>Fourth level</a:t>
             </a:r>
           </a:p>
           <a:p>
             <a:pPr lvl="4"/>
             <a:r>
-              <a:rPr lang="en-US"/>
+              <a:rPr lang="en-US" smtClean="0"/>
               <a:t>Fifth level</a:t>
             </a:r>
+            <a:endParaRPr lang="en-US"/>
           </a:p>
         </p:txBody>
       </p:sp>
@@ -2169,9 +1763,10 @@
           <a:bodyPr/>
           <a:lstStyle/>
           <a:p>
-            <a:fld id="{A3824CCE-5EF6-4015-9F67-6658875882EC}" type="datetime1">
-              <a:rPr lang="en-US" smtClean="0"/>
-              <a:t>12/2/2025</a:t>
+            <a:fld id="{1D8BD707-D9CF-40AE-B4C6-C98DA3205C09}" type="datetimeFigureOut">
+              <a:rPr lang="en-US" smtClean="0"/>
+              <a:pPr/>
+              <a:t>8/1/2011</a:t>
             </a:fld>
             <a:endParaRPr lang="en-US"/>
           </a:p>
@@ -2214,7 +1809,7 @@
             <a:fld id="{B6F15528-21DE-4FAA-801E-634DDDAF4B2B}" type="slidenum">
               <a:rPr lang="en-US" smtClean="0"/>
               <a:pPr/>
-              <a:t>‹Nº›</a:t>
+              <a:t>‹#›</a:t>
             </a:fld>
             <a:endParaRPr lang="en-US"/>
           </a:p>
@@ -2261,9 +1856,10 @@
           <a:lstStyle/>
           <a:p>
             <a:r>
-              <a:rPr lang="en-US"/>
+              <a:rPr lang="en-US" smtClean="0"/>
               <a:t>Click to edit Master title style</a:t>
             </a:r>
+            <a:endParaRPr lang="en-US"/>
           </a:p>
         </p:txBody>
       </p:sp>
@@ -2282,9 +1878,10 @@
           <a:bodyPr/>
           <a:lstStyle/>
           <a:p>
-            <a:fld id="{9ED0D5BB-E8D6-43D6-AA60-0B8C64A0FD9D}" type="datetime1">
-              <a:rPr lang="en-US" smtClean="0"/>
-              <a:t>12/2/2025</a:t>
+            <a:fld id="{1D8BD707-D9CF-40AE-B4C6-C98DA3205C09}" type="datetimeFigureOut">
+              <a:rPr lang="en-US" smtClean="0"/>
+              <a:pPr/>
+              <a:t>8/1/2011</a:t>
             </a:fld>
             <a:endParaRPr lang="en-US"/>
           </a:p>
@@ -2327,7 +1924,7 @@
             <a:fld id="{B6F15528-21DE-4FAA-801E-634DDDAF4B2B}" type="slidenum">
               <a:rPr lang="en-US" smtClean="0"/>
               <a:pPr/>
-              <a:t>‹Nº›</a:t>
+              <a:t>‹#›</a:t>
             </a:fld>
             <a:endParaRPr lang="en-US"/>
           </a:p>
@@ -2373,9 +1970,10 @@
           <a:bodyPr/>
           <a:lstStyle/>
           <a:p>
-            <a:fld id="{315A25CB-95E4-442F-A0D2-0AFD9D7B51BC}" type="datetime1">
-              <a:rPr lang="en-US" smtClean="0"/>
-              <a:t>12/2/2025</a:t>
+            <a:fld id="{1D8BD707-D9CF-40AE-B4C6-C98DA3205C09}" type="datetimeFigureOut">
+              <a:rPr lang="en-US" smtClean="0"/>
+              <a:pPr/>
+              <a:t>8/1/2011</a:t>
             </a:fld>
             <a:endParaRPr lang="en-US"/>
           </a:p>
@@ -2418,7 +2016,7 @@
             <a:fld id="{B6F15528-21DE-4FAA-801E-634DDDAF4B2B}" type="slidenum">
               <a:rPr lang="en-US" smtClean="0"/>
               <a:pPr/>
-              <a:t>‹Nº›</a:t>
+              <a:t>‹#›</a:t>
             </a:fld>
             <a:endParaRPr lang="en-US"/>
           </a:p>
@@ -2474,9 +2072,10 @@
           </a:lstStyle>
           <a:p>
             <a:r>
-              <a:rPr lang="en-US"/>
+              <a:rPr lang="en-US" smtClean="0"/>
               <a:t>Click to edit Master title style</a:t>
             </a:r>
+            <a:endParaRPr lang="en-US"/>
           </a:p>
         </p:txBody>
       </p:sp>
@@ -2530,37 +2129,38 @@
           <a:p>
             <a:pPr lvl="0"/>
             <a:r>
-              <a:rPr lang="en-US"/>
+              <a:rPr lang="en-US" smtClean="0"/>
               <a:t>Click to edit Master text styles</a:t>
             </a:r>
           </a:p>
           <a:p>
             <a:pPr lvl="1"/>
             <a:r>
-              <a:rPr lang="en-US"/>
+              <a:rPr lang="en-US" smtClean="0"/>
               <a:t>Second level</a:t>
             </a:r>
           </a:p>
           <a:p>
             <a:pPr lvl="2"/>
             <a:r>
-              <a:rPr lang="en-US"/>
+              <a:rPr lang="en-US" smtClean="0"/>
               <a:t>Third level</a:t>
             </a:r>
           </a:p>
           <a:p>
             <a:pPr lvl="3"/>
             <a:r>
-              <a:rPr lang="en-US"/>
+              <a:rPr lang="en-US" smtClean="0"/>
               <a:t>Fourth level</a:t>
             </a:r>
           </a:p>
           <a:p>
             <a:pPr lvl="4"/>
             <a:r>
-              <a:rPr lang="en-US"/>
+              <a:rPr lang="en-US" smtClean="0"/>
               <a:t>Fifth level</a:t>
             </a:r>
+            <a:endParaRPr lang="en-US"/>
           </a:p>
         </p:txBody>
       </p:sp>
@@ -2623,7 +2223,7 @@
           <a:p>
             <a:pPr lvl="0"/>
             <a:r>
-              <a:rPr lang="en-US"/>
+              <a:rPr lang="en-US" smtClean="0"/>
               <a:t>Click to edit Master text styles</a:t>
             </a:r>
           </a:p>
@@ -2644,9 +2244,10 @@
           <a:bodyPr/>
           <a:lstStyle/>
           <a:p>
-            <a:fld id="{DAF29532-E92F-4FB5-B3B8-2C218D994B91}" type="datetime1">
-              <a:rPr lang="en-US" smtClean="0"/>
-              <a:t>12/2/2025</a:t>
+            <a:fld id="{1D8BD707-D9CF-40AE-B4C6-C98DA3205C09}" type="datetimeFigureOut">
+              <a:rPr lang="en-US" smtClean="0"/>
+              <a:pPr/>
+              <a:t>8/1/2011</a:t>
             </a:fld>
             <a:endParaRPr lang="en-US"/>
           </a:p>
@@ -2689,7 +2290,7 @@
             <a:fld id="{B6F15528-21DE-4FAA-801E-634DDDAF4B2B}" type="slidenum">
               <a:rPr lang="en-US" smtClean="0"/>
               <a:pPr/>
-              <a:t>‹Nº›</a:t>
+              <a:t>‹#›</a:t>
             </a:fld>
             <a:endParaRPr lang="en-US"/>
           </a:p>
@@ -2745,9 +2346,10 @@
           </a:lstStyle>
           <a:p>
             <a:r>
-              <a:rPr lang="en-US"/>
+              <a:rPr lang="en-US" smtClean="0"/>
               <a:t>Click to edit Master title style</a:t>
             </a:r>
+            <a:endParaRPr lang="en-US"/>
           </a:p>
         </p:txBody>
       </p:sp>
@@ -2871,7 +2473,7 @@
           <a:p>
             <a:pPr lvl="0"/>
             <a:r>
-              <a:rPr lang="en-US"/>
+              <a:rPr lang="en-US" smtClean="0"/>
               <a:t>Click to edit Master text styles</a:t>
             </a:r>
           </a:p>
@@ -2892,9 +2494,10 @@
           <a:bodyPr/>
           <a:lstStyle/>
           <a:p>
-            <a:fld id="{A6FBAB1A-DAE0-424E-B439-31162A1F4D39}" type="datetime1">
-              <a:rPr lang="en-US" smtClean="0"/>
-              <a:t>12/2/2025</a:t>
+            <a:fld id="{1D8BD707-D9CF-40AE-B4C6-C98DA3205C09}" type="datetimeFigureOut">
+              <a:rPr lang="en-US" smtClean="0"/>
+              <a:pPr/>
+              <a:t>8/1/2011</a:t>
             </a:fld>
             <a:endParaRPr lang="en-US"/>
           </a:p>
@@ -2937,7 +2540,7 @@
             <a:fld id="{B6F15528-21DE-4FAA-801E-634DDDAF4B2B}" type="slidenum">
               <a:rPr lang="en-US" smtClean="0"/>
               <a:pPr/>
-              <a:t>‹Nº›</a:t>
+              <a:t>‹#›</a:t>
             </a:fld>
             <a:endParaRPr lang="en-US"/>
           </a:p>
@@ -2999,9 +2602,10 @@
           <a:lstStyle/>
           <a:p>
             <a:r>
-              <a:rPr lang="en-US"/>
+              <a:rPr lang="en-US" smtClean="0"/>
               <a:t>Click to edit Master title style</a:t>
             </a:r>
+            <a:endParaRPr lang="en-US"/>
           </a:p>
         </p:txBody>
       </p:sp>
@@ -3032,37 +2636,38 @@
           <a:p>
             <a:pPr lvl="0"/>
             <a:r>
-              <a:rPr lang="en-US"/>
+              <a:rPr lang="en-US" smtClean="0"/>
               <a:t>Click to edit Master text styles</a:t>
             </a:r>
           </a:p>
           <a:p>
             <a:pPr lvl="1"/>
             <a:r>
-              <a:rPr lang="en-US"/>
+              <a:rPr lang="en-US" smtClean="0"/>
               <a:t>Second level</a:t>
             </a:r>
           </a:p>
           <a:p>
             <a:pPr lvl="2"/>
             <a:r>
-              <a:rPr lang="en-US"/>
+              <a:rPr lang="en-US" smtClean="0"/>
               <a:t>Third level</a:t>
             </a:r>
           </a:p>
           <a:p>
             <a:pPr lvl="3"/>
             <a:r>
-              <a:rPr lang="en-US"/>
+              <a:rPr lang="en-US" smtClean="0"/>
               <a:t>Fourth level</a:t>
             </a:r>
           </a:p>
           <a:p>
             <a:pPr lvl="4"/>
             <a:r>
-              <a:rPr lang="en-US"/>
+              <a:rPr lang="en-US" smtClean="0"/>
               <a:t>Fifth level</a:t>
             </a:r>
+            <a:endParaRPr lang="en-US"/>
           </a:p>
         </p:txBody>
       </p:sp>
@@ -3099,9 +2704,10 @@
             </a:lvl1pPr>
           </a:lstStyle>
           <a:p>
-            <a:fld id="{C08AAA80-E11B-44F0-B01B-889CA5A8CBB2}" type="datetime1">
-              <a:rPr lang="en-US" smtClean="0"/>
-              <a:t>12/2/2025</a:t>
+            <a:fld id="{1D8BD707-D9CF-40AE-B4C6-C98DA3205C09}" type="datetimeFigureOut">
+              <a:rPr lang="en-US" smtClean="0"/>
+              <a:pPr/>
+              <a:t>8/1/2011</a:t>
             </a:fld>
             <a:endParaRPr lang="en-US"/>
           </a:p>
@@ -3180,7 +2786,7 @@
             <a:fld id="{B6F15528-21DE-4FAA-801E-634DDDAF4B2B}" type="slidenum">
               <a:rPr lang="en-US" smtClean="0"/>
               <a:pPr/>
-              <a:t>‹Nº›</a:t>
+              <a:t>‹#›</a:t>
             </a:fld>
             <a:endParaRPr lang="en-US"/>
           </a:p>
@@ -3202,7 +2808,6 @@
     <p:sldLayoutId id="2147483658" r:id="rId10"/>
     <p:sldLayoutId id="2147483659" r:id="rId11"/>
   </p:sldLayoutIdLst>
-  <p:hf hdr="0" ftr="0" dt="0"/>
   <p:txStyles>
     <p:titleStyle>
       <a:lvl1pPr algn="ctr" defTabSz="914400" rtl="0" eaLnBrk="1" latinLnBrk="0" hangingPunct="1">
@@ -3457,14 +3062,13 @@
 </file>
 
 <file path=ppt/slides/slide1.xml><?xml version="1.0" encoding="utf-8"?>
-<p:sld xmlns:a="http://schemas.openxmlformats.org/drawingml/2006/main" xmlns:r="http://schemas.openxmlformats.org/officeDocument/2006/relationships" xmlns:p="http://schemas.openxmlformats.org/presentationml/2006/main">
+<p:sld xmlns:p="http://schemas.openxmlformats.org/presentationml/2006/main" xmlns:a="http://schemas.openxmlformats.org/drawingml/2006/main">
   <p:cSld>
     <p:bg>
       <p:bgPr>
         <a:solidFill>
           <a:srgbClr val="132232"/>
         </a:solidFill>
-        <a:effectLst/>
       </p:bgPr>
     </p:bg>
     <p:spTree>
@@ -3483,9 +3087,9 @@
       </p:grpSpPr>
       <p:grpSp>
         <p:nvGrpSpPr>
-          <p:cNvPr id="2" name="Group 2"/>
+          <p:cNvPr name="Group 2" id="2"/>
           <p:cNvGrpSpPr>
-            <a:grpSpLocks noChangeAspect="1"/>
+            <a:grpSpLocks noChangeAspect="true"/>
           </p:cNvGrpSpPr>
           <p:nvPr/>
         </p:nvGrpSpPr>
@@ -3499,12 +3103,12 @@
         </p:grpSpPr>
         <p:sp>
           <p:nvSpPr>
-            <p:cNvPr id="3" name="Freeform 3"/>
+            <p:cNvPr name="Freeform 3" id="3"/>
             <p:cNvSpPr/>
             <p:nvPr/>
           </p:nvSpPr>
           <p:spPr>
-            <a:xfrm>
+            <a:xfrm flipH="false" flipV="false" rot="0">
               <a:off x="4318" y="4318"/>
               <a:ext cx="3157347" cy="6273419"/>
             </a:xfrm>
@@ -3513,9 +3117,9 @@
               <a:gdLst/>
               <a:ahLst/>
               <a:cxnLst/>
-              <a:rect l="l" t="t" r="r" b="b"/>
+              <a:rect r="r" b="b" t="t" l="l"/>
               <a:pathLst>
-                <a:path w="3157347" h="6273419">
+                <a:path h="6273419" w="3157347">
                   <a:moveTo>
                     <a:pt x="3049651" y="6273419"/>
                   </a:moveTo>
@@ -3564,22 +3168,15 @@
               </a:solidFill>
             </a:ln>
           </p:spPr>
-          <p:txBody>
-            <a:bodyPr/>
-            <a:lstStyle/>
-            <a:p>
-              <a:endParaRPr lang="es-AR"/>
-            </a:p>
-          </p:txBody>
         </p:sp>
         <p:sp>
           <p:nvSpPr>
-            <p:cNvPr id="4" name="Freeform 4"/>
+            <p:cNvPr name="Freeform 4" id="4"/>
             <p:cNvSpPr/>
             <p:nvPr/>
           </p:nvSpPr>
           <p:spPr>
-            <a:xfrm>
+            <a:xfrm flipH="false" flipV="false" rot="0">
               <a:off x="0" y="0"/>
               <a:ext cx="3166110" cy="6282055"/>
             </a:xfrm>
@@ -3588,9 +3185,9 @@
               <a:gdLst/>
               <a:ahLst/>
               <a:cxnLst/>
-              <a:rect l="l" t="t" r="r" b="b"/>
+              <a:rect r="r" b="b" t="t" l="l"/>
               <a:pathLst>
-                <a:path w="3166110" h="6282055">
+                <a:path h="6282055" w="3166110">
                   <a:moveTo>
                     <a:pt x="3053969" y="6282055"/>
                   </a:moveTo>
@@ -3724,20 +3321,13 @@
               <a:srgbClr val="132232"/>
             </a:solidFill>
           </p:spPr>
-          <p:txBody>
-            <a:bodyPr/>
-            <a:lstStyle/>
-            <a:p>
-              <a:endParaRPr lang="es-AR"/>
-            </a:p>
-          </p:txBody>
         </p:sp>
       </p:grpSp>
       <p:grpSp>
         <p:nvGrpSpPr>
-          <p:cNvPr id="5" name="Group 5"/>
+          <p:cNvPr name="Group 5" id="5"/>
           <p:cNvGrpSpPr>
-            <a:grpSpLocks noChangeAspect="1"/>
+            <a:grpSpLocks noChangeAspect="true"/>
           </p:cNvGrpSpPr>
           <p:nvPr/>
         </p:nvGrpSpPr>
@@ -3751,12 +3341,12 @@
         </p:grpSpPr>
         <p:sp>
           <p:nvSpPr>
-            <p:cNvPr id="6" name="Freeform 6"/>
+            <p:cNvPr name="Freeform 6" id="6"/>
             <p:cNvSpPr/>
             <p:nvPr/>
           </p:nvSpPr>
           <p:spPr>
-            <a:xfrm>
+            <a:xfrm flipH="false" flipV="false" rot="0">
               <a:off x="4318" y="4318"/>
               <a:ext cx="3157347" cy="6273419"/>
             </a:xfrm>
@@ -3765,9 +3355,9 @@
               <a:gdLst/>
               <a:ahLst/>
               <a:cxnLst/>
-              <a:rect l="l" t="t" r="r" b="b"/>
+              <a:rect r="r" b="b" t="t" l="l"/>
               <a:pathLst>
-                <a:path w="3157347" h="6273419">
+                <a:path h="6273419" w="3157347">
                   <a:moveTo>
                     <a:pt x="3049651" y="6273419"/>
                   </a:moveTo>
@@ -3816,22 +3406,15 @@
               </a:solidFill>
             </a:ln>
           </p:spPr>
-          <p:txBody>
-            <a:bodyPr/>
-            <a:lstStyle/>
-            <a:p>
-              <a:endParaRPr lang="es-AR"/>
-            </a:p>
-          </p:txBody>
         </p:sp>
         <p:sp>
           <p:nvSpPr>
-            <p:cNvPr id="7" name="Freeform 7"/>
+            <p:cNvPr name="Freeform 7" id="7"/>
             <p:cNvSpPr/>
             <p:nvPr/>
           </p:nvSpPr>
           <p:spPr>
-            <a:xfrm>
+            <a:xfrm flipH="false" flipV="false" rot="0">
               <a:off x="0" y="0"/>
               <a:ext cx="3166110" cy="6282055"/>
             </a:xfrm>
@@ -3840,9 +3423,9 @@
               <a:gdLst/>
               <a:ahLst/>
               <a:cxnLst/>
-              <a:rect l="l" t="t" r="r" b="b"/>
+              <a:rect r="r" b="b" t="t" l="l"/>
               <a:pathLst>
-                <a:path w="3166110" h="6282055">
+                <a:path h="6282055" w="3166110">
                   <a:moveTo>
                     <a:pt x="3053969" y="6282055"/>
                   </a:moveTo>
@@ -3976,23 +3559,16 @@
               <a:srgbClr val="E0E6E9"/>
             </a:solidFill>
           </p:spPr>
-          <p:txBody>
-            <a:bodyPr/>
-            <a:lstStyle/>
-            <a:p>
-              <a:endParaRPr lang="es-AR"/>
-            </a:p>
-          </p:txBody>
         </p:sp>
       </p:grpSp>
       <p:grpSp>
         <p:nvGrpSpPr>
-          <p:cNvPr id="8" name="Group 8"/>
+          <p:cNvPr name="Group 8" id="8"/>
           <p:cNvGrpSpPr/>
           <p:nvPr/>
         </p:nvGrpSpPr>
         <p:grpSpPr>
-          <a:xfrm>
+          <a:xfrm rot="0">
             <a:off x="12814229" y="6428718"/>
             <a:ext cx="12630150" cy="1114425"/>
             <a:chOff x="0" y="0"/>
@@ -4001,12 +3577,12 @@
         </p:grpSpPr>
         <p:sp>
           <p:nvSpPr>
-            <p:cNvPr id="9" name="Freeform 9"/>
+            <p:cNvPr name="Freeform 9" id="9"/>
             <p:cNvSpPr/>
             <p:nvPr/>
           </p:nvSpPr>
           <p:spPr>
-            <a:xfrm>
+            <a:xfrm flipH="false" flipV="false" rot="0">
               <a:off x="0" y="0"/>
               <a:ext cx="3326459" cy="293511"/>
             </a:xfrm>
@@ -4015,9 +3591,9 @@
               <a:gdLst/>
               <a:ahLst/>
               <a:cxnLst/>
-              <a:rect l="l" t="t" r="r" b="b"/>
+              <a:rect r="r" b="b" t="t" l="l"/>
               <a:pathLst>
-                <a:path w="3326459" h="293511">
+                <a:path h="293511" w="3326459">
                   <a:moveTo>
                     <a:pt x="3123259" y="0"/>
                   </a:moveTo>
@@ -4052,18 +3628,11 @@
               <a:srgbClr val="FFFFFF"/>
             </a:solidFill>
           </p:spPr>
-          <p:txBody>
-            <a:bodyPr/>
-            <a:lstStyle/>
-            <a:p>
-              <a:endParaRPr lang="es-AR"/>
-            </a:p>
-          </p:txBody>
         </p:sp>
         <p:sp>
           <p:nvSpPr>
-            <p:cNvPr id="10" name="TextBox 10"/>
-            <p:cNvSpPr txBox="1"/>
+            <p:cNvPr name="TextBox 10" id="10"/>
+            <p:cNvSpPr txBox="true"/>
             <p:nvPr/>
           </p:nvSpPr>
           <p:spPr>
@@ -4076,7 +3645,7 @@
             </a:prstGeom>
           </p:spPr>
           <p:txBody>
-            <a:bodyPr lIns="50800" tIns="50800" rIns="50800" bIns="50800" rtlCol="0" anchor="ctr"/>
+            <a:bodyPr anchor="ctr" rtlCol="false" tIns="50800" lIns="50800" bIns="50800" rIns="50800"/>
             <a:lstStyle/>
             <a:p>
               <a:pPr algn="ctr">
@@ -4084,19 +3653,18 @@
                   <a:spcPts val="3624"/>
                 </a:lnSpc>
               </a:pPr>
-              <a:endParaRPr/>
             </a:p>
           </p:txBody>
         </p:sp>
       </p:grpSp>
       <p:sp>
         <p:nvSpPr>
-          <p:cNvPr id="11" name="TextBox 11"/>
-          <p:cNvSpPr txBox="1"/>
+          <p:cNvPr name="TextBox 11" id="11"/>
+          <p:cNvSpPr txBox="true"/>
           <p:nvPr/>
         </p:nvSpPr>
         <p:spPr>
-          <a:xfrm>
+          <a:xfrm rot="0">
             <a:off x="536993" y="3534408"/>
             <a:ext cx="13235916" cy="3451523"/>
           </a:xfrm>
@@ -4105,18 +3673,18 @@
           </a:prstGeom>
         </p:spPr>
         <p:txBody>
-          <a:bodyPr lIns="0" tIns="0" rIns="0" bIns="0" rtlCol="0" anchor="t">
+          <a:bodyPr anchor="t" rtlCol="false" tIns="0" lIns="0" bIns="0" rIns="0">
             <a:spAutoFit/>
           </a:bodyPr>
           <a:lstStyle/>
           <a:p>
-            <a:pPr algn="l">
+            <a:pPr algn="just">
               <a:lnSpc>
                 <a:spcPts val="9069"/>
               </a:lnSpc>
             </a:pPr>
             <a:r>
-              <a:rPr lang="en-US" sz="7955" b="1">
+              <a:rPr lang="en-US" b="true" sz="7955">
                 <a:solidFill>
                   <a:srgbClr val="FFFFFF"/>
                 </a:solidFill>
@@ -4125,19 +3693,19 @@
                 <a:cs typeface="Oswald Bold"/>
                 <a:sym typeface="Oswald Bold"/>
               </a:rPr>
-              <a:t>PROYECTO FINAL: CLUSTER DINAMICOS CON BASE INMOBILIARIA</a:t>
-            </a:r>
-          </a:p>
-        </p:txBody>
-      </p:sp>
-      <p:sp>
-        <p:nvSpPr>
-          <p:cNvPr id="12" name="TextBox 12"/>
-          <p:cNvSpPr txBox="1"/>
+              <a:t>PROYECTO FINAL: DTW Y CLUSTER DINAMICOS CON BASE INMOBILIARIA. 2019-2025.</a:t>
+            </a:r>
+          </a:p>
+        </p:txBody>
+      </p:sp>
+      <p:sp>
+        <p:nvSpPr>
+          <p:cNvPr name="TextBox 12" id="12"/>
+          <p:cNvSpPr txBox="true"/>
           <p:nvPr/>
         </p:nvSpPr>
         <p:spPr>
-          <a:xfrm>
+          <a:xfrm rot="0">
             <a:off x="479645" y="7638711"/>
             <a:ext cx="13293265" cy="1329563"/>
           </a:xfrm>
@@ -4146,7 +3714,7 @@
           </a:prstGeom>
         </p:spPr>
         <p:txBody>
-          <a:bodyPr lIns="0" tIns="0" rIns="0" bIns="0" rtlCol="0" anchor="t">
+          <a:bodyPr anchor="t" rtlCol="false" tIns="0" lIns="0" bIns="0" rIns="0">
             <a:spAutoFit/>
           </a:bodyPr>
           <a:lstStyle/>
@@ -4213,21 +3781,12 @@
                 <a:spcPts val="2595"/>
               </a:lnSpc>
             </a:pPr>
-            <a:endParaRPr lang="en-US" sz="2199" spc="103">
-              <a:solidFill>
-                <a:srgbClr val="FFFFFF"/>
-              </a:solidFill>
-              <a:latin typeface="Codec Pro"/>
-              <a:ea typeface="Codec Pro"/>
-              <a:cs typeface="Codec Pro"/>
-              <a:sym typeface="Codec Pro"/>
-            </a:endParaRPr>
-          </a:p>
-        </p:txBody>
-      </p:sp>
-      <p:sp>
-        <p:nvSpPr>
-          <p:cNvPr id="13" name="AutoShape 13"/>
+          </a:p>
+        </p:txBody>
+      </p:sp>
+      <p:sp>
+        <p:nvSpPr>
+          <p:cNvPr name="AutoShape 13" id="13"/>
           <p:cNvSpPr/>
           <p:nvPr/>
         </p:nvSpPr>
@@ -4239,26 +3798,19 @@
           <a:prstGeom prst="line">
             <a:avLst/>
           </a:prstGeom>
-          <a:ln w="38100" cap="flat">
+          <a:ln cap="flat" w="38100">
             <a:solidFill>
               <a:srgbClr val="FFFFFF"/>
             </a:solidFill>
             <a:prstDash val="solid"/>
-            <a:headEnd type="none" w="sm" len="sm"/>
-            <a:tailEnd type="oval" w="lg" len="lg"/>
+            <a:headEnd type="none" len="sm" w="sm"/>
+            <a:tailEnd type="oval" len="lg" w="lg"/>
           </a:ln>
         </p:spPr>
-        <p:txBody>
-          <a:bodyPr/>
-          <a:lstStyle/>
-          <a:p>
-            <a:endParaRPr lang="es-AR"/>
-          </a:p>
-        </p:txBody>
-      </p:sp>
-      <p:sp>
-        <p:nvSpPr>
-          <p:cNvPr id="14" name="AutoShape 14"/>
+      </p:sp>
+      <p:sp>
+        <p:nvSpPr>
+          <p:cNvPr name="AutoShape 14" id="14"/>
           <p:cNvSpPr/>
           <p:nvPr/>
         </p:nvSpPr>
@@ -4270,28 +3822,21 @@
           <a:prstGeom prst="line">
             <a:avLst/>
           </a:prstGeom>
-          <a:ln w="38100" cap="flat">
+          <a:ln cap="flat" w="38100">
             <a:solidFill>
               <a:srgbClr val="FFFFFF"/>
             </a:solidFill>
             <a:prstDash val="solid"/>
-            <a:headEnd type="oval" w="lg" len="lg"/>
-            <a:tailEnd type="none" w="sm" len="sm"/>
+            <a:headEnd type="oval" len="lg" w="lg"/>
+            <a:tailEnd type="none" len="sm" w="sm"/>
           </a:ln>
         </p:spPr>
-        <p:txBody>
-          <a:bodyPr/>
-          <a:lstStyle/>
-          <a:p>
-            <a:endParaRPr lang="es-AR"/>
-          </a:p>
-        </p:txBody>
       </p:sp>
       <p:grpSp>
         <p:nvGrpSpPr>
-          <p:cNvPr id="15" name="Group 15"/>
+          <p:cNvPr name="Group 15" id="15"/>
           <p:cNvGrpSpPr>
-            <a:grpSpLocks noChangeAspect="1"/>
+            <a:grpSpLocks noChangeAspect="true"/>
           </p:cNvGrpSpPr>
           <p:nvPr/>
         </p:nvGrpSpPr>
@@ -4305,12 +3850,12 @@
         </p:grpSpPr>
         <p:sp>
           <p:nvSpPr>
-            <p:cNvPr id="16" name="Freeform 16"/>
+            <p:cNvPr name="Freeform 16" id="16"/>
             <p:cNvSpPr/>
             <p:nvPr/>
           </p:nvSpPr>
           <p:spPr>
-            <a:xfrm>
+            <a:xfrm flipH="false" flipV="false" rot="0">
               <a:off x="4318" y="4318"/>
               <a:ext cx="3157347" cy="6273419"/>
             </a:xfrm>
@@ -4319,9 +3864,9 @@
               <a:gdLst/>
               <a:ahLst/>
               <a:cxnLst/>
-              <a:rect l="l" t="t" r="r" b="b"/>
+              <a:rect r="r" b="b" t="t" l="l"/>
               <a:pathLst>
-                <a:path w="3157347" h="6273419">
+                <a:path h="6273419" w="3157347">
                   <a:moveTo>
                     <a:pt x="3049651" y="6273419"/>
                   </a:moveTo>
@@ -4370,22 +3915,15 @@
               </a:solidFill>
             </a:ln>
           </p:spPr>
-          <p:txBody>
-            <a:bodyPr/>
-            <a:lstStyle/>
-            <a:p>
-              <a:endParaRPr lang="es-AR"/>
-            </a:p>
-          </p:txBody>
         </p:sp>
         <p:sp>
           <p:nvSpPr>
-            <p:cNvPr id="17" name="Freeform 17"/>
+            <p:cNvPr name="Freeform 17" id="17"/>
             <p:cNvSpPr/>
             <p:nvPr/>
           </p:nvSpPr>
           <p:spPr>
-            <a:xfrm>
+            <a:xfrm flipH="false" flipV="false" rot="0">
               <a:off x="0" y="0"/>
               <a:ext cx="3166110" cy="6282055"/>
             </a:xfrm>
@@ -4394,9 +3932,9 @@
               <a:gdLst/>
               <a:ahLst/>
               <a:cxnLst/>
-              <a:rect l="l" t="t" r="r" b="b"/>
+              <a:rect r="r" b="b" t="t" l="l"/>
               <a:pathLst>
-                <a:path w="3166110" h="6282055">
+                <a:path h="6282055" w="3166110">
                   <a:moveTo>
                     <a:pt x="3053969" y="6282055"/>
                   </a:moveTo>
@@ -4530,20 +4068,13 @@
               <a:srgbClr val="9DB3C1"/>
             </a:solidFill>
           </p:spPr>
-          <p:txBody>
-            <a:bodyPr/>
-            <a:lstStyle/>
-            <a:p>
-              <a:endParaRPr lang="es-AR"/>
-            </a:p>
-          </p:txBody>
         </p:sp>
       </p:grpSp>
       <p:grpSp>
         <p:nvGrpSpPr>
-          <p:cNvPr id="18" name="Group 18"/>
+          <p:cNvPr name="Group 18" id="18"/>
           <p:cNvGrpSpPr>
-            <a:grpSpLocks noChangeAspect="1"/>
+            <a:grpSpLocks noChangeAspect="true"/>
           </p:cNvGrpSpPr>
           <p:nvPr/>
         </p:nvGrpSpPr>
@@ -4557,12 +4088,12 @@
         </p:grpSpPr>
         <p:sp>
           <p:nvSpPr>
-            <p:cNvPr id="19" name="Freeform 19"/>
+            <p:cNvPr name="Freeform 19" id="19"/>
             <p:cNvSpPr/>
             <p:nvPr/>
           </p:nvSpPr>
           <p:spPr>
-            <a:xfrm>
+            <a:xfrm flipH="false" flipV="false" rot="0">
               <a:off x="4318" y="4318"/>
               <a:ext cx="3157347" cy="6273419"/>
             </a:xfrm>
@@ -4571,9 +4102,9 @@
               <a:gdLst/>
               <a:ahLst/>
               <a:cxnLst/>
-              <a:rect l="l" t="t" r="r" b="b"/>
+              <a:rect r="r" b="b" t="t" l="l"/>
               <a:pathLst>
-                <a:path w="3157347" h="6273419">
+                <a:path h="6273419" w="3157347">
                   <a:moveTo>
                     <a:pt x="3049651" y="6273419"/>
                   </a:moveTo>
@@ -4622,22 +4153,15 @@
               </a:solidFill>
             </a:ln>
           </p:spPr>
-          <p:txBody>
-            <a:bodyPr/>
-            <a:lstStyle/>
-            <a:p>
-              <a:endParaRPr lang="es-AR"/>
-            </a:p>
-          </p:txBody>
         </p:sp>
         <p:sp>
           <p:nvSpPr>
-            <p:cNvPr id="20" name="Freeform 20"/>
+            <p:cNvPr name="Freeform 20" id="20"/>
             <p:cNvSpPr/>
             <p:nvPr/>
           </p:nvSpPr>
           <p:spPr>
-            <a:xfrm>
+            <a:xfrm flipH="false" flipV="false" rot="0">
               <a:off x="0" y="0"/>
               <a:ext cx="3166110" cy="6282055"/>
             </a:xfrm>
@@ -4646,9 +4170,9 @@
               <a:gdLst/>
               <a:ahLst/>
               <a:cxnLst/>
-              <a:rect l="l" t="t" r="r" b="b"/>
+              <a:rect r="r" b="b" t="t" l="l"/>
               <a:pathLst>
-                <a:path w="3166110" h="6282055">
+                <a:path h="6282055" w="3166110">
                   <a:moveTo>
                     <a:pt x="3053969" y="6282055"/>
                   </a:moveTo>
@@ -4782,45 +4306,8 @@
               <a:srgbClr val="5B696F"/>
             </a:solidFill>
           </p:spPr>
-          <p:txBody>
-            <a:bodyPr/>
-            <a:lstStyle/>
-            <a:p>
-              <a:endParaRPr lang="es-AR"/>
-            </a:p>
-          </p:txBody>
         </p:sp>
       </p:grpSp>
-      <p:sp>
-        <p:nvSpPr>
-          <p:cNvPr id="21" name="Marcador de número de diapositiva 20">
-            <a:extLst>
-              <a:ext uri="{FF2B5EF4-FFF2-40B4-BE49-F238E27FC236}">
-                <a16:creationId xmlns:a16="http://schemas.microsoft.com/office/drawing/2014/main" id="{5E2C91B6-2B7A-03A4-443C-CC0A9A68A58E}"/>
-              </a:ext>
-            </a:extLst>
-          </p:cNvPr>
-          <p:cNvSpPr>
-            <a:spLocks noGrp="1"/>
-          </p:cNvSpPr>
-          <p:nvPr>
-            <p:ph type="sldNum" sz="quarter" idx="12"/>
-          </p:nvPr>
-        </p:nvSpPr>
-        <p:spPr/>
-        <p:txBody>
-          <a:bodyPr/>
-          <a:lstStyle/>
-          <a:p>
-            <a:fld id="{B6F15528-21DE-4FAA-801E-634DDDAF4B2B}" type="slidenum">
-              <a:rPr lang="en-US" smtClean="0"/>
-              <a:pPr/>
-              <a:t>1</a:t>
-            </a:fld>
-            <a:endParaRPr lang="en-US"/>
-          </a:p>
-        </p:txBody>
-      </p:sp>
     </p:spTree>
   </p:cSld>
   <p:clrMapOvr>
@@ -4830,7 +4317,7 @@
 </file>
 
 <file path=ppt/slides/slide2.xml><?xml version="1.0" encoding="utf-8"?>
-<p:sld xmlns:a="http://schemas.openxmlformats.org/drawingml/2006/main" xmlns:r="http://schemas.openxmlformats.org/officeDocument/2006/relationships" xmlns:p="http://schemas.openxmlformats.org/presentationml/2006/main">
+<p:sld xmlns:p="http://schemas.openxmlformats.org/presentationml/2006/main" xmlns:a="http://schemas.openxmlformats.org/drawingml/2006/main">
   <p:cSld>
     <p:spTree>
       <p:nvGrpSpPr>
@@ -4848,12 +4335,12 @@
       </p:grpSpPr>
       <p:grpSp>
         <p:nvGrpSpPr>
-          <p:cNvPr id="2" name="Group 2"/>
+          <p:cNvPr name="Group 2" id="2"/>
           <p:cNvGrpSpPr/>
           <p:nvPr/>
         </p:nvGrpSpPr>
         <p:grpSpPr>
-          <a:xfrm>
+          <a:xfrm rot="0">
             <a:off x="0" y="0"/>
             <a:ext cx="18288000" cy="3279284"/>
             <a:chOff x="0" y="0"/>
@@ -4862,12 +4349,12 @@
         </p:grpSpPr>
         <p:sp>
           <p:nvSpPr>
-            <p:cNvPr id="3" name="Freeform 3"/>
+            <p:cNvPr name="Freeform 3" id="3"/>
             <p:cNvSpPr/>
             <p:nvPr/>
           </p:nvSpPr>
           <p:spPr>
-            <a:xfrm>
+            <a:xfrm flipH="false" flipV="false" rot="0">
               <a:off x="0" y="0"/>
               <a:ext cx="4816592" cy="863680"/>
             </a:xfrm>
@@ -4876,9 +4363,9 @@
               <a:gdLst/>
               <a:ahLst/>
               <a:cxnLst/>
-              <a:rect l="l" t="t" r="r" b="b"/>
+              <a:rect r="r" b="b" t="t" l="l"/>
               <a:pathLst>
-                <a:path w="4816592" h="863680">
+                <a:path h="863680" w="4816592">
                   <a:moveTo>
                     <a:pt x="0" y="0"/>
                   </a:moveTo>
@@ -4899,18 +4386,11 @@
               <a:srgbClr val="132232"/>
             </a:solidFill>
           </p:spPr>
-          <p:txBody>
-            <a:bodyPr/>
-            <a:lstStyle/>
-            <a:p>
-              <a:endParaRPr lang="es-AR"/>
-            </a:p>
-          </p:txBody>
         </p:sp>
         <p:sp>
           <p:nvSpPr>
-            <p:cNvPr id="4" name="TextBox 4"/>
-            <p:cNvSpPr txBox="1"/>
+            <p:cNvPr name="TextBox 4" id="4"/>
+            <p:cNvSpPr txBox="true"/>
             <p:nvPr/>
           </p:nvSpPr>
           <p:spPr>
@@ -4923,7 +4403,7 @@
             </a:prstGeom>
           </p:spPr>
           <p:txBody>
-            <a:bodyPr lIns="50800" tIns="50800" rIns="50800" bIns="50800" rtlCol="0" anchor="ctr"/>
+            <a:bodyPr anchor="ctr" rtlCol="false" tIns="50800" lIns="50800" bIns="50800" rIns="50800"/>
             <a:lstStyle/>
             <a:p>
               <a:pPr algn="ctr">
@@ -4931,33 +4411,32 @@
                   <a:spcPts val="3624"/>
                 </a:lnSpc>
               </a:pPr>
-              <a:endParaRPr/>
             </a:p>
           </p:txBody>
         </p:sp>
       </p:grpSp>
       <p:sp>
         <p:nvSpPr>
-          <p:cNvPr id="5" name="TextBox 5"/>
-          <p:cNvSpPr txBox="1"/>
+          <p:cNvPr name="TextBox 5" id="5"/>
+          <p:cNvSpPr txBox="true"/>
           <p:nvPr/>
         </p:nvSpPr>
         <p:spPr>
-          <a:xfrm>
+          <a:xfrm rot="0">
             <a:off x="732029" y="4293314"/>
-            <a:ext cx="17310674" cy="4342384"/>
+            <a:ext cx="16527271" cy="4799584"/>
           </a:xfrm>
           <a:prstGeom prst="rect">
             <a:avLst/>
           </a:prstGeom>
         </p:spPr>
         <p:txBody>
-          <a:bodyPr lIns="0" tIns="0" rIns="0" bIns="0" rtlCol="0" anchor="t">
+          <a:bodyPr anchor="t" rtlCol="false" tIns="0" lIns="0" bIns="0" rIns="0">
             <a:spAutoFit/>
           </a:bodyPr>
           <a:lstStyle/>
           <a:p>
-            <a:pPr marL="604516" lvl="1" indent="-302258" algn="just">
+            <a:pPr algn="just" marL="604516" indent="-302258" lvl="1">
               <a:lnSpc>
                 <a:spcPts val="3667"/>
               </a:lnSpc>
@@ -4965,7 +4444,7 @@
               <a:buChar char="•"/>
             </a:pPr>
             <a:r>
-              <a:rPr lang="en-US" sz="2799" u="none" spc="55" dirty="0" err="1">
+              <a:rPr lang="en-US" sz="2799" spc="55" u="none">
                 <a:solidFill>
                   <a:srgbClr val="000000"/>
                 </a:solidFill>
@@ -4974,115 +4453,7 @@
                 <a:cs typeface="Codec Pro"/>
                 <a:sym typeface="Codec Pro"/>
               </a:rPr>
-              <a:t>Aplicación</a:t>
-            </a:r>
-            <a:r>
-              <a:rPr lang="en-US" sz="2799" u="none" spc="55" dirty="0">
-                <a:solidFill>
-                  <a:srgbClr val="000000"/>
-                </a:solidFill>
-                <a:latin typeface="Codec Pro"/>
-                <a:ea typeface="Codec Pro"/>
-                <a:cs typeface="Codec Pro"/>
-                <a:sym typeface="Codec Pro"/>
-              </a:rPr>
-              <a:t> de clustering </a:t>
-            </a:r>
-            <a:r>
-              <a:rPr lang="en-US" sz="2799" u="none" spc="55" dirty="0" err="1">
-                <a:solidFill>
-                  <a:srgbClr val="000000"/>
-                </a:solidFill>
-                <a:latin typeface="Codec Pro"/>
-                <a:ea typeface="Codec Pro"/>
-                <a:cs typeface="Codec Pro"/>
-                <a:sym typeface="Codec Pro"/>
-              </a:rPr>
-              <a:t>dinámico</a:t>
-            </a:r>
-            <a:r>
-              <a:rPr lang="en-US" sz="2799" u="none" spc="55" dirty="0">
-                <a:solidFill>
-                  <a:srgbClr val="000000"/>
-                </a:solidFill>
-                <a:latin typeface="Codec Pro"/>
-                <a:ea typeface="Codec Pro"/>
-                <a:cs typeface="Codec Pro"/>
-                <a:sym typeface="Codec Pro"/>
-              </a:rPr>
-              <a:t> a </a:t>
-            </a:r>
-            <a:r>
-              <a:rPr lang="en-US" sz="2799" u="none" spc="55" dirty="0" err="1">
-                <a:solidFill>
-                  <a:srgbClr val="000000"/>
-                </a:solidFill>
-                <a:latin typeface="Codec Pro"/>
-                <a:ea typeface="Codec Pro"/>
-                <a:cs typeface="Codec Pro"/>
-                <a:sym typeface="Codec Pro"/>
-              </a:rPr>
-              <a:t>datos</a:t>
-            </a:r>
-            <a:r>
-              <a:rPr lang="en-US" sz="2799" u="none" spc="55" dirty="0">
-                <a:solidFill>
-                  <a:srgbClr val="000000"/>
-                </a:solidFill>
-                <a:latin typeface="Codec Pro"/>
-                <a:ea typeface="Codec Pro"/>
-                <a:cs typeface="Codec Pro"/>
-                <a:sym typeface="Codec Pro"/>
-              </a:rPr>
-              <a:t> </a:t>
-            </a:r>
-            <a:r>
-              <a:rPr lang="en-US" sz="2799" u="none" spc="55" dirty="0" err="1">
-                <a:solidFill>
-                  <a:srgbClr val="000000"/>
-                </a:solidFill>
-                <a:latin typeface="Codec Pro"/>
-                <a:ea typeface="Codec Pro"/>
-                <a:cs typeface="Codec Pro"/>
-                <a:sym typeface="Codec Pro"/>
-              </a:rPr>
-              <a:t>inmobiliarios</a:t>
-            </a:r>
-            <a:r>
-              <a:rPr lang="en-US" sz="2799" u="none" spc="55" dirty="0">
-                <a:solidFill>
-                  <a:srgbClr val="000000"/>
-                </a:solidFill>
-                <a:latin typeface="Codec Pro"/>
-                <a:ea typeface="Codec Pro"/>
-                <a:cs typeface="Codec Pro"/>
-                <a:sym typeface="Codec Pro"/>
-              </a:rPr>
-              <a:t> de </a:t>
-            </a:r>
-            <a:r>
-              <a:rPr lang="en-US" sz="2799" u="none" spc="55" dirty="0" err="1">
-                <a:solidFill>
-                  <a:srgbClr val="000000"/>
-                </a:solidFill>
-                <a:latin typeface="Codec Pro"/>
-                <a:ea typeface="Codec Pro"/>
-                <a:cs typeface="Codec Pro"/>
-                <a:sym typeface="Codec Pro"/>
-              </a:rPr>
-              <a:t>ZonaProp</a:t>
-            </a:r>
-            <a:r>
-              <a:rPr lang="en-US" sz="2799" u="none" spc="55" dirty="0">
-                <a:solidFill>
-                  <a:srgbClr val="000000"/>
-                </a:solidFill>
-                <a:latin typeface="Codec Pro"/>
-                <a:ea typeface="Codec Pro"/>
-                <a:cs typeface="Codec Pro"/>
-                <a:sym typeface="Codec Pro"/>
-              </a:rPr>
-              <a:t> (2016–2025).</a:t>
+              <a:t>Aplicación de Dynamic Time Warping (DTW) y clustering dinámico a datos inmobiliarios de ZonaProp (2016–2025).</a:t>
             </a:r>
           </a:p>
           <a:p>
@@ -5091,18 +4462,9 @@
                 <a:spcPts val="3667"/>
               </a:lnSpc>
             </a:pPr>
-            <a:endParaRPr lang="en-US" sz="2799" u="none" spc="55" dirty="0">
-              <a:solidFill>
-                <a:srgbClr val="000000"/>
-              </a:solidFill>
-              <a:latin typeface="Codec Pro"/>
-              <a:ea typeface="Codec Pro"/>
-              <a:cs typeface="Codec Pro"/>
-              <a:sym typeface="Codec Pro"/>
-            </a:endParaRPr>
-          </a:p>
-          <a:p>
-            <a:pPr marL="604516" lvl="1" indent="-302258" algn="just">
+          </a:p>
+          <a:p>
+            <a:pPr algn="just" marL="604516" indent="-302258" lvl="1">
               <a:lnSpc>
                 <a:spcPts val="3667"/>
               </a:lnSpc>
@@ -5110,7 +4472,7 @@
               <a:buChar char="•"/>
             </a:pPr>
             <a:r>
-              <a:rPr lang="en-US" sz="2799" u="none" spc="55" dirty="0" err="1">
+              <a:rPr lang="en-US" sz="2799" spc="55" u="none">
                 <a:solidFill>
                   <a:srgbClr val="000000"/>
                 </a:solidFill>
@@ -5119,115 +4481,7 @@
                 <a:cs typeface="Codec Pro"/>
                 <a:sym typeface="Codec Pro"/>
               </a:rPr>
-              <a:t>Identificación</a:t>
-            </a:r>
-            <a:r>
-              <a:rPr lang="en-US" sz="2799" u="none" spc="55" dirty="0">
-                <a:solidFill>
-                  <a:srgbClr val="000000"/>
-                </a:solidFill>
-                <a:latin typeface="Codec Pro"/>
-                <a:ea typeface="Codec Pro"/>
-                <a:cs typeface="Codec Pro"/>
-                <a:sym typeface="Codec Pro"/>
-              </a:rPr>
-              <a:t> de </a:t>
-            </a:r>
-            <a:r>
-              <a:rPr lang="en-US" sz="2799" u="none" spc="55" dirty="0" err="1">
-                <a:solidFill>
-                  <a:srgbClr val="000000"/>
-                </a:solidFill>
-                <a:latin typeface="Codec Pro"/>
-                <a:ea typeface="Codec Pro"/>
-                <a:cs typeface="Codec Pro"/>
-                <a:sym typeface="Codec Pro"/>
-              </a:rPr>
-              <a:t>grupos</a:t>
-            </a:r>
-            <a:r>
-              <a:rPr lang="en-US" sz="2799" u="none" spc="55" dirty="0">
-                <a:solidFill>
-                  <a:srgbClr val="000000"/>
-                </a:solidFill>
-                <a:latin typeface="Codec Pro"/>
-                <a:ea typeface="Codec Pro"/>
-                <a:cs typeface="Codec Pro"/>
-                <a:sym typeface="Codec Pro"/>
-              </a:rPr>
-              <a:t> de </a:t>
-            </a:r>
-            <a:r>
-              <a:rPr lang="en-US" sz="2799" u="none" spc="55" dirty="0" err="1">
-                <a:solidFill>
-                  <a:srgbClr val="000000"/>
-                </a:solidFill>
-                <a:latin typeface="Codec Pro"/>
-                <a:ea typeface="Codec Pro"/>
-                <a:cs typeface="Codec Pro"/>
-                <a:sym typeface="Codec Pro"/>
-              </a:rPr>
-              <a:t>propiedades</a:t>
-            </a:r>
-            <a:r>
-              <a:rPr lang="en-US" sz="2799" u="none" spc="55" dirty="0">
-                <a:solidFill>
-                  <a:srgbClr val="000000"/>
-                </a:solidFill>
-                <a:latin typeface="Codec Pro"/>
-                <a:ea typeface="Codec Pro"/>
-                <a:cs typeface="Codec Pro"/>
-                <a:sym typeface="Codec Pro"/>
-              </a:rPr>
-              <a:t> con </a:t>
-            </a:r>
-            <a:r>
-              <a:rPr lang="en-US" sz="2799" u="none" spc="55" dirty="0" err="1">
-                <a:solidFill>
-                  <a:srgbClr val="000000"/>
-                </a:solidFill>
-                <a:latin typeface="Codec Pro"/>
-                <a:ea typeface="Codec Pro"/>
-                <a:cs typeface="Codec Pro"/>
-                <a:sym typeface="Codec Pro"/>
-              </a:rPr>
-              <a:t>características</a:t>
-            </a:r>
-            <a:r>
-              <a:rPr lang="en-US" sz="2799" u="none" spc="55" dirty="0">
-                <a:solidFill>
-                  <a:srgbClr val="000000"/>
-                </a:solidFill>
-                <a:latin typeface="Codec Pro"/>
-                <a:ea typeface="Codec Pro"/>
-                <a:cs typeface="Codec Pro"/>
-                <a:sym typeface="Codec Pro"/>
-              </a:rPr>
-              <a:t> </a:t>
-            </a:r>
-            <a:r>
-              <a:rPr lang="en-US" sz="2799" u="none" spc="55" dirty="0" err="1">
-                <a:solidFill>
-                  <a:srgbClr val="000000"/>
-                </a:solidFill>
-                <a:latin typeface="Codec Pro"/>
-                <a:ea typeface="Codec Pro"/>
-                <a:cs typeface="Codec Pro"/>
-                <a:sym typeface="Codec Pro"/>
-              </a:rPr>
-              <a:t>similares</a:t>
-            </a:r>
-            <a:r>
-              <a:rPr lang="en-US" sz="2799" u="none" spc="55" dirty="0">
-                <a:solidFill>
-                  <a:srgbClr val="000000"/>
-                </a:solidFill>
-                <a:latin typeface="Codec Pro"/>
-                <a:ea typeface="Codec Pro"/>
-                <a:cs typeface="Codec Pro"/>
-                <a:sym typeface="Codec Pro"/>
-              </a:rPr>
-              <a:t>.</a:t>
+              <a:t>Identificación de grupos de propiedades con características similares.</a:t>
             </a:r>
           </a:p>
           <a:p>
@@ -5236,18 +4490,9 @@
                 <a:spcPts val="4322"/>
               </a:lnSpc>
             </a:pPr>
-            <a:endParaRPr lang="en-US" sz="2799" u="none" spc="55" dirty="0">
-              <a:solidFill>
-                <a:srgbClr val="000000"/>
-              </a:solidFill>
-              <a:latin typeface="Codec Pro"/>
-              <a:ea typeface="Codec Pro"/>
-              <a:cs typeface="Codec Pro"/>
-              <a:sym typeface="Codec Pro"/>
-            </a:endParaRPr>
-          </a:p>
-          <a:p>
-            <a:pPr marL="604516" lvl="1" indent="-302258" algn="just">
+          </a:p>
+          <a:p>
+            <a:pPr algn="just" marL="604516" indent="-302258" lvl="1">
               <a:lnSpc>
                 <a:spcPts val="3667"/>
               </a:lnSpc>
@@ -5255,7 +4500,7 @@
               <a:buChar char="•"/>
             </a:pPr>
             <a:r>
-              <a:rPr lang="en-US" sz="2799" u="none" spc="55" dirty="0" err="1">
+              <a:rPr lang="en-US" sz="2799" spc="55" u="none">
                 <a:solidFill>
                   <a:srgbClr val="000000"/>
                 </a:solidFill>
@@ -5264,139 +4509,7 @@
                 <a:cs typeface="Codec Pro"/>
                 <a:sym typeface="Codec Pro"/>
               </a:rPr>
-              <a:t>Análisis</a:t>
-            </a:r>
-            <a:r>
-              <a:rPr lang="en-US" sz="2799" u="none" spc="55" dirty="0">
-                <a:solidFill>
-                  <a:srgbClr val="000000"/>
-                </a:solidFill>
-                <a:latin typeface="Codec Pro"/>
-                <a:ea typeface="Codec Pro"/>
-                <a:cs typeface="Codec Pro"/>
-                <a:sym typeface="Codec Pro"/>
-              </a:rPr>
-              <a:t> de la </a:t>
-            </a:r>
-            <a:r>
-              <a:rPr lang="en-US" sz="2799" u="none" spc="55" dirty="0" err="1">
-                <a:solidFill>
-                  <a:srgbClr val="000000"/>
-                </a:solidFill>
-                <a:latin typeface="Codec Pro"/>
-                <a:ea typeface="Codec Pro"/>
-                <a:cs typeface="Codec Pro"/>
-                <a:sym typeface="Codec Pro"/>
-              </a:rPr>
-              <a:t>evolución</a:t>
-            </a:r>
-            <a:r>
-              <a:rPr lang="en-US" sz="2799" u="none" spc="55" dirty="0">
-                <a:solidFill>
-                  <a:srgbClr val="000000"/>
-                </a:solidFill>
-                <a:latin typeface="Codec Pro"/>
-                <a:ea typeface="Codec Pro"/>
-                <a:cs typeface="Codec Pro"/>
-                <a:sym typeface="Codec Pro"/>
-              </a:rPr>
-              <a:t> temporal de </a:t>
-            </a:r>
-            <a:r>
-              <a:rPr lang="en-US" sz="2799" u="none" spc="55" dirty="0" err="1">
-                <a:solidFill>
-                  <a:srgbClr val="000000"/>
-                </a:solidFill>
-                <a:latin typeface="Codec Pro"/>
-                <a:ea typeface="Codec Pro"/>
-                <a:cs typeface="Codec Pro"/>
-                <a:sym typeface="Codec Pro"/>
-              </a:rPr>
-              <a:t>los</a:t>
-            </a:r>
-            <a:r>
-              <a:rPr lang="en-US" sz="2799" u="none" spc="55" dirty="0">
-                <a:solidFill>
-                  <a:srgbClr val="000000"/>
-                </a:solidFill>
-                <a:latin typeface="Codec Pro"/>
-                <a:ea typeface="Codec Pro"/>
-                <a:cs typeface="Codec Pro"/>
-                <a:sym typeface="Codec Pro"/>
-              </a:rPr>
-              <a:t> </a:t>
-            </a:r>
-            <a:r>
-              <a:rPr lang="en-US" sz="2799" u="none" spc="55" dirty="0" err="1">
-                <a:solidFill>
-                  <a:srgbClr val="000000"/>
-                </a:solidFill>
-                <a:latin typeface="Codec Pro"/>
-                <a:ea typeface="Codec Pro"/>
-                <a:cs typeface="Codec Pro"/>
-                <a:sym typeface="Codec Pro"/>
-              </a:rPr>
-              <a:t>precios</a:t>
-            </a:r>
-            <a:r>
-              <a:rPr lang="en-US" sz="2799" u="none" spc="55" dirty="0">
-                <a:solidFill>
-                  <a:srgbClr val="000000"/>
-                </a:solidFill>
-                <a:latin typeface="Codec Pro"/>
-                <a:ea typeface="Codec Pro"/>
-                <a:cs typeface="Codec Pro"/>
-                <a:sym typeface="Codec Pro"/>
-              </a:rPr>
-              <a:t> del m² </a:t>
-            </a:r>
-            <a:r>
-              <a:rPr lang="en-US" sz="2799" u="none" spc="55" dirty="0" err="1">
-                <a:solidFill>
-                  <a:srgbClr val="000000"/>
-                </a:solidFill>
-                <a:latin typeface="Codec Pro"/>
-                <a:ea typeface="Codec Pro"/>
-                <a:cs typeface="Codec Pro"/>
-                <a:sym typeface="Codec Pro"/>
-              </a:rPr>
-              <a:t>en</a:t>
-            </a:r>
-            <a:r>
-              <a:rPr lang="en-US" sz="2799" u="none" spc="55" dirty="0">
-                <a:solidFill>
-                  <a:srgbClr val="000000"/>
-                </a:solidFill>
-                <a:latin typeface="Codec Pro"/>
-                <a:ea typeface="Codec Pro"/>
-                <a:cs typeface="Codec Pro"/>
-                <a:sym typeface="Codec Pro"/>
-              </a:rPr>
-              <a:t> </a:t>
-            </a:r>
-            <a:r>
-              <a:rPr lang="en-US" sz="2799" u="none" spc="55" dirty="0" err="1">
-                <a:solidFill>
-                  <a:srgbClr val="000000"/>
-                </a:solidFill>
-                <a:latin typeface="Codec Pro"/>
-                <a:ea typeface="Codec Pro"/>
-                <a:cs typeface="Codec Pro"/>
-                <a:sym typeface="Codec Pro"/>
-              </a:rPr>
-              <a:t>cada</a:t>
-            </a:r>
-            <a:r>
-              <a:rPr lang="en-US" sz="2799" u="none" spc="55" dirty="0">
-                <a:solidFill>
-                  <a:srgbClr val="000000"/>
-                </a:solidFill>
-                <a:latin typeface="Codec Pro"/>
-                <a:ea typeface="Codec Pro"/>
-                <a:cs typeface="Codec Pro"/>
-                <a:sym typeface="Codec Pro"/>
-              </a:rPr>
-              <a:t> cluster.</a:t>
+              <a:t>Análisis de la evolución temporal de los precios del m² en cada cluster.</a:t>
             </a:r>
           </a:p>
           <a:p>
@@ -5405,18 +4518,9 @@
                 <a:spcPts val="3667"/>
               </a:lnSpc>
             </a:pPr>
-            <a:endParaRPr lang="en-US" sz="2799" u="none" spc="55" dirty="0">
-              <a:solidFill>
-                <a:srgbClr val="000000"/>
-              </a:solidFill>
-              <a:latin typeface="Codec Pro"/>
-              <a:ea typeface="Codec Pro"/>
-              <a:cs typeface="Codec Pro"/>
-              <a:sym typeface="Codec Pro"/>
-            </a:endParaRPr>
-          </a:p>
-          <a:p>
-            <a:pPr marL="604516" lvl="1" indent="-302258" algn="just">
+          </a:p>
+          <a:p>
+            <a:pPr algn="just" marL="604516" indent="-302258" lvl="1">
               <a:lnSpc>
                 <a:spcPts val="3667"/>
               </a:lnSpc>
@@ -5424,7 +4528,7 @@
               <a:buChar char="•"/>
             </a:pPr>
             <a:r>
-              <a:rPr lang="en-US" sz="2799" u="none" spc="55" dirty="0" err="1">
+              <a:rPr lang="en-US" sz="2799" spc="55" u="none">
                 <a:solidFill>
                   <a:srgbClr val="000000"/>
                 </a:solidFill>
@@ -5433,163 +4537,7 @@
                 <a:cs typeface="Codec Pro"/>
                 <a:sym typeface="Codec Pro"/>
               </a:rPr>
-              <a:t>Evaluar</a:t>
-            </a:r>
-            <a:r>
-              <a:rPr lang="en-US" sz="2799" u="none" spc="55" dirty="0">
-                <a:solidFill>
-                  <a:srgbClr val="000000"/>
-                </a:solidFill>
-                <a:latin typeface="Codec Pro"/>
-                <a:ea typeface="Codec Pro"/>
-                <a:cs typeface="Codec Pro"/>
-                <a:sym typeface="Codec Pro"/>
-              </a:rPr>
-              <a:t> </a:t>
-            </a:r>
-            <a:r>
-              <a:rPr lang="en-US" sz="2799" u="none" spc="55" dirty="0" err="1">
-                <a:solidFill>
-                  <a:srgbClr val="000000"/>
-                </a:solidFill>
-                <a:latin typeface="Codec Pro"/>
-                <a:ea typeface="Codec Pro"/>
-                <a:cs typeface="Codec Pro"/>
-                <a:sym typeface="Codec Pro"/>
-              </a:rPr>
-              <a:t>cómo</a:t>
-            </a:r>
-            <a:r>
-              <a:rPr lang="en-US" sz="2799" u="none" spc="55" dirty="0">
-                <a:solidFill>
-                  <a:srgbClr val="000000"/>
-                </a:solidFill>
-                <a:latin typeface="Codec Pro"/>
-                <a:ea typeface="Codec Pro"/>
-                <a:cs typeface="Codec Pro"/>
-                <a:sym typeface="Codec Pro"/>
-              </a:rPr>
-              <a:t> </a:t>
-            </a:r>
-            <a:r>
-              <a:rPr lang="en-US" sz="2799" u="none" spc="55" dirty="0" err="1">
-                <a:solidFill>
-                  <a:srgbClr val="000000"/>
-                </a:solidFill>
-                <a:latin typeface="Codec Pro"/>
-                <a:ea typeface="Codec Pro"/>
-                <a:cs typeface="Codec Pro"/>
-                <a:sym typeface="Codec Pro"/>
-              </a:rPr>
-              <a:t>cambian</a:t>
-            </a:r>
-            <a:r>
-              <a:rPr lang="en-US" sz="2799" u="none" spc="55" dirty="0">
-                <a:solidFill>
-                  <a:srgbClr val="000000"/>
-                </a:solidFill>
-                <a:latin typeface="Codec Pro"/>
-                <a:ea typeface="Codec Pro"/>
-                <a:cs typeface="Codec Pro"/>
-                <a:sym typeface="Codec Pro"/>
-              </a:rPr>
-              <a:t> </a:t>
-            </a:r>
-            <a:r>
-              <a:rPr lang="en-US" sz="2799" u="none" spc="55" dirty="0" err="1">
-                <a:solidFill>
-                  <a:srgbClr val="000000"/>
-                </a:solidFill>
-                <a:latin typeface="Codec Pro"/>
-                <a:ea typeface="Codec Pro"/>
-                <a:cs typeface="Codec Pro"/>
-                <a:sym typeface="Codec Pro"/>
-              </a:rPr>
-              <a:t>los</a:t>
-            </a:r>
-            <a:r>
-              <a:rPr lang="en-US" sz="2799" u="none" spc="55" dirty="0">
-                <a:solidFill>
-                  <a:srgbClr val="000000"/>
-                </a:solidFill>
-                <a:latin typeface="Codec Pro"/>
-                <a:ea typeface="Codec Pro"/>
-                <a:cs typeface="Codec Pro"/>
-                <a:sym typeface="Codec Pro"/>
-              </a:rPr>
-              <a:t> </a:t>
-            </a:r>
-            <a:r>
-              <a:rPr lang="en-US" sz="2799" u="none" spc="55" dirty="0" err="1">
-                <a:solidFill>
-                  <a:srgbClr val="000000"/>
-                </a:solidFill>
-                <a:latin typeface="Codec Pro"/>
-                <a:ea typeface="Codec Pro"/>
-                <a:cs typeface="Codec Pro"/>
-                <a:sym typeface="Codec Pro"/>
-              </a:rPr>
-              <a:t>patrones</a:t>
-            </a:r>
-            <a:r>
-              <a:rPr lang="en-US" sz="2799" u="none" spc="55" dirty="0">
-                <a:solidFill>
-                  <a:srgbClr val="000000"/>
-                </a:solidFill>
-                <a:latin typeface="Codec Pro"/>
-                <a:ea typeface="Codec Pro"/>
-                <a:cs typeface="Codec Pro"/>
-                <a:sym typeface="Codec Pro"/>
-              </a:rPr>
-              <a:t> del mercado </a:t>
-            </a:r>
-            <a:r>
-              <a:rPr lang="en-US" sz="2799" u="none" spc="55" dirty="0" err="1">
-                <a:solidFill>
-                  <a:srgbClr val="000000"/>
-                </a:solidFill>
-                <a:latin typeface="Codec Pro"/>
-                <a:ea typeface="Codec Pro"/>
-                <a:cs typeface="Codec Pro"/>
-                <a:sym typeface="Codec Pro"/>
-              </a:rPr>
-              <a:t>frente</a:t>
-            </a:r>
-            <a:r>
-              <a:rPr lang="en-US" sz="2799" u="none" spc="55" dirty="0">
-                <a:solidFill>
-                  <a:srgbClr val="000000"/>
-                </a:solidFill>
-                <a:latin typeface="Codec Pro"/>
-                <a:ea typeface="Codec Pro"/>
-                <a:cs typeface="Codec Pro"/>
-                <a:sym typeface="Codec Pro"/>
-              </a:rPr>
-              <a:t> a shocks o </a:t>
-            </a:r>
-            <a:r>
-              <a:rPr lang="en-US" sz="2799" u="none" spc="55" dirty="0" err="1">
-                <a:solidFill>
-                  <a:srgbClr val="000000"/>
-                </a:solidFill>
-                <a:latin typeface="Codec Pro"/>
-                <a:ea typeface="Codec Pro"/>
-                <a:cs typeface="Codec Pro"/>
-                <a:sym typeface="Codec Pro"/>
-              </a:rPr>
-              <a:t>ciclos</a:t>
-            </a:r>
-            <a:r>
-              <a:rPr lang="en-US" sz="2799" u="none" spc="55" dirty="0">
-                <a:solidFill>
-                  <a:srgbClr val="000000"/>
-                </a:solidFill>
-                <a:latin typeface="Codec Pro"/>
-                <a:ea typeface="Codec Pro"/>
-                <a:cs typeface="Codec Pro"/>
-                <a:sym typeface="Codec Pro"/>
-              </a:rPr>
-              <a:t>.</a:t>
+              <a:t>Evaluar cómo cambian los patrones del mercado frente a shocks o ciclos.</a:t>
             </a:r>
           </a:p>
           <a:p>
@@ -5598,18 +4546,9 @@
                 <a:spcPts val="4453"/>
               </a:lnSpc>
             </a:pPr>
-            <a:endParaRPr lang="en-US" sz="2799" u="none" spc="55" dirty="0">
-              <a:solidFill>
-                <a:srgbClr val="000000"/>
-              </a:solidFill>
-              <a:latin typeface="Codec Pro"/>
-              <a:ea typeface="Codec Pro"/>
-              <a:cs typeface="Codec Pro"/>
-              <a:sym typeface="Codec Pro"/>
-            </a:endParaRPr>
-          </a:p>
-          <a:p>
-            <a:pPr marL="604516" lvl="1" indent="-302258" algn="just">
+          </a:p>
+          <a:p>
+            <a:pPr algn="just" marL="604516" indent="-302258" lvl="1">
               <a:lnSpc>
                 <a:spcPts val="3667"/>
               </a:lnSpc>
@@ -5617,7 +4556,7 @@
               <a:buChar char="•"/>
             </a:pPr>
             <a:r>
-              <a:rPr lang="en-US" sz="2799" u="none" spc="55" dirty="0" err="1">
+              <a:rPr lang="en-US" sz="2799" spc="55" u="none">
                 <a:solidFill>
                   <a:srgbClr val="000000"/>
                 </a:solidFill>
@@ -5626,175 +4565,19 @@
                 <a:cs typeface="Codec Pro"/>
                 <a:sym typeface="Codec Pro"/>
               </a:rPr>
-              <a:t>Generar</a:t>
-            </a:r>
-            <a:r>
-              <a:rPr lang="en-US" sz="2799" u="none" spc="55" dirty="0">
-                <a:solidFill>
-                  <a:srgbClr val="000000"/>
-                </a:solidFill>
-                <a:latin typeface="Codec Pro"/>
-                <a:ea typeface="Codec Pro"/>
-                <a:cs typeface="Codec Pro"/>
-                <a:sym typeface="Codec Pro"/>
-              </a:rPr>
-              <a:t> </a:t>
-            </a:r>
-            <a:r>
-              <a:rPr lang="en-US" sz="2799" u="none" spc="55" dirty="0" err="1">
-                <a:solidFill>
-                  <a:srgbClr val="000000"/>
-                </a:solidFill>
-                <a:latin typeface="Codec Pro"/>
-                <a:ea typeface="Codec Pro"/>
-                <a:cs typeface="Codec Pro"/>
-                <a:sym typeface="Codec Pro"/>
-              </a:rPr>
-              <a:t>información</a:t>
-            </a:r>
-            <a:r>
-              <a:rPr lang="en-US" sz="2799" u="none" spc="55" dirty="0">
-                <a:solidFill>
-                  <a:srgbClr val="000000"/>
-                </a:solidFill>
-                <a:latin typeface="Codec Pro"/>
-                <a:ea typeface="Codec Pro"/>
-                <a:cs typeface="Codec Pro"/>
-                <a:sym typeface="Codec Pro"/>
-              </a:rPr>
-              <a:t> </a:t>
-            </a:r>
-            <a:r>
-              <a:rPr lang="en-US" sz="2799" u="none" spc="55" dirty="0" err="1">
-                <a:solidFill>
-                  <a:srgbClr val="000000"/>
-                </a:solidFill>
-                <a:latin typeface="Codec Pro"/>
-                <a:ea typeface="Codec Pro"/>
-                <a:cs typeface="Codec Pro"/>
-                <a:sym typeface="Codec Pro"/>
-              </a:rPr>
-              <a:t>útil</a:t>
-            </a:r>
-            <a:r>
-              <a:rPr lang="en-US" sz="2799" u="none" spc="55" dirty="0">
-                <a:solidFill>
-                  <a:srgbClr val="000000"/>
-                </a:solidFill>
-                <a:latin typeface="Codec Pro"/>
-                <a:ea typeface="Codec Pro"/>
-                <a:cs typeface="Codec Pro"/>
-                <a:sym typeface="Codec Pro"/>
-              </a:rPr>
-              <a:t> para </a:t>
-            </a:r>
-            <a:r>
-              <a:rPr lang="en-US" sz="2799" u="none" spc="55" dirty="0" err="1">
-                <a:solidFill>
-                  <a:srgbClr val="000000"/>
-                </a:solidFill>
-                <a:latin typeface="Codec Pro"/>
-                <a:ea typeface="Codec Pro"/>
-                <a:cs typeface="Codec Pro"/>
-                <a:sym typeface="Codec Pro"/>
-              </a:rPr>
-              <a:t>inversores</a:t>
-            </a:r>
-            <a:r>
-              <a:rPr lang="en-US" sz="2799" u="none" spc="55" dirty="0">
-                <a:solidFill>
-                  <a:srgbClr val="000000"/>
-                </a:solidFill>
-                <a:latin typeface="Codec Pro"/>
-                <a:ea typeface="Codec Pro"/>
-                <a:cs typeface="Codec Pro"/>
-                <a:sym typeface="Codec Pro"/>
-              </a:rPr>
-              <a:t>, </a:t>
-            </a:r>
-            <a:r>
-              <a:rPr lang="en-US" sz="2799" u="none" spc="55" dirty="0" err="1">
-                <a:solidFill>
-                  <a:srgbClr val="000000"/>
-                </a:solidFill>
-                <a:latin typeface="Codec Pro"/>
-                <a:ea typeface="Codec Pro"/>
-                <a:cs typeface="Codec Pro"/>
-                <a:sym typeface="Codec Pro"/>
-              </a:rPr>
-              <a:t>desarrolladores</a:t>
-            </a:r>
-            <a:r>
-              <a:rPr lang="en-US" sz="2799" u="none" spc="55" dirty="0">
-                <a:solidFill>
-                  <a:srgbClr val="000000"/>
-                </a:solidFill>
-                <a:latin typeface="Codec Pro"/>
-                <a:ea typeface="Codec Pro"/>
-                <a:cs typeface="Codec Pro"/>
-                <a:sym typeface="Codec Pro"/>
-              </a:rPr>
-              <a:t> y </a:t>
-            </a:r>
-            <a:r>
-              <a:rPr lang="en-US" sz="2799" u="none" spc="55" dirty="0" err="1">
-                <a:solidFill>
-                  <a:srgbClr val="000000"/>
-                </a:solidFill>
-                <a:latin typeface="Codec Pro"/>
-                <a:ea typeface="Codec Pro"/>
-                <a:cs typeface="Codec Pro"/>
-                <a:sym typeface="Codec Pro"/>
-              </a:rPr>
-              <a:t>análisis</a:t>
-            </a:r>
-            <a:r>
-              <a:rPr lang="en-US" sz="2799" u="none" spc="55" dirty="0">
-                <a:solidFill>
-                  <a:srgbClr val="000000"/>
-                </a:solidFill>
-                <a:latin typeface="Codec Pro"/>
-                <a:ea typeface="Codec Pro"/>
-                <a:cs typeface="Codec Pro"/>
-                <a:sym typeface="Codec Pro"/>
-              </a:rPr>
-              <a:t> </a:t>
-            </a:r>
-            <a:r>
-              <a:rPr lang="en-US" sz="2799" u="none" spc="55" dirty="0" err="1">
-                <a:solidFill>
-                  <a:srgbClr val="000000"/>
-                </a:solidFill>
-                <a:latin typeface="Codec Pro"/>
-                <a:ea typeface="Codec Pro"/>
-                <a:cs typeface="Codec Pro"/>
-                <a:sym typeface="Codec Pro"/>
-              </a:rPr>
-              <a:t>urbano</a:t>
-            </a:r>
-            <a:r>
-              <a:rPr lang="en-US" sz="2799" u="none" spc="55" dirty="0">
-                <a:solidFill>
-                  <a:srgbClr val="000000"/>
-                </a:solidFill>
-                <a:latin typeface="Codec Pro"/>
-                <a:ea typeface="Codec Pro"/>
-                <a:cs typeface="Codec Pro"/>
-                <a:sym typeface="Codec Pro"/>
-              </a:rPr>
-              <a:t>.</a:t>
-            </a:r>
-          </a:p>
-        </p:txBody>
-      </p:sp>
-      <p:sp>
-        <p:nvSpPr>
-          <p:cNvPr id="6" name="TextBox 6"/>
-          <p:cNvSpPr txBox="1"/>
+              <a:t>Generar información útil para inversores, desarrolladores y análisis urbano.</a:t>
+            </a:r>
+          </a:p>
+        </p:txBody>
+      </p:sp>
+      <p:sp>
+        <p:nvSpPr>
+          <p:cNvPr name="TextBox 6" id="6"/>
+          <p:cNvSpPr txBox="true"/>
           <p:nvPr/>
         </p:nvSpPr>
         <p:spPr>
-          <a:xfrm>
+          <a:xfrm rot="0">
             <a:off x="1028700" y="1066763"/>
             <a:ext cx="13103867" cy="1174750"/>
           </a:xfrm>
@@ -5803,7 +4586,7 @@
           </a:prstGeom>
         </p:spPr>
         <p:txBody>
-          <a:bodyPr lIns="0" tIns="0" rIns="0" bIns="0" rtlCol="0" anchor="t">
+          <a:bodyPr anchor="t" rtlCol="false" tIns="0" lIns="0" bIns="0" rIns="0">
             <a:spAutoFit/>
           </a:bodyPr>
           <a:lstStyle/>
@@ -5825,36 +4608,6 @@
               </a:rPr>
               <a:t>PROPUESTA DE TRABAJO</a:t>
             </a:r>
-          </a:p>
-        </p:txBody>
-      </p:sp>
-      <p:sp>
-        <p:nvSpPr>
-          <p:cNvPr id="7" name="Marcador de número de diapositiva 6">
-            <a:extLst>
-              <a:ext uri="{FF2B5EF4-FFF2-40B4-BE49-F238E27FC236}">
-                <a16:creationId xmlns:a16="http://schemas.microsoft.com/office/drawing/2014/main" id="{A159EAD6-FD8D-7FEE-4CB9-781FD0299B66}"/>
-              </a:ext>
-            </a:extLst>
-          </p:cNvPr>
-          <p:cNvSpPr>
-            <a:spLocks noGrp="1"/>
-          </p:cNvSpPr>
-          <p:nvPr>
-            <p:ph type="sldNum" sz="quarter" idx="12"/>
-          </p:nvPr>
-        </p:nvSpPr>
-        <p:spPr/>
-        <p:txBody>
-          <a:bodyPr/>
-          <a:lstStyle/>
-          <a:p>
-            <a:fld id="{B6F15528-21DE-4FAA-801E-634DDDAF4B2B}" type="slidenum">
-              <a:rPr lang="en-US" smtClean="0"/>
-              <a:pPr/>
-              <a:t>2</a:t>
-            </a:fld>
-            <a:endParaRPr lang="en-US"/>
           </a:p>
         </p:txBody>
       </p:sp>
@@ -5867,7 +4620,7 @@
 </file>
 
 <file path=ppt/slides/slide3.xml><?xml version="1.0" encoding="utf-8"?>
-<p:sld xmlns:a="http://schemas.openxmlformats.org/drawingml/2006/main" xmlns:r="http://schemas.openxmlformats.org/officeDocument/2006/relationships" xmlns:p="http://schemas.openxmlformats.org/presentationml/2006/main">
+<p:sld xmlns:p="http://schemas.openxmlformats.org/presentationml/2006/main" xmlns:a="http://schemas.openxmlformats.org/drawingml/2006/main">
   <p:cSld>
     <p:spTree>
       <p:nvGrpSpPr>
@@ -5885,12 +4638,12 @@
       </p:grpSpPr>
       <p:grpSp>
         <p:nvGrpSpPr>
-          <p:cNvPr id="2" name="Group 2"/>
+          <p:cNvPr name="Group 2" id="2"/>
           <p:cNvGrpSpPr/>
           <p:nvPr/>
         </p:nvGrpSpPr>
         <p:grpSpPr>
-          <a:xfrm>
+          <a:xfrm rot="0">
             <a:off x="0" y="0"/>
             <a:ext cx="18288000" cy="3279284"/>
             <a:chOff x="0" y="0"/>
@@ -5899,12 +4652,12 @@
         </p:grpSpPr>
         <p:sp>
           <p:nvSpPr>
-            <p:cNvPr id="3" name="Freeform 3"/>
+            <p:cNvPr name="Freeform 3" id="3"/>
             <p:cNvSpPr/>
             <p:nvPr/>
           </p:nvSpPr>
           <p:spPr>
-            <a:xfrm>
+            <a:xfrm flipH="false" flipV="false" rot="0">
               <a:off x="0" y="0"/>
               <a:ext cx="4816592" cy="863680"/>
             </a:xfrm>
@@ -5913,9 +4666,9 @@
               <a:gdLst/>
               <a:ahLst/>
               <a:cxnLst/>
-              <a:rect l="l" t="t" r="r" b="b"/>
+              <a:rect r="r" b="b" t="t" l="l"/>
               <a:pathLst>
-                <a:path w="4816592" h="863680">
+                <a:path h="863680" w="4816592">
                   <a:moveTo>
                     <a:pt x="0" y="0"/>
                   </a:moveTo>
@@ -5936,18 +4689,11 @@
               <a:srgbClr val="132232"/>
             </a:solidFill>
           </p:spPr>
-          <p:txBody>
-            <a:bodyPr/>
-            <a:lstStyle/>
-            <a:p>
-              <a:endParaRPr lang="es-AR"/>
-            </a:p>
-          </p:txBody>
         </p:sp>
         <p:sp>
           <p:nvSpPr>
-            <p:cNvPr id="4" name="TextBox 4"/>
-            <p:cNvSpPr txBox="1"/>
+            <p:cNvPr name="TextBox 4" id="4"/>
+            <p:cNvSpPr txBox="true"/>
             <p:nvPr/>
           </p:nvSpPr>
           <p:spPr>
@@ -5960,7 +4706,7 @@
             </a:prstGeom>
           </p:spPr>
           <p:txBody>
-            <a:bodyPr lIns="50800" tIns="50800" rIns="50800" bIns="50800" rtlCol="0" anchor="ctr"/>
+            <a:bodyPr anchor="ctr" rtlCol="false" tIns="50800" lIns="50800" bIns="50800" rIns="50800"/>
             <a:lstStyle/>
             <a:p>
               <a:pPr algn="ctr">
@@ -5968,47 +4714,40 @@
                   <a:spcPts val="3624"/>
                 </a:lnSpc>
               </a:pPr>
-              <a:endParaRPr/>
             </a:p>
           </p:txBody>
         </p:sp>
       </p:grpSp>
       <p:sp>
         <p:nvSpPr>
-          <p:cNvPr id="5" name="TextBox 5"/>
-          <p:cNvSpPr txBox="1"/>
+          <p:cNvPr name="TextBox 5" id="5"/>
+          <p:cNvSpPr txBox="true"/>
           <p:nvPr/>
         </p:nvSpPr>
         <p:spPr>
-          <a:xfrm>
-            <a:off x="685800" y="3679530"/>
-            <a:ext cx="17310674" cy="6656374"/>
+          <a:xfrm rot="0">
+            <a:off x="977326" y="3512264"/>
+            <a:ext cx="17310674" cy="7121145"/>
           </a:xfrm>
           <a:prstGeom prst="rect">
             <a:avLst/>
           </a:prstGeom>
         </p:spPr>
         <p:txBody>
-          <a:bodyPr lIns="0" tIns="0" rIns="0" bIns="0" rtlCol="0" anchor="t">
+          <a:bodyPr anchor="t" rtlCol="false" tIns="0" lIns="0" bIns="0" rIns="0">
             <a:spAutoFit/>
           </a:bodyPr>
           <a:lstStyle/>
           <a:p>
-            <a:pPr marL="604516" lvl="1" indent="-302258" algn="just">
+            <a:pPr algn="just" marL="604516" indent="-302258" lvl="1">
               <a:lnSpc>
-                <a:spcPts val="3667"/>
+                <a:spcPts val="5207"/>
               </a:lnSpc>
-              <a:spcBef>
-                <a:spcPts val="600"/>
-              </a:spcBef>
-              <a:spcAft>
-                <a:spcPts val="600"/>
-              </a:spcAft>
               <a:buFont typeface="Arial"/>
               <a:buChar char="•"/>
             </a:pPr>
             <a:r>
-              <a:rPr lang="en-US" sz="2799" spc="55" dirty="0">
+              <a:rPr lang="en-US" sz="2799" spc="55">
                 <a:solidFill>
                   <a:srgbClr val="000000"/>
                 </a:solidFill>
@@ -6017,10 +4756,10 @@
                 <a:cs typeface="Codec Pro"/>
                 <a:sym typeface="Codec Pro"/>
               </a:rPr>
-              <a:t>Datos </a:t>
-            </a:r>
-            <a:r>
-              <a:rPr lang="en-US" sz="2799" spc="55" dirty="0" err="1">
+              <a:t>Datos mensuales de </a:t>
+            </a:r>
+            <a:r>
+              <a:rPr lang="en-US" sz="2799" spc="55" u="none">
                 <a:solidFill>
                   <a:srgbClr val="000000"/>
                 </a:solidFill>
@@ -6029,10 +4768,19 @@
                 <a:cs typeface="Codec Pro"/>
                 <a:sym typeface="Codec Pro"/>
               </a:rPr>
-              <a:t>mensuales</a:t>
-            </a:r>
-            <a:r>
-              <a:rPr lang="en-US" sz="2799" spc="55" dirty="0">
+              <a:t>publicaciones de ZonaProp, último día hábil de cada mes.</a:t>
+            </a:r>
+          </a:p>
+          <a:p>
+            <a:pPr algn="just" marL="604516" indent="-302258" lvl="1">
+              <a:lnSpc>
+                <a:spcPts val="5207"/>
+              </a:lnSpc>
+              <a:buFont typeface="Arial"/>
+              <a:buChar char="•"/>
+            </a:pPr>
+            <a:r>
+              <a:rPr lang="en-US" sz="2799" spc="55" u="none">
                 <a:solidFill>
                   <a:srgbClr val="000000"/>
                 </a:solidFill>
@@ -6041,10 +4789,19 @@
                 <a:cs typeface="Codec Pro"/>
                 <a:sym typeface="Codec Pro"/>
               </a:rPr>
-              <a:t> de </a:t>
-            </a:r>
-            <a:r>
-              <a:rPr lang="en-US" sz="2799" u="none" spc="55" dirty="0" err="1">
+              <a:t>Período analizado: 2016–2025.</a:t>
+            </a:r>
+          </a:p>
+          <a:p>
+            <a:pPr algn="just" marL="604516" indent="-302258" lvl="1">
+              <a:lnSpc>
+                <a:spcPts val="5207"/>
+              </a:lnSpc>
+              <a:buFont typeface="Arial"/>
+              <a:buChar char="•"/>
+            </a:pPr>
+            <a:r>
+              <a:rPr lang="en-US" sz="2799" spc="55" u="none">
                 <a:solidFill>
                   <a:srgbClr val="000000"/>
                 </a:solidFill>
@@ -6053,10 +4810,19 @@
                 <a:cs typeface="Codec Pro"/>
                 <a:sym typeface="Codec Pro"/>
               </a:rPr>
-              <a:t>publicaciones</a:t>
-            </a:r>
-            <a:r>
-              <a:rPr lang="en-US" sz="2799" u="none" spc="55" dirty="0">
+              <a:t>Observaciones: departamentos, casas, PH, oficinas, etc.</a:t>
+            </a:r>
+          </a:p>
+          <a:p>
+            <a:pPr algn="just" marL="604516" indent="-302258" lvl="1">
+              <a:lnSpc>
+                <a:spcPts val="5207"/>
+              </a:lnSpc>
+              <a:buFont typeface="Arial"/>
+              <a:buChar char="•"/>
+            </a:pPr>
+            <a:r>
+              <a:rPr lang="en-US" sz="2799" spc="55" u="none">
                 <a:solidFill>
                   <a:srgbClr val="000000"/>
                 </a:solidFill>
@@ -6065,10 +4831,19 @@
                 <a:cs typeface="Codec Pro"/>
                 <a:sym typeface="Codec Pro"/>
               </a:rPr>
-              <a:t> de </a:t>
-            </a:r>
-            <a:r>
-              <a:rPr lang="en-US" sz="2799" u="none" spc="55" dirty="0" err="1">
+              <a:t>Variables principales:</a:t>
+            </a:r>
+          </a:p>
+          <a:p>
+            <a:pPr algn="just" marL="604516" indent="-302258" lvl="1">
+              <a:lnSpc>
+                <a:spcPts val="5207"/>
+              </a:lnSpc>
+              <a:buFont typeface="Arial"/>
+              <a:buChar char="•"/>
+            </a:pPr>
+            <a:r>
+              <a:rPr lang="en-US" sz="2799" spc="55" u="none">
                 <a:solidFill>
                   <a:srgbClr val="000000"/>
                 </a:solidFill>
@@ -6077,10 +4852,19 @@
                 <a:cs typeface="Codec Pro"/>
                 <a:sym typeface="Codec Pro"/>
               </a:rPr>
-              <a:t>ZonaProp</a:t>
-            </a:r>
-            <a:r>
-              <a:rPr lang="en-US" sz="2799" u="none" spc="55" dirty="0">
+              <a:t>Precio (MontoOperacion)</a:t>
+            </a:r>
+          </a:p>
+          <a:p>
+            <a:pPr algn="just" marL="604516" indent="-302258" lvl="1">
+              <a:lnSpc>
+                <a:spcPts val="5207"/>
+              </a:lnSpc>
+              <a:buFont typeface="Arial"/>
+              <a:buChar char="•"/>
+            </a:pPr>
+            <a:r>
+              <a:rPr lang="en-US" sz="2799" spc="55" u="none">
                 <a:solidFill>
                   <a:srgbClr val="000000"/>
                 </a:solidFill>
@@ -6089,10 +4873,10 @@
                 <a:cs typeface="Codec Pro"/>
                 <a:sym typeface="Codec Pro"/>
               </a:rPr>
-              <a:t>, </a:t>
-            </a:r>
-            <a:r>
-              <a:rPr lang="en-US" sz="2799" u="none" spc="55" dirty="0" err="1">
+              <a:t>Superf</a:t>
+            </a:r>
+            <a:r>
+              <a:rPr lang="en-US" sz="2799" spc="55" u="none">
                 <a:solidFill>
                   <a:srgbClr val="000000"/>
                 </a:solidFill>
@@ -6101,10 +4885,19 @@
                 <a:cs typeface="Codec Pro"/>
                 <a:sym typeface="Codec Pro"/>
               </a:rPr>
-              <a:t>último</a:t>
-            </a:r>
-            <a:r>
-              <a:rPr lang="en-US" sz="2799" u="none" spc="55" dirty="0">
+              <a:t>icie total / cubierta / descubierta</a:t>
+            </a:r>
+          </a:p>
+          <a:p>
+            <a:pPr algn="just" marL="604516" indent="-302258" lvl="1">
+              <a:lnSpc>
+                <a:spcPts val="5207"/>
+              </a:lnSpc>
+              <a:buFont typeface="Arial"/>
+              <a:buChar char="•"/>
+            </a:pPr>
+            <a:r>
+              <a:rPr lang="en-US" sz="2799" spc="55" u="none">
                 <a:solidFill>
                   <a:srgbClr val="000000"/>
                 </a:solidFill>
@@ -6113,10 +4906,19 @@
                 <a:cs typeface="Codec Pro"/>
                 <a:sym typeface="Codec Pro"/>
               </a:rPr>
-              <a:t> día </a:t>
-            </a:r>
-            <a:r>
-              <a:rPr lang="en-US" sz="2799" u="none" spc="55" dirty="0" err="1">
+              <a:t>Ubicación (Provincia, Localidad, Barrio, coordenadas)</a:t>
+            </a:r>
+          </a:p>
+          <a:p>
+            <a:pPr algn="just" marL="604516" indent="-302258" lvl="1">
+              <a:lnSpc>
+                <a:spcPts val="5207"/>
+              </a:lnSpc>
+              <a:buFont typeface="Arial"/>
+              <a:buChar char="•"/>
+            </a:pPr>
+            <a:r>
+              <a:rPr lang="en-US" sz="2799" spc="55" u="none">
                 <a:solidFill>
                   <a:srgbClr val="000000"/>
                 </a:solidFill>
@@ -6125,10 +4927,19 @@
                 <a:cs typeface="Codec Pro"/>
                 <a:sym typeface="Codec Pro"/>
               </a:rPr>
-              <a:t>hábil</a:t>
-            </a:r>
-            <a:r>
-              <a:rPr lang="en-US" sz="2799" u="none" spc="55" dirty="0">
+              <a:t>Características (ambientes, dormitorios, cocheras, antigüedad, expensas)</a:t>
+            </a:r>
+          </a:p>
+          <a:p>
+            <a:pPr algn="just" marL="604516" indent="-302258" lvl="1">
+              <a:lnSpc>
+                <a:spcPts val="5207"/>
+              </a:lnSpc>
+              <a:buFont typeface="Arial"/>
+              <a:buChar char="•"/>
+            </a:pPr>
+            <a:r>
+              <a:rPr lang="en-US" sz="2799" spc="55" u="none">
                 <a:solidFill>
                   <a:srgbClr val="000000"/>
                 </a:solidFill>
@@ -6137,10 +4948,19 @@
                 <a:cs typeface="Codec Pro"/>
                 <a:sym typeface="Codec Pro"/>
               </a:rPr>
-              <a:t> de </a:t>
-            </a:r>
-            <a:r>
-              <a:rPr lang="en-US" sz="2799" u="none" spc="55" dirty="0" err="1">
+              <a:t>Se combinan todas las bases en un único panel mensual.</a:t>
+            </a:r>
+          </a:p>
+          <a:p>
+            <a:pPr algn="just" marL="604516" indent="-302258" lvl="1">
+              <a:lnSpc>
+                <a:spcPts val="5207"/>
+              </a:lnSpc>
+              <a:buFont typeface="Arial"/>
+              <a:buChar char="•"/>
+            </a:pPr>
+            <a:r>
+              <a:rPr lang="en-US" sz="2799" spc="55" u="none">
                 <a:solidFill>
                   <a:srgbClr val="000000"/>
                 </a:solidFill>
@@ -6149,919 +4969,7 @@
                 <a:cs typeface="Codec Pro"/>
                 <a:sym typeface="Codec Pro"/>
               </a:rPr>
-              <a:t>cada</a:t>
-            </a:r>
-            <a:r>
-              <a:rPr lang="en-US" sz="2799" u="none" spc="55" dirty="0">
-                <a:solidFill>
-                  <a:srgbClr val="000000"/>
-                </a:solidFill>
-                <a:latin typeface="Codec Pro"/>
-                <a:ea typeface="Codec Pro"/>
-                <a:cs typeface="Codec Pro"/>
-                <a:sym typeface="Codec Pro"/>
-              </a:rPr>
-              <a:t> </a:t>
-            </a:r>
-            <a:r>
-              <a:rPr lang="en-US" sz="2799" u="none" spc="55" dirty="0" err="1">
-                <a:solidFill>
-                  <a:srgbClr val="000000"/>
-                </a:solidFill>
-                <a:latin typeface="Codec Pro"/>
-                <a:ea typeface="Codec Pro"/>
-                <a:cs typeface="Codec Pro"/>
-                <a:sym typeface="Codec Pro"/>
-              </a:rPr>
-              <a:t>mes</a:t>
-            </a:r>
-            <a:r>
-              <a:rPr lang="en-US" sz="2799" u="none" spc="55" dirty="0">
-                <a:solidFill>
-                  <a:srgbClr val="000000"/>
-                </a:solidFill>
-                <a:latin typeface="Codec Pro"/>
-                <a:ea typeface="Codec Pro"/>
-                <a:cs typeface="Codec Pro"/>
-                <a:sym typeface="Codec Pro"/>
-              </a:rPr>
-              <a:t>.</a:t>
-            </a:r>
-          </a:p>
-          <a:p>
-            <a:pPr marL="604516" lvl="1" indent="-302258" algn="just">
-              <a:lnSpc>
-                <a:spcPts val="3667"/>
-              </a:lnSpc>
-              <a:spcBef>
-                <a:spcPts val="600"/>
-              </a:spcBef>
-              <a:spcAft>
-                <a:spcPts val="600"/>
-              </a:spcAft>
-              <a:buFont typeface="Arial"/>
-              <a:buChar char="•"/>
-            </a:pPr>
-            <a:r>
-              <a:rPr lang="en-US" sz="2799" u="none" spc="55" dirty="0" err="1">
-                <a:solidFill>
-                  <a:srgbClr val="000000"/>
-                </a:solidFill>
-                <a:latin typeface="Codec Pro"/>
-                <a:ea typeface="Codec Pro"/>
-                <a:cs typeface="Codec Pro"/>
-                <a:sym typeface="Codec Pro"/>
-              </a:rPr>
-              <a:t>Período</a:t>
-            </a:r>
-            <a:r>
-              <a:rPr lang="en-US" sz="2799" u="none" spc="55" dirty="0">
-                <a:solidFill>
-                  <a:srgbClr val="000000"/>
-                </a:solidFill>
-                <a:latin typeface="Codec Pro"/>
-                <a:ea typeface="Codec Pro"/>
-                <a:cs typeface="Codec Pro"/>
-                <a:sym typeface="Codec Pro"/>
-              </a:rPr>
-              <a:t> </a:t>
-            </a:r>
-            <a:r>
-              <a:rPr lang="en-US" sz="2799" u="none" spc="55" dirty="0" err="1">
-                <a:solidFill>
-                  <a:srgbClr val="000000"/>
-                </a:solidFill>
-                <a:latin typeface="Codec Pro"/>
-                <a:ea typeface="Codec Pro"/>
-                <a:cs typeface="Codec Pro"/>
-                <a:sym typeface="Codec Pro"/>
-              </a:rPr>
-              <a:t>analizado</a:t>
-            </a:r>
-            <a:r>
-              <a:rPr lang="en-US" sz="2799" u="none" spc="55" dirty="0">
-                <a:solidFill>
-                  <a:srgbClr val="000000"/>
-                </a:solidFill>
-                <a:latin typeface="Codec Pro"/>
-                <a:ea typeface="Codec Pro"/>
-                <a:cs typeface="Codec Pro"/>
-                <a:sym typeface="Codec Pro"/>
-              </a:rPr>
-              <a:t>: 2016–2025.</a:t>
-            </a:r>
-          </a:p>
-          <a:p>
-            <a:pPr marL="604516" lvl="1" indent="-302258" algn="just">
-              <a:lnSpc>
-                <a:spcPts val="3667"/>
-              </a:lnSpc>
-              <a:spcBef>
-                <a:spcPts val="600"/>
-              </a:spcBef>
-              <a:spcAft>
-                <a:spcPts val="600"/>
-              </a:spcAft>
-              <a:buFont typeface="Arial"/>
-              <a:buChar char="•"/>
-            </a:pPr>
-            <a:r>
-              <a:rPr lang="en-US" sz="2799" u="none" spc="55" dirty="0" err="1">
-                <a:solidFill>
-                  <a:srgbClr val="000000"/>
-                </a:solidFill>
-                <a:latin typeface="Codec Pro"/>
-                <a:ea typeface="Codec Pro"/>
-                <a:cs typeface="Codec Pro"/>
-                <a:sym typeface="Codec Pro"/>
-              </a:rPr>
-              <a:t>Observaciones</a:t>
-            </a:r>
-            <a:r>
-              <a:rPr lang="en-US" sz="2799" u="none" spc="55" dirty="0">
-                <a:solidFill>
-                  <a:srgbClr val="000000"/>
-                </a:solidFill>
-                <a:latin typeface="Codec Pro"/>
-                <a:ea typeface="Codec Pro"/>
-                <a:cs typeface="Codec Pro"/>
-                <a:sym typeface="Codec Pro"/>
-              </a:rPr>
-              <a:t>: </a:t>
-            </a:r>
-            <a:r>
-              <a:rPr lang="en-US" sz="2799" u="none" spc="55" dirty="0" err="1">
-                <a:solidFill>
-                  <a:srgbClr val="000000"/>
-                </a:solidFill>
-                <a:latin typeface="Codec Pro"/>
-                <a:ea typeface="Codec Pro"/>
-                <a:cs typeface="Codec Pro"/>
-                <a:sym typeface="Codec Pro"/>
-              </a:rPr>
-              <a:t>departamentos</a:t>
-            </a:r>
-            <a:r>
-              <a:rPr lang="en-US" sz="2799" u="none" spc="55" dirty="0">
-                <a:solidFill>
-                  <a:srgbClr val="000000"/>
-                </a:solidFill>
-                <a:latin typeface="Codec Pro"/>
-                <a:ea typeface="Codec Pro"/>
-                <a:cs typeface="Codec Pro"/>
-                <a:sym typeface="Codec Pro"/>
-              </a:rPr>
-              <a:t>, casas, PH, </a:t>
-            </a:r>
-            <a:r>
-              <a:rPr lang="en-US" sz="2799" u="none" spc="55" dirty="0" err="1">
-                <a:solidFill>
-                  <a:srgbClr val="000000"/>
-                </a:solidFill>
-                <a:latin typeface="Codec Pro"/>
-                <a:ea typeface="Codec Pro"/>
-                <a:cs typeface="Codec Pro"/>
-                <a:sym typeface="Codec Pro"/>
-              </a:rPr>
-              <a:t>oficinas</a:t>
-            </a:r>
-            <a:r>
-              <a:rPr lang="en-US" sz="2799" u="none" spc="55" dirty="0">
-                <a:solidFill>
-                  <a:srgbClr val="000000"/>
-                </a:solidFill>
-                <a:latin typeface="Codec Pro"/>
-                <a:ea typeface="Codec Pro"/>
-                <a:cs typeface="Codec Pro"/>
-                <a:sym typeface="Codec Pro"/>
-              </a:rPr>
-              <a:t>, etc.</a:t>
-            </a:r>
-          </a:p>
-          <a:p>
-            <a:pPr marL="604516" lvl="1" indent="-302258" algn="just">
-              <a:lnSpc>
-                <a:spcPts val="3667"/>
-              </a:lnSpc>
-              <a:spcBef>
-                <a:spcPts val="600"/>
-              </a:spcBef>
-              <a:spcAft>
-                <a:spcPts val="600"/>
-              </a:spcAft>
-              <a:buFont typeface="Arial"/>
-              <a:buChar char="•"/>
-            </a:pPr>
-            <a:r>
-              <a:rPr lang="en-US" sz="2799" u="none" spc="55" dirty="0">
-                <a:solidFill>
-                  <a:srgbClr val="000000"/>
-                </a:solidFill>
-                <a:latin typeface="Codec Pro"/>
-                <a:ea typeface="Codec Pro"/>
-                <a:cs typeface="Codec Pro"/>
-                <a:sym typeface="Codec Pro"/>
-              </a:rPr>
-              <a:t>Variables </a:t>
-            </a:r>
-            <a:r>
-              <a:rPr lang="en-US" sz="2799" u="none" spc="55" dirty="0" err="1">
-                <a:solidFill>
-                  <a:srgbClr val="000000"/>
-                </a:solidFill>
-                <a:latin typeface="Codec Pro"/>
-                <a:ea typeface="Codec Pro"/>
-                <a:cs typeface="Codec Pro"/>
-                <a:sym typeface="Codec Pro"/>
-              </a:rPr>
-              <a:t>principales</a:t>
-            </a:r>
-            <a:r>
-              <a:rPr lang="en-US" sz="2799" u="none" spc="55" dirty="0">
-                <a:solidFill>
-                  <a:srgbClr val="000000"/>
-                </a:solidFill>
-                <a:latin typeface="Codec Pro"/>
-                <a:ea typeface="Codec Pro"/>
-                <a:cs typeface="Codec Pro"/>
-                <a:sym typeface="Codec Pro"/>
-              </a:rPr>
-              <a:t>:</a:t>
-            </a:r>
-          </a:p>
-          <a:p>
-            <a:pPr marL="1216658" lvl="2" indent="-457200" algn="just">
-              <a:lnSpc>
-                <a:spcPts val="3667"/>
-              </a:lnSpc>
-              <a:spcBef>
-                <a:spcPts val="600"/>
-              </a:spcBef>
-              <a:spcAft>
-                <a:spcPts val="600"/>
-              </a:spcAft>
-              <a:buFont typeface="Wingdings" panose="05000000000000000000" pitchFamily="2" charset="2"/>
-              <a:buChar char="Ø"/>
-            </a:pPr>
-            <a:r>
-              <a:rPr lang="en-US" sz="2799" u="none" spc="55" dirty="0" err="1">
-                <a:solidFill>
-                  <a:srgbClr val="000000"/>
-                </a:solidFill>
-                <a:latin typeface="Codec Pro"/>
-                <a:ea typeface="Codec Pro"/>
-                <a:cs typeface="Codec Pro"/>
-                <a:sym typeface="Codec Pro"/>
-              </a:rPr>
-              <a:t>Precio</a:t>
-            </a:r>
-            <a:r>
-              <a:rPr lang="en-US" sz="2799" u="none" spc="55" dirty="0">
-                <a:solidFill>
-                  <a:srgbClr val="000000"/>
-                </a:solidFill>
-                <a:latin typeface="Codec Pro"/>
-                <a:ea typeface="Codec Pro"/>
-                <a:cs typeface="Codec Pro"/>
-                <a:sym typeface="Codec Pro"/>
-              </a:rPr>
-              <a:t> (</a:t>
-            </a:r>
-            <a:r>
-              <a:rPr lang="en-US" sz="2799" u="none" spc="55" dirty="0" err="1">
-                <a:solidFill>
-                  <a:srgbClr val="000000"/>
-                </a:solidFill>
-                <a:latin typeface="Codec Pro"/>
-                <a:ea typeface="Codec Pro"/>
-                <a:cs typeface="Codec Pro"/>
-                <a:sym typeface="Codec Pro"/>
-              </a:rPr>
-              <a:t>MontoOperacion</a:t>
-            </a:r>
-            <a:r>
-              <a:rPr lang="en-US" sz="2799" u="none" spc="55" dirty="0">
-                <a:solidFill>
-                  <a:srgbClr val="000000"/>
-                </a:solidFill>
-                <a:latin typeface="Codec Pro"/>
-                <a:ea typeface="Codec Pro"/>
-                <a:cs typeface="Codec Pro"/>
-                <a:sym typeface="Codec Pro"/>
-              </a:rPr>
-              <a:t>)</a:t>
-            </a:r>
-          </a:p>
-          <a:p>
-            <a:pPr marL="1216658" lvl="2" indent="-457200" algn="just">
-              <a:lnSpc>
-                <a:spcPts val="3667"/>
-              </a:lnSpc>
-              <a:spcBef>
-                <a:spcPts val="600"/>
-              </a:spcBef>
-              <a:spcAft>
-                <a:spcPts val="600"/>
-              </a:spcAft>
-              <a:buFont typeface="Wingdings" panose="05000000000000000000" pitchFamily="2" charset="2"/>
-              <a:buChar char="Ø"/>
-            </a:pPr>
-            <a:r>
-              <a:rPr lang="en-US" sz="2799" u="none" spc="55" dirty="0" err="1">
-                <a:solidFill>
-                  <a:srgbClr val="000000"/>
-                </a:solidFill>
-                <a:latin typeface="Codec Pro"/>
-                <a:ea typeface="Codec Pro"/>
-                <a:cs typeface="Codec Pro"/>
-                <a:sym typeface="Codec Pro"/>
-              </a:rPr>
-              <a:t>Superficie</a:t>
-            </a:r>
-            <a:r>
-              <a:rPr lang="en-US" sz="2799" u="none" spc="55" dirty="0">
-                <a:solidFill>
-                  <a:srgbClr val="000000"/>
-                </a:solidFill>
-                <a:latin typeface="Codec Pro"/>
-                <a:ea typeface="Codec Pro"/>
-                <a:cs typeface="Codec Pro"/>
-                <a:sym typeface="Codec Pro"/>
-              </a:rPr>
-              <a:t> total / </a:t>
-            </a:r>
-            <a:r>
-              <a:rPr lang="en-US" sz="2799" u="none" spc="55" dirty="0" err="1">
-                <a:solidFill>
-                  <a:srgbClr val="000000"/>
-                </a:solidFill>
-                <a:latin typeface="Codec Pro"/>
-                <a:ea typeface="Codec Pro"/>
-                <a:cs typeface="Codec Pro"/>
-                <a:sym typeface="Codec Pro"/>
-              </a:rPr>
-              <a:t>cubierta</a:t>
-            </a:r>
-            <a:r>
-              <a:rPr lang="en-US" sz="2799" u="none" spc="55" dirty="0">
-                <a:solidFill>
-                  <a:srgbClr val="000000"/>
-                </a:solidFill>
-                <a:latin typeface="Codec Pro"/>
-                <a:ea typeface="Codec Pro"/>
-                <a:cs typeface="Codec Pro"/>
-                <a:sym typeface="Codec Pro"/>
-              </a:rPr>
-              <a:t> / </a:t>
-            </a:r>
-            <a:r>
-              <a:rPr lang="en-US" sz="2799" u="none" spc="55" dirty="0" err="1">
-                <a:solidFill>
-                  <a:srgbClr val="000000"/>
-                </a:solidFill>
-                <a:latin typeface="Codec Pro"/>
-                <a:ea typeface="Codec Pro"/>
-                <a:cs typeface="Codec Pro"/>
-                <a:sym typeface="Codec Pro"/>
-              </a:rPr>
-              <a:t>descubierta</a:t>
-            </a:r>
-            <a:endParaRPr lang="en-US" sz="2799" u="none" spc="55" dirty="0">
-              <a:solidFill>
-                <a:srgbClr val="000000"/>
-              </a:solidFill>
-              <a:latin typeface="Codec Pro"/>
-              <a:ea typeface="Codec Pro"/>
-              <a:cs typeface="Codec Pro"/>
-              <a:sym typeface="Codec Pro"/>
-            </a:endParaRPr>
-          </a:p>
-          <a:p>
-            <a:pPr marL="1216658" lvl="2" indent="-457200" algn="just">
-              <a:lnSpc>
-                <a:spcPts val="3667"/>
-              </a:lnSpc>
-              <a:spcBef>
-                <a:spcPts val="600"/>
-              </a:spcBef>
-              <a:spcAft>
-                <a:spcPts val="600"/>
-              </a:spcAft>
-              <a:buFont typeface="Wingdings" panose="05000000000000000000" pitchFamily="2" charset="2"/>
-              <a:buChar char="Ø"/>
-            </a:pPr>
-            <a:r>
-              <a:rPr lang="en-US" sz="2799" u="none" spc="55" dirty="0" err="1">
-                <a:solidFill>
-                  <a:srgbClr val="000000"/>
-                </a:solidFill>
-                <a:latin typeface="Codec Pro"/>
-                <a:ea typeface="Codec Pro"/>
-                <a:cs typeface="Codec Pro"/>
-                <a:sym typeface="Codec Pro"/>
-              </a:rPr>
-              <a:t>Ubicación</a:t>
-            </a:r>
-            <a:r>
-              <a:rPr lang="en-US" sz="2799" u="none" spc="55" dirty="0">
-                <a:solidFill>
-                  <a:srgbClr val="000000"/>
-                </a:solidFill>
-                <a:latin typeface="Codec Pro"/>
-                <a:ea typeface="Codec Pro"/>
-                <a:cs typeface="Codec Pro"/>
-                <a:sym typeface="Codec Pro"/>
-              </a:rPr>
-              <a:t> (Provincia, </a:t>
-            </a:r>
-            <a:r>
-              <a:rPr lang="en-US" sz="2799" u="none" spc="55" dirty="0" err="1">
-                <a:solidFill>
-                  <a:srgbClr val="000000"/>
-                </a:solidFill>
-                <a:latin typeface="Codec Pro"/>
-                <a:ea typeface="Codec Pro"/>
-                <a:cs typeface="Codec Pro"/>
-                <a:sym typeface="Codec Pro"/>
-              </a:rPr>
-              <a:t>Localidad</a:t>
-            </a:r>
-            <a:r>
-              <a:rPr lang="en-US" sz="2799" u="none" spc="55" dirty="0">
-                <a:solidFill>
-                  <a:srgbClr val="000000"/>
-                </a:solidFill>
-                <a:latin typeface="Codec Pro"/>
-                <a:ea typeface="Codec Pro"/>
-                <a:cs typeface="Codec Pro"/>
-                <a:sym typeface="Codec Pro"/>
-              </a:rPr>
-              <a:t>, Barrio, </a:t>
-            </a:r>
-            <a:r>
-              <a:rPr lang="en-US" sz="2799" u="none" spc="55" dirty="0" err="1">
-                <a:solidFill>
-                  <a:srgbClr val="000000"/>
-                </a:solidFill>
-                <a:latin typeface="Codec Pro"/>
-                <a:ea typeface="Codec Pro"/>
-                <a:cs typeface="Codec Pro"/>
-                <a:sym typeface="Codec Pro"/>
-              </a:rPr>
-              <a:t>coordenadas</a:t>
-            </a:r>
-            <a:r>
-              <a:rPr lang="en-US" sz="2799" u="none" spc="55" dirty="0">
-                <a:solidFill>
-                  <a:srgbClr val="000000"/>
-                </a:solidFill>
-                <a:latin typeface="Codec Pro"/>
-                <a:ea typeface="Codec Pro"/>
-                <a:cs typeface="Codec Pro"/>
-                <a:sym typeface="Codec Pro"/>
-              </a:rPr>
-              <a:t>)</a:t>
-            </a:r>
-          </a:p>
-          <a:p>
-            <a:pPr marL="1216658" lvl="2" indent="-457200" algn="just">
-              <a:lnSpc>
-                <a:spcPts val="3667"/>
-              </a:lnSpc>
-              <a:spcBef>
-                <a:spcPts val="600"/>
-              </a:spcBef>
-              <a:spcAft>
-                <a:spcPts val="600"/>
-              </a:spcAft>
-              <a:buFont typeface="Wingdings" panose="05000000000000000000" pitchFamily="2" charset="2"/>
-              <a:buChar char="Ø"/>
-            </a:pPr>
-            <a:r>
-              <a:rPr lang="en-US" sz="2799" u="none" spc="55" dirty="0" err="1">
-                <a:solidFill>
-                  <a:srgbClr val="000000"/>
-                </a:solidFill>
-                <a:latin typeface="Codec Pro"/>
-                <a:ea typeface="Codec Pro"/>
-                <a:cs typeface="Codec Pro"/>
-                <a:sym typeface="Codec Pro"/>
-              </a:rPr>
-              <a:t>Características</a:t>
-            </a:r>
-            <a:r>
-              <a:rPr lang="en-US" sz="2799" u="none" spc="55" dirty="0">
-                <a:solidFill>
-                  <a:srgbClr val="000000"/>
-                </a:solidFill>
-                <a:latin typeface="Codec Pro"/>
-                <a:ea typeface="Codec Pro"/>
-                <a:cs typeface="Codec Pro"/>
-                <a:sym typeface="Codec Pro"/>
-              </a:rPr>
-              <a:t> (ambientes, </a:t>
-            </a:r>
-            <a:r>
-              <a:rPr lang="en-US" sz="2799" u="none" spc="55" dirty="0" err="1">
-                <a:solidFill>
-                  <a:srgbClr val="000000"/>
-                </a:solidFill>
-                <a:latin typeface="Codec Pro"/>
-                <a:ea typeface="Codec Pro"/>
-                <a:cs typeface="Codec Pro"/>
-                <a:sym typeface="Codec Pro"/>
-              </a:rPr>
-              <a:t>dormitorios</a:t>
-            </a:r>
-            <a:r>
-              <a:rPr lang="en-US" sz="2799" u="none" spc="55" dirty="0">
-                <a:solidFill>
-                  <a:srgbClr val="000000"/>
-                </a:solidFill>
-                <a:latin typeface="Codec Pro"/>
-                <a:ea typeface="Codec Pro"/>
-                <a:cs typeface="Codec Pro"/>
-                <a:sym typeface="Codec Pro"/>
-              </a:rPr>
-              <a:t>, </a:t>
-            </a:r>
-            <a:r>
-              <a:rPr lang="en-US" sz="2799" u="none" spc="55" dirty="0" err="1">
-                <a:solidFill>
-                  <a:srgbClr val="000000"/>
-                </a:solidFill>
-                <a:latin typeface="Codec Pro"/>
-                <a:ea typeface="Codec Pro"/>
-                <a:cs typeface="Codec Pro"/>
-                <a:sym typeface="Codec Pro"/>
-              </a:rPr>
-              <a:t>cocheras</a:t>
-            </a:r>
-            <a:r>
-              <a:rPr lang="en-US" sz="2799" u="none" spc="55" dirty="0">
-                <a:solidFill>
-                  <a:srgbClr val="000000"/>
-                </a:solidFill>
-                <a:latin typeface="Codec Pro"/>
-                <a:ea typeface="Codec Pro"/>
-                <a:cs typeface="Codec Pro"/>
-                <a:sym typeface="Codec Pro"/>
-              </a:rPr>
-              <a:t>, </a:t>
-            </a:r>
-            <a:r>
-              <a:rPr lang="en-US" sz="2799" u="none" spc="55" dirty="0" err="1">
-                <a:solidFill>
-                  <a:srgbClr val="000000"/>
-                </a:solidFill>
-                <a:latin typeface="Codec Pro"/>
-                <a:ea typeface="Codec Pro"/>
-                <a:cs typeface="Codec Pro"/>
-                <a:sym typeface="Codec Pro"/>
-              </a:rPr>
-              <a:t>antigüedad</a:t>
-            </a:r>
-            <a:r>
-              <a:rPr lang="en-US" sz="2799" u="none" spc="55" dirty="0">
-                <a:solidFill>
-                  <a:srgbClr val="000000"/>
-                </a:solidFill>
-                <a:latin typeface="Codec Pro"/>
-                <a:ea typeface="Codec Pro"/>
-                <a:cs typeface="Codec Pro"/>
-                <a:sym typeface="Codec Pro"/>
-              </a:rPr>
-              <a:t>, </a:t>
-            </a:r>
-            <a:r>
-              <a:rPr lang="en-US" sz="2799" u="none" spc="55" dirty="0" err="1">
-                <a:solidFill>
-                  <a:srgbClr val="000000"/>
-                </a:solidFill>
-                <a:latin typeface="Codec Pro"/>
-                <a:ea typeface="Codec Pro"/>
-                <a:cs typeface="Codec Pro"/>
-                <a:sym typeface="Codec Pro"/>
-              </a:rPr>
-              <a:t>expensas</a:t>
-            </a:r>
-            <a:r>
-              <a:rPr lang="en-US" sz="2799" u="none" spc="55" dirty="0">
-                <a:solidFill>
-                  <a:srgbClr val="000000"/>
-                </a:solidFill>
-                <a:latin typeface="Codec Pro"/>
-                <a:ea typeface="Codec Pro"/>
-                <a:cs typeface="Codec Pro"/>
-                <a:sym typeface="Codec Pro"/>
-              </a:rPr>
-              <a:t>)</a:t>
-            </a:r>
-          </a:p>
-          <a:p>
-            <a:pPr marL="604516" lvl="1" indent="-302258" algn="just">
-              <a:lnSpc>
-                <a:spcPts val="3667"/>
-              </a:lnSpc>
-              <a:spcBef>
-                <a:spcPts val="600"/>
-              </a:spcBef>
-              <a:spcAft>
-                <a:spcPts val="600"/>
-              </a:spcAft>
-              <a:buFont typeface="Arial"/>
-              <a:buChar char="•"/>
-            </a:pPr>
-            <a:r>
-              <a:rPr lang="en-US" sz="2799" u="none" spc="55" dirty="0">
-                <a:solidFill>
-                  <a:srgbClr val="000000"/>
-                </a:solidFill>
-                <a:latin typeface="Codec Pro"/>
-                <a:ea typeface="Codec Pro"/>
-                <a:cs typeface="Codec Pro"/>
-                <a:sym typeface="Codec Pro"/>
-              </a:rPr>
-              <a:t>Se </a:t>
-            </a:r>
-            <a:r>
-              <a:rPr lang="en-US" sz="2799" u="none" spc="55" dirty="0" err="1">
-                <a:solidFill>
-                  <a:srgbClr val="000000"/>
-                </a:solidFill>
-                <a:latin typeface="Codec Pro"/>
-                <a:ea typeface="Codec Pro"/>
-                <a:cs typeface="Codec Pro"/>
-                <a:sym typeface="Codec Pro"/>
-              </a:rPr>
-              <a:t>combinan</a:t>
-            </a:r>
-            <a:r>
-              <a:rPr lang="en-US" sz="2799" u="none" spc="55" dirty="0">
-                <a:solidFill>
-                  <a:srgbClr val="000000"/>
-                </a:solidFill>
-                <a:latin typeface="Codec Pro"/>
-                <a:ea typeface="Codec Pro"/>
-                <a:cs typeface="Codec Pro"/>
-                <a:sym typeface="Codec Pro"/>
-              </a:rPr>
-              <a:t> </a:t>
-            </a:r>
-            <a:r>
-              <a:rPr lang="en-US" sz="2799" u="none" spc="55" dirty="0" err="1">
-                <a:solidFill>
-                  <a:srgbClr val="000000"/>
-                </a:solidFill>
-                <a:latin typeface="Codec Pro"/>
-                <a:ea typeface="Codec Pro"/>
-                <a:cs typeface="Codec Pro"/>
-                <a:sym typeface="Codec Pro"/>
-              </a:rPr>
-              <a:t>todas</a:t>
-            </a:r>
-            <a:r>
-              <a:rPr lang="en-US" sz="2799" u="none" spc="55" dirty="0">
-                <a:solidFill>
-                  <a:srgbClr val="000000"/>
-                </a:solidFill>
-                <a:latin typeface="Codec Pro"/>
-                <a:ea typeface="Codec Pro"/>
-                <a:cs typeface="Codec Pro"/>
-                <a:sym typeface="Codec Pro"/>
-              </a:rPr>
-              <a:t> las bases </a:t>
-            </a:r>
-            <a:r>
-              <a:rPr lang="en-US" sz="2799" u="none" spc="55" dirty="0" err="1">
-                <a:solidFill>
-                  <a:srgbClr val="000000"/>
-                </a:solidFill>
-                <a:latin typeface="Codec Pro"/>
-                <a:ea typeface="Codec Pro"/>
-                <a:cs typeface="Codec Pro"/>
-                <a:sym typeface="Codec Pro"/>
-              </a:rPr>
-              <a:t>en</a:t>
-            </a:r>
-            <a:r>
-              <a:rPr lang="en-US" sz="2799" u="none" spc="55" dirty="0">
-                <a:solidFill>
-                  <a:srgbClr val="000000"/>
-                </a:solidFill>
-                <a:latin typeface="Codec Pro"/>
-                <a:ea typeface="Codec Pro"/>
-                <a:cs typeface="Codec Pro"/>
-                <a:sym typeface="Codec Pro"/>
-              </a:rPr>
-              <a:t> un </a:t>
-            </a:r>
-            <a:r>
-              <a:rPr lang="en-US" sz="2799" u="none" spc="55" dirty="0" err="1">
-                <a:solidFill>
-                  <a:srgbClr val="000000"/>
-                </a:solidFill>
-                <a:latin typeface="Codec Pro"/>
-                <a:ea typeface="Codec Pro"/>
-                <a:cs typeface="Codec Pro"/>
-                <a:sym typeface="Codec Pro"/>
-              </a:rPr>
-              <a:t>único</a:t>
-            </a:r>
-            <a:r>
-              <a:rPr lang="en-US" sz="2799" u="none" spc="55" dirty="0">
-                <a:solidFill>
-                  <a:srgbClr val="000000"/>
-                </a:solidFill>
-                <a:latin typeface="Codec Pro"/>
-                <a:ea typeface="Codec Pro"/>
-                <a:cs typeface="Codec Pro"/>
-                <a:sym typeface="Codec Pro"/>
-              </a:rPr>
-              <a:t> panel </a:t>
-            </a:r>
-            <a:r>
-              <a:rPr lang="en-US" sz="2799" u="none" spc="55" dirty="0" err="1">
-                <a:solidFill>
-                  <a:srgbClr val="000000"/>
-                </a:solidFill>
-                <a:latin typeface="Codec Pro"/>
-                <a:ea typeface="Codec Pro"/>
-                <a:cs typeface="Codec Pro"/>
-                <a:sym typeface="Codec Pro"/>
-              </a:rPr>
-              <a:t>mensual</a:t>
-            </a:r>
-            <a:r>
-              <a:rPr lang="en-US" sz="2799" u="none" spc="55" dirty="0">
-                <a:solidFill>
-                  <a:srgbClr val="000000"/>
-                </a:solidFill>
-                <a:latin typeface="Codec Pro"/>
-                <a:ea typeface="Codec Pro"/>
-                <a:cs typeface="Codec Pro"/>
-                <a:sym typeface="Codec Pro"/>
-              </a:rPr>
-              <a:t>.</a:t>
-            </a:r>
-          </a:p>
-          <a:p>
-            <a:pPr marL="604516" lvl="1" indent="-302258" algn="just">
-              <a:lnSpc>
-                <a:spcPts val="3667"/>
-              </a:lnSpc>
-              <a:spcBef>
-                <a:spcPts val="600"/>
-              </a:spcBef>
-              <a:spcAft>
-                <a:spcPts val="600"/>
-              </a:spcAft>
-              <a:buFont typeface="Arial"/>
-              <a:buChar char="•"/>
-            </a:pPr>
-            <a:r>
-              <a:rPr lang="en-US" sz="2799" u="none" spc="55" dirty="0" err="1">
-                <a:solidFill>
-                  <a:srgbClr val="000000"/>
-                </a:solidFill>
-                <a:latin typeface="Codec Pro"/>
-                <a:ea typeface="Codec Pro"/>
-                <a:cs typeface="Codec Pro"/>
-                <a:sym typeface="Codec Pro"/>
-              </a:rPr>
-              <a:t>Limpieza</a:t>
-            </a:r>
-            <a:r>
-              <a:rPr lang="en-US" sz="2799" u="none" spc="55" dirty="0">
-                <a:solidFill>
-                  <a:srgbClr val="000000"/>
-                </a:solidFill>
-                <a:latin typeface="Codec Pro"/>
-                <a:ea typeface="Codec Pro"/>
-                <a:cs typeface="Codec Pro"/>
-                <a:sym typeface="Codec Pro"/>
-              </a:rPr>
-              <a:t>: </a:t>
-            </a:r>
-            <a:r>
-              <a:rPr lang="en-US" sz="2799" u="none" spc="55" dirty="0" err="1">
-                <a:solidFill>
-                  <a:srgbClr val="000000"/>
-                </a:solidFill>
-                <a:latin typeface="Codec Pro"/>
-                <a:ea typeface="Codec Pro"/>
-                <a:cs typeface="Codec Pro"/>
-                <a:sym typeface="Codec Pro"/>
-              </a:rPr>
-              <a:t>tratamiento</a:t>
-            </a:r>
-            <a:r>
-              <a:rPr lang="en-US" sz="2799" u="none" spc="55" dirty="0">
-                <a:solidFill>
-                  <a:srgbClr val="000000"/>
-                </a:solidFill>
-                <a:latin typeface="Codec Pro"/>
-                <a:ea typeface="Codec Pro"/>
-                <a:cs typeface="Codec Pro"/>
-                <a:sym typeface="Codec Pro"/>
-              </a:rPr>
-              <a:t> de outliers, </a:t>
-            </a:r>
-            <a:r>
-              <a:rPr lang="en-US" sz="2799" u="none" spc="55" dirty="0" err="1">
-                <a:solidFill>
-                  <a:srgbClr val="000000"/>
-                </a:solidFill>
-                <a:latin typeface="Codec Pro"/>
-                <a:ea typeface="Codec Pro"/>
-                <a:cs typeface="Codec Pro"/>
-                <a:sym typeface="Codec Pro"/>
-              </a:rPr>
-              <a:t>duplicados</a:t>
-            </a:r>
-            <a:r>
-              <a:rPr lang="en-US" sz="2799" u="none" spc="55" dirty="0">
-                <a:solidFill>
-                  <a:srgbClr val="000000"/>
-                </a:solidFill>
-                <a:latin typeface="Codec Pro"/>
-                <a:ea typeface="Codec Pro"/>
-                <a:cs typeface="Codec Pro"/>
-                <a:sym typeface="Codec Pro"/>
-              </a:rPr>
-              <a:t>, </a:t>
-            </a:r>
-            <a:r>
-              <a:rPr lang="en-US" sz="2799" u="none" spc="55" dirty="0" err="1">
-                <a:solidFill>
-                  <a:srgbClr val="000000"/>
-                </a:solidFill>
-                <a:latin typeface="Codec Pro"/>
-                <a:ea typeface="Codec Pro"/>
-                <a:cs typeface="Codec Pro"/>
-                <a:sym typeface="Codec Pro"/>
-              </a:rPr>
-              <a:t>diferencias</a:t>
-            </a:r>
-            <a:r>
-              <a:rPr lang="en-US" sz="2799" u="none" spc="55" dirty="0">
-                <a:solidFill>
-                  <a:srgbClr val="000000"/>
-                </a:solidFill>
-                <a:latin typeface="Codec Pro"/>
-                <a:ea typeface="Codec Pro"/>
-                <a:cs typeface="Codec Pro"/>
-                <a:sym typeface="Codec Pro"/>
-              </a:rPr>
-              <a:t> de </a:t>
-            </a:r>
-            <a:r>
-              <a:rPr lang="en-US" sz="2799" u="none" spc="55" dirty="0" err="1">
-                <a:solidFill>
-                  <a:srgbClr val="000000"/>
-                </a:solidFill>
-                <a:latin typeface="Codec Pro"/>
-                <a:ea typeface="Codec Pro"/>
-                <a:cs typeface="Codec Pro"/>
-                <a:sym typeface="Codec Pro"/>
-              </a:rPr>
-              <a:t>formato</a:t>
-            </a:r>
-            <a:r>
-              <a:rPr lang="en-US" sz="2799" u="none" spc="55" dirty="0">
-                <a:solidFill>
-                  <a:srgbClr val="000000"/>
-                </a:solidFill>
-                <a:latin typeface="Codec Pro"/>
-                <a:ea typeface="Codec Pro"/>
-                <a:cs typeface="Codec Pro"/>
-                <a:sym typeface="Codec Pro"/>
-              </a:rPr>
-              <a:t> y </a:t>
-            </a:r>
-            <a:r>
-              <a:rPr lang="en-US" sz="2799" u="none" spc="55" dirty="0" err="1">
-                <a:solidFill>
-                  <a:srgbClr val="000000"/>
-                </a:solidFill>
-                <a:latin typeface="Codec Pro"/>
-                <a:ea typeface="Codec Pro"/>
-                <a:cs typeface="Codec Pro"/>
-                <a:sym typeface="Codec Pro"/>
-              </a:rPr>
-              <a:t>georreferencias</a:t>
-            </a:r>
-            <a:r>
-              <a:rPr lang="en-US" sz="2799" u="none" spc="55" dirty="0">
-                <a:solidFill>
-                  <a:srgbClr val="000000"/>
-                </a:solidFill>
-                <a:latin typeface="Codec Pro"/>
-                <a:ea typeface="Codec Pro"/>
-                <a:cs typeface="Codec Pro"/>
-                <a:sym typeface="Codec Pro"/>
-              </a:rPr>
-              <a:t>.</a:t>
+              <a:t>Limpieza: tratamiento de outliers, duplicados, diferencias de formato y georreferencias.</a:t>
             </a:r>
           </a:p>
           <a:p>
@@ -7070,26 +4978,17 @@
                 <a:spcPts val="3667"/>
               </a:lnSpc>
             </a:pPr>
-            <a:endParaRPr lang="en-US" sz="2799" u="none" spc="55" dirty="0">
-              <a:solidFill>
-                <a:srgbClr val="000000"/>
-              </a:solidFill>
-              <a:latin typeface="Codec Pro"/>
-              <a:ea typeface="Codec Pro"/>
-              <a:cs typeface="Codec Pro"/>
-              <a:sym typeface="Codec Pro"/>
-            </a:endParaRPr>
-          </a:p>
-        </p:txBody>
-      </p:sp>
-      <p:sp>
-        <p:nvSpPr>
-          <p:cNvPr id="6" name="TextBox 6"/>
-          <p:cNvSpPr txBox="1"/>
+          </a:p>
+        </p:txBody>
+      </p:sp>
+      <p:sp>
+        <p:nvSpPr>
+          <p:cNvPr name="TextBox 6" id="6"/>
+          <p:cNvSpPr txBox="true"/>
           <p:nvPr/>
         </p:nvSpPr>
         <p:spPr>
-          <a:xfrm>
+          <a:xfrm rot="0">
             <a:off x="1028700" y="1066763"/>
             <a:ext cx="13103867" cy="1174750"/>
           </a:xfrm>
@@ -7098,7 +4997,7 @@
           </a:prstGeom>
         </p:spPr>
         <p:txBody>
-          <a:bodyPr lIns="0" tIns="0" rIns="0" bIns="0" rtlCol="0" anchor="t">
+          <a:bodyPr anchor="t" rtlCol="false" tIns="0" lIns="0" bIns="0" rIns="0">
             <a:spAutoFit/>
           </a:bodyPr>
           <a:lstStyle/>
@@ -7118,38 +5017,8 @@
                 <a:cs typeface="Oswald"/>
                 <a:sym typeface="Oswald"/>
               </a:rPr>
-              <a:t>BASE DE DATOS</a:t>
-            </a:r>
-          </a:p>
-        </p:txBody>
-      </p:sp>
-      <p:sp>
-        <p:nvSpPr>
-          <p:cNvPr id="7" name="Marcador de número de diapositiva 6">
-            <a:extLst>
-              <a:ext uri="{FF2B5EF4-FFF2-40B4-BE49-F238E27FC236}">
-                <a16:creationId xmlns:a16="http://schemas.microsoft.com/office/drawing/2014/main" id="{D22855EC-9F0B-96AE-F2E1-1108DF8AD2BE}"/>
-              </a:ext>
-            </a:extLst>
-          </p:cNvPr>
-          <p:cNvSpPr>
-            <a:spLocks noGrp="1"/>
-          </p:cNvSpPr>
-          <p:nvPr>
-            <p:ph type="sldNum" sz="quarter" idx="12"/>
-          </p:nvPr>
-        </p:nvSpPr>
-        <p:spPr/>
-        <p:txBody>
-          <a:bodyPr/>
-          <a:lstStyle/>
-          <a:p>
-            <a:fld id="{B6F15528-21DE-4FAA-801E-634DDDAF4B2B}" type="slidenum">
-              <a:rPr lang="en-US" smtClean="0"/>
-              <a:pPr/>
-              <a:t>3</a:t>
-            </a:fld>
-            <a:endParaRPr lang="en-US"/>
+              <a:t>BASE DE DATOS - INMOBILIARIA</a:t>
+            </a:r>
           </a:p>
         </p:txBody>
       </p:sp>
@@ -7162,7 +5031,7 @@
 </file>
 
 <file path=ppt/slides/slide4.xml><?xml version="1.0" encoding="utf-8"?>
-<p:sld xmlns:a="http://schemas.openxmlformats.org/drawingml/2006/main" xmlns:r="http://schemas.openxmlformats.org/officeDocument/2006/relationships" xmlns:p="http://schemas.openxmlformats.org/presentationml/2006/main">
+<p:sld xmlns:p="http://schemas.openxmlformats.org/presentationml/2006/main" xmlns:a="http://schemas.openxmlformats.org/drawingml/2006/main">
   <p:cSld>
     <p:spTree>
       <p:nvGrpSpPr>
@@ -7180,12 +5049,12 @@
       </p:grpSpPr>
       <p:grpSp>
         <p:nvGrpSpPr>
-          <p:cNvPr id="2" name="Group 2"/>
+          <p:cNvPr name="Group 2" id="2"/>
           <p:cNvGrpSpPr/>
           <p:nvPr/>
         </p:nvGrpSpPr>
         <p:grpSpPr>
-          <a:xfrm>
+          <a:xfrm rot="0">
             <a:off x="0" y="0"/>
             <a:ext cx="18288000" cy="3279284"/>
             <a:chOff x="0" y="0"/>
@@ -7194,12 +5063,12 @@
         </p:grpSpPr>
         <p:sp>
           <p:nvSpPr>
-            <p:cNvPr id="3" name="Freeform 3"/>
+            <p:cNvPr name="Freeform 3" id="3"/>
             <p:cNvSpPr/>
             <p:nvPr/>
           </p:nvSpPr>
           <p:spPr>
-            <a:xfrm>
+            <a:xfrm flipH="false" flipV="false" rot="0">
               <a:off x="0" y="0"/>
               <a:ext cx="4816592" cy="863680"/>
             </a:xfrm>
@@ -7208,9 +5077,9 @@
               <a:gdLst/>
               <a:ahLst/>
               <a:cxnLst/>
-              <a:rect l="l" t="t" r="r" b="b"/>
+              <a:rect r="r" b="b" t="t" l="l"/>
               <a:pathLst>
-                <a:path w="4816592" h="863680">
+                <a:path h="863680" w="4816592">
                   <a:moveTo>
                     <a:pt x="0" y="0"/>
                   </a:moveTo>
@@ -7231,18 +5100,11 @@
               <a:srgbClr val="132232"/>
             </a:solidFill>
           </p:spPr>
-          <p:txBody>
-            <a:bodyPr/>
-            <a:lstStyle/>
-            <a:p>
-              <a:endParaRPr lang="es-AR"/>
-            </a:p>
-          </p:txBody>
         </p:sp>
         <p:sp>
           <p:nvSpPr>
-            <p:cNvPr id="4" name="TextBox 4"/>
-            <p:cNvSpPr txBox="1"/>
+            <p:cNvPr name="TextBox 4" id="4"/>
+            <p:cNvSpPr txBox="true"/>
             <p:nvPr/>
           </p:nvSpPr>
           <p:spPr>
@@ -7255,7 +5117,7 @@
             </a:prstGeom>
           </p:spPr>
           <p:txBody>
-            <a:bodyPr lIns="50800" tIns="50800" rIns="50800" bIns="50800" rtlCol="0" anchor="ctr"/>
+            <a:bodyPr anchor="ctr" rtlCol="false" tIns="50800" lIns="50800" bIns="50800" rIns="50800"/>
             <a:lstStyle/>
             <a:p>
               <a:pPr algn="ctr">
@@ -7263,35 +5125,34 @@
                   <a:spcPts val="3624"/>
                 </a:lnSpc>
               </a:pPr>
-              <a:endParaRPr/>
             </a:p>
           </p:txBody>
         </p:sp>
       </p:grpSp>
       <p:sp>
         <p:nvSpPr>
-          <p:cNvPr id="5" name="TextBox 5"/>
-          <p:cNvSpPr txBox="1"/>
+          <p:cNvPr name="TextBox 5" id="5"/>
+          <p:cNvSpPr txBox="true"/>
           <p:nvPr/>
         </p:nvSpPr>
         <p:spPr>
-          <a:xfrm>
-            <a:off x="525499" y="3405274"/>
-            <a:ext cx="17237002" cy="8687081"/>
+          <a:xfrm rot="0">
+            <a:off x="525499" y="3224299"/>
+            <a:ext cx="17237002" cy="7727258"/>
           </a:xfrm>
           <a:prstGeom prst="rect">
             <a:avLst/>
           </a:prstGeom>
         </p:spPr>
         <p:txBody>
-          <a:bodyPr lIns="0" tIns="0" rIns="0" bIns="0" rtlCol="0" anchor="t">
+          <a:bodyPr anchor="t" rtlCol="false" tIns="0" lIns="0" bIns="0" rIns="0">
             <a:spAutoFit/>
           </a:bodyPr>
           <a:lstStyle/>
           <a:p>
-            <a:pPr marL="601943" lvl="1" indent="-300972" algn="just">
+            <a:pPr algn="just" marL="601943" indent="-300972" lvl="1">
               <a:lnSpc>
-                <a:spcPts val="3652"/>
+                <a:spcPts val="5576"/>
               </a:lnSpc>
               <a:buFont typeface="Arial"/>
               <a:buChar char="•"/>
@@ -7306,13 +5167,13 @@
                 <a:cs typeface="Codec Pro"/>
                 <a:sym typeface="Codec Pro"/>
               </a:rPr>
-              <a:t>Los clústers dinámicos son una metodología que extiende el clustering tradicional (estático) hacia datos que cambian en el tiempo.</a:t>
-            </a:r>
-          </a:p>
-          <a:p>
-            <a:pPr marL="601943" lvl="1" indent="-300972" algn="just">
+              <a:t>Método para comparar series temporales incluso si están desfasadas en el tiempo.</a:t>
+            </a:r>
+          </a:p>
+          <a:p>
+            <a:pPr algn="just" marL="601943" indent="-300972" lvl="1">
               <a:lnSpc>
-                <a:spcPts val="3652"/>
+                <a:spcPts val="5576"/>
               </a:lnSpc>
               <a:buFont typeface="Arial"/>
               <a:buChar char="•"/>
@@ -7327,13 +5188,13 @@
                 <a:cs typeface="Codec Pro"/>
                 <a:sym typeface="Codec Pro"/>
               </a:rPr>
-              <a:t> En lugar de agrupar las observaciones una sola vez, se realiza un clustering mes a mes, y luego se hace un seguimiento de cómo cada grupo evoluciona, se transforma o desaparece.</a:t>
-            </a:r>
-          </a:p>
-          <a:p>
-            <a:pPr marL="601943" lvl="1" indent="-300972" algn="just">
+              <a:t>Alinea dinámicamente dos series para medir similitud en forma, no en el calendario exacto.</a:t>
+            </a:r>
+          </a:p>
+          <a:p>
+            <a:pPr algn="just" marL="601943" indent="-300972" lvl="1">
               <a:lnSpc>
-                <a:spcPts val="3652"/>
+                <a:spcPts val="5576"/>
               </a:lnSpc>
               <a:buFont typeface="Arial"/>
               <a:buChar char="•"/>
@@ -7348,13 +5209,13 @@
                 <a:cs typeface="Codec Pro"/>
                 <a:sym typeface="Codec Pro"/>
               </a:rPr>
-              <a:t> Permiten estudiar transiciones, estabilidad y cambios estructurales en los patrones del mercado.</a:t>
-            </a:r>
-          </a:p>
-          <a:p>
-            <a:pPr marL="601943" lvl="1" indent="-300972" algn="just">
+              <a:t>Permite comparar trayectorias de precios aunque los cambios ocurran en meses distintos.</a:t>
+            </a:r>
+          </a:p>
+          <a:p>
+            <a:pPr algn="just" marL="601943" indent="-300972" lvl="1">
               <a:lnSpc>
-                <a:spcPts val="3652"/>
+                <a:spcPts val="5576"/>
               </a:lnSpc>
               <a:buFont typeface="Arial"/>
               <a:buChar char="•"/>
@@ -7369,10 +5230,19 @@
                 <a:cs typeface="Codec Pro"/>
                 <a:sym typeface="Codec Pro"/>
               </a:rPr>
-              <a:t>Construcción de </a:t>
-            </a:r>
-            <a:r>
-              <a:rPr lang="en-US" sz="2788" u="none" spc="55">
+              <a:t>Es ideal para clustering dinámico, porque agrupa barrios según la evolución del m², no su nivel.</a:t>
+            </a:r>
+          </a:p>
+          <a:p>
+            <a:pPr algn="just" marL="601943" indent="-300972" lvl="1">
+              <a:lnSpc>
+                <a:spcPts val="5576"/>
+              </a:lnSpc>
+              <a:buFont typeface="Arial"/>
+              <a:buChar char="•"/>
+            </a:pPr>
+            <a:r>
+              <a:rPr lang="en-US" sz="2788" spc="55">
                 <a:solidFill>
                   <a:srgbClr val="000000"/>
                 </a:solidFill>
@@ -7381,19 +5251,19 @@
                 <a:cs typeface="Codec Pro"/>
                 <a:sym typeface="Codec Pro"/>
               </a:rPr>
-              <a:t>un dataset unificado y estandarizado para todo el período.</a:t>
-            </a:r>
-          </a:p>
-          <a:p>
-            <a:pPr marL="601943" lvl="1" indent="-300972" algn="just">
+              <a:t>Captura patrones como:</a:t>
+            </a:r>
+          </a:p>
+          <a:p>
+            <a:pPr algn="just" marL="601943" indent="-300972" lvl="1">
               <a:lnSpc>
-                <a:spcPts val="3652"/>
+                <a:spcPts val="5576"/>
               </a:lnSpc>
               <a:buFont typeface="Arial"/>
               <a:buChar char="•"/>
             </a:pPr>
             <a:r>
-              <a:rPr lang="en-US" sz="2788" u="none" spc="55">
+              <a:rPr lang="en-US" sz="2788" spc="55">
                 <a:solidFill>
                   <a:srgbClr val="000000"/>
                 </a:solidFill>
@@ -7402,19 +5272,19 @@
                 <a:cs typeface="Codec Pro"/>
                 <a:sym typeface="Codec Pro"/>
               </a:rPr>
-              <a:t>Normalización de variables numéricas (precio/m², superficies, ambientes).</a:t>
-            </a:r>
-          </a:p>
-          <a:p>
-            <a:pPr marL="601943" lvl="1" indent="-300972" algn="just">
+              <a:t>Subas o bajas similares, aunque ocurran en momentos distintos</a:t>
+            </a:r>
+          </a:p>
+          <a:p>
+            <a:pPr algn="just" marL="601943" indent="-300972" lvl="1">
               <a:lnSpc>
-                <a:spcPts val="3652"/>
+                <a:spcPts val="5576"/>
               </a:lnSpc>
               <a:buFont typeface="Arial"/>
               <a:buChar char="•"/>
             </a:pPr>
             <a:r>
-              <a:rPr lang="en-US" sz="2788" u="none" spc="55">
+              <a:rPr lang="en-US" sz="2788" spc="55">
                 <a:solidFill>
                   <a:srgbClr val="000000"/>
                 </a:solidFill>
@@ -7423,19 +5293,19 @@
                 <a:cs typeface="Codec Pro"/>
                 <a:sym typeface="Codec Pro"/>
               </a:rPr>
-              <a:t>Definición de métricas temporales: evolución mensual y tasas de cambio.</a:t>
-            </a:r>
-          </a:p>
-          <a:p>
-            <a:pPr marL="601943" lvl="1" indent="-300972" algn="just">
+              <a:t>Ciclos y shocks temporales</a:t>
+            </a:r>
+          </a:p>
+          <a:p>
+            <a:pPr algn="just" marL="601943" indent="-300972" lvl="1">
               <a:lnSpc>
-                <a:spcPts val="3652"/>
+                <a:spcPts val="5576"/>
               </a:lnSpc>
               <a:buFont typeface="Arial"/>
               <a:buChar char="•"/>
             </a:pPr>
             <a:r>
-              <a:rPr lang="en-US" sz="2788" u="none" spc="55">
+              <a:rPr lang="en-US" sz="2788" spc="55">
                 <a:solidFill>
                   <a:srgbClr val="000000"/>
                 </a:solidFill>
@@ -7444,19 +5314,19 @@
                 <a:cs typeface="Codec Pro"/>
                 <a:sym typeface="Codec Pro"/>
               </a:rPr>
-              <a:t>Aplicación de K-Means, DBSCAN o Gaussian Mixtures mes a mes.</a:t>
-            </a:r>
-          </a:p>
-          <a:p>
-            <a:pPr marL="601943" lvl="1" indent="-300972" algn="just">
+              <a:t>Superior a la distancia Euclidiana para series de diferente velocidad o timing.</a:t>
+            </a:r>
+          </a:p>
+          <a:p>
+            <a:pPr algn="just" marL="601943" indent="-300972" lvl="1">
               <a:lnSpc>
-                <a:spcPts val="3652"/>
+                <a:spcPts val="5576"/>
               </a:lnSpc>
               <a:buFont typeface="Arial"/>
               <a:buChar char="•"/>
             </a:pPr>
             <a:r>
-              <a:rPr lang="en-US" sz="2788" u="none" spc="55">
+              <a:rPr lang="en-US" sz="2788" spc="55">
                 <a:solidFill>
                   <a:srgbClr val="000000"/>
                 </a:solidFill>
@@ -7465,182 +5335,26 @@
                 <a:cs typeface="Codec Pro"/>
                 <a:sym typeface="Codec Pro"/>
               </a:rPr>
-              <a:t>Implementación del algoritmo de clustering dinámico:</a:t>
-            </a:r>
-          </a:p>
-          <a:p>
-            <a:pPr marL="601943" lvl="1" indent="-300972" algn="just">
-              <a:lnSpc>
-                <a:spcPts val="3652"/>
-              </a:lnSpc>
-              <a:buFont typeface="Arial"/>
-              <a:buChar char="•"/>
-            </a:pPr>
-            <a:r>
-              <a:rPr lang="en-US" sz="2788" u="none" spc="55">
-                <a:solidFill>
-                  <a:srgbClr val="000000"/>
-                </a:solidFill>
-                <a:latin typeface="Codec Pro"/>
-                <a:ea typeface="Codec Pro"/>
-                <a:cs typeface="Codec Pro"/>
-                <a:sym typeface="Codec Pro"/>
-              </a:rPr>
-              <a:t>Seguimiento de clusters a través del tiempo.</a:t>
-            </a:r>
-          </a:p>
-          <a:p>
-            <a:pPr marL="601943" lvl="1" indent="-300972" algn="just">
-              <a:lnSpc>
-                <a:spcPts val="3652"/>
-              </a:lnSpc>
-              <a:buFont typeface="Arial"/>
-              <a:buChar char="•"/>
-            </a:pPr>
-            <a:r>
-              <a:rPr lang="en-US" sz="2788" u="none" spc="55">
-                <a:solidFill>
-                  <a:srgbClr val="000000"/>
-                </a:solidFill>
-                <a:latin typeface="Codec Pro"/>
-                <a:ea typeface="Codec Pro"/>
-                <a:cs typeface="Codec Pro"/>
-                <a:sym typeface="Codec Pro"/>
-              </a:rPr>
-              <a:t>Emparejamiento de clusters entre meses mediante distancia de centros.</a:t>
-            </a:r>
-          </a:p>
-          <a:p>
-            <a:pPr marL="601943" lvl="1" indent="-300972" algn="just">
-              <a:lnSpc>
-                <a:spcPts val="3652"/>
-              </a:lnSpc>
-              <a:buFont typeface="Arial"/>
-              <a:buChar char="•"/>
-            </a:pPr>
-            <a:r>
-              <a:rPr lang="en-US" sz="2788" u="none" spc="55">
-                <a:solidFill>
-                  <a:srgbClr val="000000"/>
-                </a:solidFill>
-                <a:latin typeface="Codec Pro"/>
-                <a:ea typeface="Codec Pro"/>
-                <a:cs typeface="Codec Pro"/>
-                <a:sym typeface="Codec Pro"/>
-              </a:rPr>
-              <a:t>Detección de creación, fusión o desaparición de clusters.</a:t>
-            </a:r>
-          </a:p>
-          <a:p>
-            <a:pPr marL="601943" lvl="1" indent="-300972" algn="just">
-              <a:lnSpc>
-                <a:spcPts val="3652"/>
-              </a:lnSpc>
-              <a:buFont typeface="Arial"/>
-              <a:buChar char="•"/>
-            </a:pPr>
-            <a:r>
-              <a:rPr lang="en-US" sz="2788" u="none" spc="55">
-                <a:solidFill>
-                  <a:srgbClr val="000000"/>
-                </a:solidFill>
-                <a:latin typeface="Codec Pro"/>
-                <a:ea typeface="Codec Pro"/>
-                <a:cs typeface="Codec Pro"/>
-                <a:sym typeface="Codec Pro"/>
-              </a:rPr>
-              <a:t>Evaluación mediante métricas: Silhouette Score temporal, estabilidad intermensual.</a:t>
-            </a:r>
-          </a:p>
-          <a:p>
-            <a:pPr marL="601943" lvl="1" indent="-300972" algn="just">
-              <a:lnSpc>
-                <a:spcPts val="3652"/>
-              </a:lnSpc>
-              <a:buFont typeface="Arial"/>
-              <a:buChar char="•"/>
-            </a:pPr>
-            <a:r>
-              <a:rPr lang="en-US" sz="2788" u="none" spc="55">
-                <a:solidFill>
-                  <a:srgbClr val="000000"/>
-                </a:solidFill>
-                <a:latin typeface="Codec Pro"/>
-                <a:ea typeface="Codec Pro"/>
-                <a:cs typeface="Codec Pro"/>
-                <a:sym typeface="Codec Pro"/>
-              </a:rPr>
-              <a:t>Visualizaciones dinámicas:</a:t>
-            </a:r>
-          </a:p>
-          <a:p>
-            <a:pPr marL="601943" lvl="1" indent="-300972" algn="just">
-              <a:lnSpc>
-                <a:spcPts val="3652"/>
-              </a:lnSpc>
-              <a:buFont typeface="Arial"/>
-              <a:buChar char="•"/>
-            </a:pPr>
-            <a:r>
-              <a:rPr lang="en-US" sz="2788" u="none" spc="55">
-                <a:solidFill>
-                  <a:srgbClr val="000000"/>
-                </a:solidFill>
-                <a:latin typeface="Codec Pro"/>
-                <a:ea typeface="Codec Pro"/>
-                <a:cs typeface="Codec Pro"/>
-                <a:sym typeface="Codec Pro"/>
-              </a:rPr>
-              <a:t>Evolución del precio del m² por cluster.</a:t>
-            </a:r>
-          </a:p>
-          <a:p>
-            <a:pPr marL="601943" lvl="1" indent="-300972" algn="just">
-              <a:lnSpc>
-                <a:spcPts val="3652"/>
-              </a:lnSpc>
-              <a:buFont typeface="Arial"/>
-              <a:buChar char="•"/>
-            </a:pPr>
-            <a:r>
-              <a:rPr lang="en-US" sz="2788" u="none" spc="55">
-                <a:solidFill>
-                  <a:srgbClr val="000000"/>
-                </a:solidFill>
-                <a:latin typeface="Codec Pro"/>
-                <a:ea typeface="Codec Pro"/>
-                <a:cs typeface="Codec Pro"/>
-                <a:sym typeface="Codec Pro"/>
-              </a:rPr>
-              <a:t>Mapas de calor y geolocalización de clusters.</a:t>
+              <a:t>Base metodológica del algoritmo usado: TimeSeriesKMeans (DTW).</a:t>
             </a:r>
           </a:p>
           <a:p>
             <a:pPr algn="just">
               <a:lnSpc>
-                <a:spcPts val="3652"/>
+                <a:spcPts val="5576"/>
               </a:lnSpc>
             </a:pPr>
-            <a:endParaRPr lang="en-US" sz="2788" u="none" spc="55">
-              <a:solidFill>
-                <a:srgbClr val="000000"/>
-              </a:solidFill>
-              <a:latin typeface="Codec Pro"/>
-              <a:ea typeface="Codec Pro"/>
-              <a:cs typeface="Codec Pro"/>
-              <a:sym typeface="Codec Pro"/>
-            </a:endParaRPr>
-          </a:p>
-        </p:txBody>
-      </p:sp>
-      <p:sp>
-        <p:nvSpPr>
-          <p:cNvPr id="6" name="TextBox 6"/>
-          <p:cNvSpPr txBox="1"/>
+          </a:p>
+        </p:txBody>
+      </p:sp>
+      <p:sp>
+        <p:nvSpPr>
+          <p:cNvPr name="TextBox 6" id="6"/>
+          <p:cNvSpPr txBox="true"/>
           <p:nvPr/>
         </p:nvSpPr>
         <p:spPr>
-          <a:xfrm>
+          <a:xfrm rot="0">
             <a:off x="1028700" y="1066763"/>
             <a:ext cx="13103867" cy="1174750"/>
           </a:xfrm>
@@ -7649,7 +5363,7 @@
           </a:prstGeom>
         </p:spPr>
         <p:txBody>
-          <a:bodyPr lIns="0" tIns="0" rIns="0" bIns="0" rtlCol="0" anchor="t">
+          <a:bodyPr anchor="t" rtlCol="false" tIns="0" lIns="0" bIns="0" rIns="0">
             <a:spAutoFit/>
           </a:bodyPr>
           <a:lstStyle/>
@@ -7669,38 +5383,8 @@
                 <a:cs typeface="Oswald"/>
                 <a:sym typeface="Oswald"/>
               </a:rPr>
-              <a:t>METODOLOGÍA</a:t>
-            </a:r>
-          </a:p>
-        </p:txBody>
-      </p:sp>
-      <p:sp>
-        <p:nvSpPr>
-          <p:cNvPr id="7" name="Marcador de número de diapositiva 6">
-            <a:extLst>
-              <a:ext uri="{FF2B5EF4-FFF2-40B4-BE49-F238E27FC236}">
-                <a16:creationId xmlns:a16="http://schemas.microsoft.com/office/drawing/2014/main" id="{D9B2DD55-4652-F457-DA3D-48AA5426013C}"/>
-              </a:ext>
-            </a:extLst>
-          </p:cNvPr>
-          <p:cNvSpPr>
-            <a:spLocks noGrp="1"/>
-          </p:cNvSpPr>
-          <p:nvPr>
-            <p:ph type="sldNum" sz="quarter" idx="12"/>
-          </p:nvPr>
-        </p:nvSpPr>
-        <p:spPr/>
-        <p:txBody>
-          <a:bodyPr/>
-          <a:lstStyle/>
-          <a:p>
-            <a:fld id="{B6F15528-21DE-4FAA-801E-634DDDAF4B2B}" type="slidenum">
-              <a:rPr lang="en-US" smtClean="0"/>
-              <a:pPr/>
-              <a:t>4</a:t>
-            </a:fld>
-            <a:endParaRPr lang="en-US"/>
+              <a:t>METODOLOGÍA - DTW</a:t>
+            </a:r>
           </a:p>
         </p:txBody>
       </p:sp>
@@ -7713,7 +5397,7 @@
 </file>
 
 <file path=ppt/slides/slide5.xml><?xml version="1.0" encoding="utf-8"?>
-<p:sld xmlns:a="http://schemas.openxmlformats.org/drawingml/2006/main" xmlns:r="http://schemas.openxmlformats.org/officeDocument/2006/relationships" xmlns:p="http://schemas.openxmlformats.org/presentationml/2006/main">
+<p:sld xmlns:p="http://schemas.openxmlformats.org/presentationml/2006/main" xmlns:a="http://schemas.openxmlformats.org/drawingml/2006/main">
   <p:cSld>
     <p:spTree>
       <p:nvGrpSpPr>
@@ -7731,12 +5415,12 @@
       </p:grpSpPr>
       <p:grpSp>
         <p:nvGrpSpPr>
-          <p:cNvPr id="2" name="Group 2"/>
+          <p:cNvPr name="Group 2" id="2"/>
           <p:cNvGrpSpPr/>
           <p:nvPr/>
         </p:nvGrpSpPr>
         <p:grpSpPr>
-          <a:xfrm>
+          <a:xfrm rot="0">
             <a:off x="0" y="0"/>
             <a:ext cx="18288000" cy="3279284"/>
             <a:chOff x="0" y="0"/>
@@ -7745,12 +5429,12 @@
         </p:grpSpPr>
         <p:sp>
           <p:nvSpPr>
-            <p:cNvPr id="3" name="Freeform 3"/>
+            <p:cNvPr name="Freeform 3" id="3"/>
             <p:cNvSpPr/>
             <p:nvPr/>
           </p:nvSpPr>
           <p:spPr>
-            <a:xfrm>
+            <a:xfrm flipH="false" flipV="false" rot="0">
               <a:off x="0" y="0"/>
               <a:ext cx="4816592" cy="863680"/>
             </a:xfrm>
@@ -7759,9 +5443,9 @@
               <a:gdLst/>
               <a:ahLst/>
               <a:cxnLst/>
-              <a:rect l="l" t="t" r="r" b="b"/>
+              <a:rect r="r" b="b" t="t" l="l"/>
               <a:pathLst>
-                <a:path w="4816592" h="863680">
+                <a:path h="863680" w="4816592">
                   <a:moveTo>
                     <a:pt x="0" y="0"/>
                   </a:moveTo>
@@ -7782,18 +5466,11 @@
               <a:srgbClr val="132232"/>
             </a:solidFill>
           </p:spPr>
-          <p:txBody>
-            <a:bodyPr/>
-            <a:lstStyle/>
-            <a:p>
-              <a:endParaRPr lang="es-AR"/>
-            </a:p>
-          </p:txBody>
         </p:sp>
         <p:sp>
           <p:nvSpPr>
-            <p:cNvPr id="4" name="TextBox 4"/>
-            <p:cNvSpPr txBox="1"/>
+            <p:cNvPr name="TextBox 4" id="4"/>
+            <p:cNvSpPr txBox="true"/>
             <p:nvPr/>
           </p:nvSpPr>
           <p:spPr>
@@ -7806,7 +5483,7 @@
             </a:prstGeom>
           </p:spPr>
           <p:txBody>
-            <a:bodyPr lIns="50800" tIns="50800" rIns="50800" bIns="50800" rtlCol="0" anchor="ctr"/>
+            <a:bodyPr anchor="ctr" rtlCol="false" tIns="50800" lIns="50800" bIns="50800" rIns="50800"/>
             <a:lstStyle/>
             <a:p>
               <a:pPr algn="ctr">
@@ -7814,19 +5491,398 @@
                   <a:spcPts val="3624"/>
                 </a:lnSpc>
               </a:pPr>
-              <a:endParaRPr/>
             </a:p>
           </p:txBody>
         </p:sp>
       </p:grpSp>
       <p:sp>
         <p:nvSpPr>
-          <p:cNvPr id="5" name="TextBox 5"/>
-          <p:cNvSpPr txBox="1"/>
+          <p:cNvPr name="TextBox 5" id="5"/>
+          <p:cNvSpPr txBox="true"/>
           <p:nvPr/>
         </p:nvSpPr>
         <p:spPr>
-          <a:xfrm>
+          <a:xfrm rot="0">
+            <a:off x="525499" y="3405274"/>
+            <a:ext cx="17237002" cy="8687081"/>
+          </a:xfrm>
+          <a:prstGeom prst="rect">
+            <a:avLst/>
+          </a:prstGeom>
+        </p:spPr>
+        <p:txBody>
+          <a:bodyPr anchor="t" rtlCol="false" tIns="0" lIns="0" bIns="0" rIns="0">
+            <a:spAutoFit/>
+          </a:bodyPr>
+          <a:lstStyle/>
+          <a:p>
+            <a:pPr algn="just" marL="601943" indent="-300972" lvl="1">
+              <a:lnSpc>
+                <a:spcPts val="3652"/>
+              </a:lnSpc>
+              <a:buFont typeface="Arial"/>
+              <a:buChar char="•"/>
+            </a:pPr>
+            <a:r>
+              <a:rPr lang="en-US" sz="2788" spc="55">
+                <a:solidFill>
+                  <a:srgbClr val="000000"/>
+                </a:solidFill>
+                <a:latin typeface="Codec Pro"/>
+                <a:ea typeface="Codec Pro"/>
+                <a:cs typeface="Codec Pro"/>
+                <a:sym typeface="Codec Pro"/>
+              </a:rPr>
+              <a:t>Los clústers dinámicos son una metodología que extiende el clustering tradicional (estático) hacia datos que cambian en el tiempo.</a:t>
+            </a:r>
+          </a:p>
+          <a:p>
+            <a:pPr algn="just" marL="601943" indent="-300972" lvl="1">
+              <a:lnSpc>
+                <a:spcPts val="3652"/>
+              </a:lnSpc>
+              <a:buFont typeface="Arial"/>
+              <a:buChar char="•"/>
+            </a:pPr>
+            <a:r>
+              <a:rPr lang="en-US" sz="2788" spc="55">
+                <a:solidFill>
+                  <a:srgbClr val="000000"/>
+                </a:solidFill>
+                <a:latin typeface="Codec Pro"/>
+                <a:ea typeface="Codec Pro"/>
+                <a:cs typeface="Codec Pro"/>
+                <a:sym typeface="Codec Pro"/>
+              </a:rPr>
+              <a:t> En lugar de agrupar las observaciones una sola vez, se realiza un clustering mes a mes, y luego se hace un seguimiento de cómo cada grupo evoluciona, se transforma o desaparece.</a:t>
+            </a:r>
+          </a:p>
+          <a:p>
+            <a:pPr algn="just" marL="601943" indent="-300972" lvl="1">
+              <a:lnSpc>
+                <a:spcPts val="3652"/>
+              </a:lnSpc>
+              <a:buFont typeface="Arial"/>
+              <a:buChar char="•"/>
+            </a:pPr>
+            <a:r>
+              <a:rPr lang="en-US" sz="2788" spc="55">
+                <a:solidFill>
+                  <a:srgbClr val="000000"/>
+                </a:solidFill>
+                <a:latin typeface="Codec Pro"/>
+                <a:ea typeface="Codec Pro"/>
+                <a:cs typeface="Codec Pro"/>
+                <a:sym typeface="Codec Pro"/>
+              </a:rPr>
+              <a:t> Permiten estudiar transiciones, estabilidad y cambios estructurales en los patrones del mercado.</a:t>
+            </a:r>
+          </a:p>
+          <a:p>
+            <a:pPr algn="just" marL="601943" indent="-300972" lvl="1">
+              <a:lnSpc>
+                <a:spcPts val="3652"/>
+              </a:lnSpc>
+              <a:buFont typeface="Arial"/>
+              <a:buChar char="•"/>
+            </a:pPr>
+            <a:r>
+              <a:rPr lang="en-US" sz="2788" spc="55">
+                <a:solidFill>
+                  <a:srgbClr val="000000"/>
+                </a:solidFill>
+                <a:latin typeface="Codec Pro"/>
+                <a:ea typeface="Codec Pro"/>
+                <a:cs typeface="Codec Pro"/>
+                <a:sym typeface="Codec Pro"/>
+              </a:rPr>
+              <a:t>Construcción de </a:t>
+            </a:r>
+            <a:r>
+              <a:rPr lang="en-US" sz="2788" spc="55" u="none">
+                <a:solidFill>
+                  <a:srgbClr val="000000"/>
+                </a:solidFill>
+                <a:latin typeface="Codec Pro"/>
+                <a:ea typeface="Codec Pro"/>
+                <a:cs typeface="Codec Pro"/>
+                <a:sym typeface="Codec Pro"/>
+              </a:rPr>
+              <a:t>un dataset unificado y estandarizado para todo el período.</a:t>
+            </a:r>
+          </a:p>
+          <a:p>
+            <a:pPr algn="just" marL="601943" indent="-300972" lvl="1">
+              <a:lnSpc>
+                <a:spcPts val="3652"/>
+              </a:lnSpc>
+              <a:buFont typeface="Arial"/>
+              <a:buChar char="•"/>
+            </a:pPr>
+            <a:r>
+              <a:rPr lang="en-US" sz="2788" spc="55" u="none">
+                <a:solidFill>
+                  <a:srgbClr val="000000"/>
+                </a:solidFill>
+                <a:latin typeface="Codec Pro"/>
+                <a:ea typeface="Codec Pro"/>
+                <a:cs typeface="Codec Pro"/>
+                <a:sym typeface="Codec Pro"/>
+              </a:rPr>
+              <a:t>Normalización de variables numéricas (precio/m², superficies, ambientes).</a:t>
+            </a:r>
+          </a:p>
+          <a:p>
+            <a:pPr algn="just" marL="601943" indent="-300972" lvl="1">
+              <a:lnSpc>
+                <a:spcPts val="3652"/>
+              </a:lnSpc>
+              <a:buFont typeface="Arial"/>
+              <a:buChar char="•"/>
+            </a:pPr>
+            <a:r>
+              <a:rPr lang="en-US" sz="2788" spc="55" u="none">
+                <a:solidFill>
+                  <a:srgbClr val="000000"/>
+                </a:solidFill>
+                <a:latin typeface="Codec Pro"/>
+                <a:ea typeface="Codec Pro"/>
+                <a:cs typeface="Codec Pro"/>
+                <a:sym typeface="Codec Pro"/>
+              </a:rPr>
+              <a:t>Definición de métricas temporales: evolución mensual y tasas de cambio.</a:t>
+            </a:r>
+          </a:p>
+          <a:p>
+            <a:pPr algn="just" marL="601943" indent="-300972" lvl="1">
+              <a:lnSpc>
+                <a:spcPts val="3652"/>
+              </a:lnSpc>
+              <a:buFont typeface="Arial"/>
+              <a:buChar char="•"/>
+            </a:pPr>
+            <a:r>
+              <a:rPr lang="en-US" sz="2788" spc="55" u="none">
+                <a:solidFill>
+                  <a:srgbClr val="000000"/>
+                </a:solidFill>
+                <a:latin typeface="Codec Pro"/>
+                <a:ea typeface="Codec Pro"/>
+                <a:cs typeface="Codec Pro"/>
+                <a:sym typeface="Codec Pro"/>
+              </a:rPr>
+              <a:t>A</a:t>
+            </a:r>
+            <a:r>
+              <a:rPr lang="en-US" sz="2788" spc="55" u="none">
+                <a:solidFill>
+                  <a:srgbClr val="000000"/>
+                </a:solidFill>
+                <a:latin typeface="Codec Pro"/>
+                <a:ea typeface="Codec Pro"/>
+                <a:cs typeface="Codec Pro"/>
+                <a:sym typeface="Codec Pro"/>
+              </a:rPr>
+              <a:t>pl</a:t>
+            </a:r>
+            <a:r>
+              <a:rPr lang="en-US" sz="2788" spc="55" u="none">
+                <a:solidFill>
+                  <a:srgbClr val="000000"/>
+                </a:solidFill>
+                <a:latin typeface="Codec Pro"/>
+                <a:ea typeface="Codec Pro"/>
+                <a:cs typeface="Codec Pro"/>
+                <a:sym typeface="Codec Pro"/>
+              </a:rPr>
+              <a:t>icación de K-Means, DBSCAN o Gaussian Mixtures mes a mes.</a:t>
+            </a:r>
+          </a:p>
+          <a:p>
+            <a:pPr algn="just" marL="601943" indent="-300972" lvl="1">
+              <a:lnSpc>
+                <a:spcPts val="3652"/>
+              </a:lnSpc>
+              <a:buFont typeface="Arial"/>
+              <a:buChar char="•"/>
+            </a:pPr>
+            <a:r>
+              <a:rPr lang="en-US" sz="2788" spc="55" u="none">
+                <a:solidFill>
+                  <a:srgbClr val="000000"/>
+                </a:solidFill>
+                <a:latin typeface="Codec Pro"/>
+                <a:ea typeface="Codec Pro"/>
+                <a:cs typeface="Codec Pro"/>
+                <a:sym typeface="Codec Pro"/>
+              </a:rPr>
+              <a:t>Implementación del algoritmo de clustering dinámico:</a:t>
+            </a:r>
+          </a:p>
+          <a:p>
+            <a:pPr algn="just" marL="601943" indent="-300972" lvl="1">
+              <a:lnSpc>
+                <a:spcPts val="3652"/>
+              </a:lnSpc>
+              <a:buFont typeface="Arial"/>
+              <a:buChar char="•"/>
+            </a:pPr>
+            <a:r>
+              <a:rPr lang="en-US" sz="2788" spc="55" u="none">
+                <a:solidFill>
+                  <a:srgbClr val="000000"/>
+                </a:solidFill>
+                <a:latin typeface="Codec Pro"/>
+                <a:ea typeface="Codec Pro"/>
+                <a:cs typeface="Codec Pro"/>
+                <a:sym typeface="Codec Pro"/>
+              </a:rPr>
+              <a:t>Seguimiento de clusters a través del tiempo.</a:t>
+            </a:r>
+          </a:p>
+          <a:p>
+            <a:pPr algn="just" marL="601943" indent="-300972" lvl="1">
+              <a:lnSpc>
+                <a:spcPts val="3652"/>
+              </a:lnSpc>
+              <a:buFont typeface="Arial"/>
+              <a:buChar char="•"/>
+            </a:pPr>
+            <a:r>
+              <a:rPr lang="en-US" sz="2788" spc="55" u="none">
+                <a:solidFill>
+                  <a:srgbClr val="000000"/>
+                </a:solidFill>
+                <a:latin typeface="Codec Pro"/>
+                <a:ea typeface="Codec Pro"/>
+                <a:cs typeface="Codec Pro"/>
+                <a:sym typeface="Codec Pro"/>
+              </a:rPr>
+              <a:t>Emparejamiento de clusters entre meses mediante distancia de centros.</a:t>
+            </a:r>
+          </a:p>
+          <a:p>
+            <a:pPr algn="just" marL="601943" indent="-300972" lvl="1">
+              <a:lnSpc>
+                <a:spcPts val="3652"/>
+              </a:lnSpc>
+              <a:buFont typeface="Arial"/>
+              <a:buChar char="•"/>
+            </a:pPr>
+            <a:r>
+              <a:rPr lang="en-US" sz="2788" spc="55" u="none">
+                <a:solidFill>
+                  <a:srgbClr val="000000"/>
+                </a:solidFill>
+                <a:latin typeface="Codec Pro"/>
+                <a:ea typeface="Codec Pro"/>
+                <a:cs typeface="Codec Pro"/>
+                <a:sym typeface="Codec Pro"/>
+              </a:rPr>
+              <a:t>Detección de creación, fusión o desaparición de clusters.</a:t>
+            </a:r>
+          </a:p>
+          <a:p>
+            <a:pPr algn="just" marL="601943" indent="-300972" lvl="1">
+              <a:lnSpc>
+                <a:spcPts val="3652"/>
+              </a:lnSpc>
+              <a:buFont typeface="Arial"/>
+              <a:buChar char="•"/>
+            </a:pPr>
+            <a:r>
+              <a:rPr lang="en-US" sz="2788" spc="55" u="none">
+                <a:solidFill>
+                  <a:srgbClr val="000000"/>
+                </a:solidFill>
+                <a:latin typeface="Codec Pro"/>
+                <a:ea typeface="Codec Pro"/>
+                <a:cs typeface="Codec Pro"/>
+                <a:sym typeface="Codec Pro"/>
+              </a:rPr>
+              <a:t>Evaluación mediante métricas: Silhouette Score temporal, estabilidad intermensual.</a:t>
+            </a:r>
+          </a:p>
+          <a:p>
+            <a:pPr algn="just" marL="601943" indent="-300972" lvl="1">
+              <a:lnSpc>
+                <a:spcPts val="3652"/>
+              </a:lnSpc>
+              <a:buFont typeface="Arial"/>
+              <a:buChar char="•"/>
+            </a:pPr>
+            <a:r>
+              <a:rPr lang="en-US" sz="2788" spc="55" u="none">
+                <a:solidFill>
+                  <a:srgbClr val="000000"/>
+                </a:solidFill>
+                <a:latin typeface="Codec Pro"/>
+                <a:ea typeface="Codec Pro"/>
+                <a:cs typeface="Codec Pro"/>
+                <a:sym typeface="Codec Pro"/>
+              </a:rPr>
+              <a:t>Visualizaciones dinámicas:</a:t>
+            </a:r>
+          </a:p>
+          <a:p>
+            <a:pPr algn="just" marL="601943" indent="-300972" lvl="1">
+              <a:lnSpc>
+                <a:spcPts val="3652"/>
+              </a:lnSpc>
+              <a:buFont typeface="Arial"/>
+              <a:buChar char="•"/>
+            </a:pPr>
+            <a:r>
+              <a:rPr lang="en-US" sz="2788" spc="55" u="none">
+                <a:solidFill>
+                  <a:srgbClr val="000000"/>
+                </a:solidFill>
+                <a:latin typeface="Codec Pro"/>
+                <a:ea typeface="Codec Pro"/>
+                <a:cs typeface="Codec Pro"/>
+                <a:sym typeface="Codec Pro"/>
+              </a:rPr>
+              <a:t>Evolución del precio del m² por cluster.</a:t>
+            </a:r>
+          </a:p>
+          <a:p>
+            <a:pPr algn="just" marL="601943" indent="-300972" lvl="1">
+              <a:lnSpc>
+                <a:spcPts val="3652"/>
+              </a:lnSpc>
+              <a:buFont typeface="Arial"/>
+              <a:buChar char="•"/>
+            </a:pPr>
+            <a:r>
+              <a:rPr lang="en-US" sz="2788" spc="55" u="none">
+                <a:solidFill>
+                  <a:srgbClr val="000000"/>
+                </a:solidFill>
+                <a:latin typeface="Codec Pro"/>
+                <a:ea typeface="Codec Pro"/>
+                <a:cs typeface="Codec Pro"/>
+                <a:sym typeface="Codec Pro"/>
+              </a:rPr>
+              <a:t>Mapas de calor y geolocalización de clusters.</a:t>
+            </a:r>
+          </a:p>
+          <a:p>
+            <a:pPr algn="just">
+              <a:lnSpc>
+                <a:spcPts val="3652"/>
+              </a:lnSpc>
+            </a:pPr>
+          </a:p>
+        </p:txBody>
+      </p:sp>
+      <p:sp>
+        <p:nvSpPr>
+          <p:cNvPr name="TextBox 6" id="6"/>
+          <p:cNvSpPr txBox="true"/>
+          <p:nvPr/>
+        </p:nvSpPr>
+        <p:spPr>
+          <a:xfrm rot="0">
             <a:off x="1028700" y="1066763"/>
             <a:ext cx="13103867" cy="1174750"/>
           </a:xfrm>
@@ -7835,7 +5891,155 @@
           </a:prstGeom>
         </p:spPr>
         <p:txBody>
-          <a:bodyPr lIns="0" tIns="0" rIns="0" bIns="0" rtlCol="0" anchor="t">
+          <a:bodyPr anchor="t" rtlCol="false" tIns="0" lIns="0" bIns="0" rIns="0">
+            <a:spAutoFit/>
+          </a:bodyPr>
+          <a:lstStyle/>
+          <a:p>
+            <a:pPr algn="l">
+              <a:lnSpc>
+                <a:spcPts val="9200"/>
+              </a:lnSpc>
+            </a:pPr>
+            <a:r>
+              <a:rPr lang="en-US" sz="8000">
+                <a:solidFill>
+                  <a:srgbClr val="FFFFFF"/>
+                </a:solidFill>
+                <a:latin typeface="Oswald"/>
+                <a:ea typeface="Oswald"/>
+                <a:cs typeface="Oswald"/>
+                <a:sym typeface="Oswald"/>
+              </a:rPr>
+              <a:t>METODOLOGÍA</a:t>
+            </a:r>
+          </a:p>
+        </p:txBody>
+      </p:sp>
+    </p:spTree>
+  </p:cSld>
+  <p:clrMapOvr>
+    <a:masterClrMapping/>
+  </p:clrMapOvr>
+</p:sld>
+</file>
+
+<file path=ppt/slides/slide6.xml><?xml version="1.0" encoding="utf-8"?>
+<p:sld xmlns:p="http://schemas.openxmlformats.org/presentationml/2006/main" xmlns:a="http://schemas.openxmlformats.org/drawingml/2006/main">
+  <p:cSld>
+    <p:spTree>
+      <p:nvGrpSpPr>
+        <p:cNvPr id="1" name=""/>
+        <p:cNvGrpSpPr/>
+        <p:nvPr/>
+      </p:nvGrpSpPr>
+      <p:grpSpPr>
+        <a:xfrm>
+          <a:off x="0" y="0"/>
+          <a:ext cx="0" cy="0"/>
+          <a:chOff x="0" y="0"/>
+          <a:chExt cx="0" cy="0"/>
+        </a:xfrm>
+      </p:grpSpPr>
+      <p:grpSp>
+        <p:nvGrpSpPr>
+          <p:cNvPr name="Group 2" id="2"/>
+          <p:cNvGrpSpPr/>
+          <p:nvPr/>
+        </p:nvGrpSpPr>
+        <p:grpSpPr>
+          <a:xfrm rot="0">
+            <a:off x="0" y="0"/>
+            <a:ext cx="18288000" cy="3279284"/>
+            <a:chOff x="0" y="0"/>
+            <a:chExt cx="4816593" cy="863680"/>
+          </a:xfrm>
+        </p:grpSpPr>
+        <p:sp>
+          <p:nvSpPr>
+            <p:cNvPr name="Freeform 3" id="3"/>
+            <p:cNvSpPr/>
+            <p:nvPr/>
+          </p:nvSpPr>
+          <p:spPr>
+            <a:xfrm flipH="false" flipV="false" rot="0">
+              <a:off x="0" y="0"/>
+              <a:ext cx="4816592" cy="863680"/>
+            </a:xfrm>
+            <a:custGeom>
+              <a:avLst/>
+              <a:gdLst/>
+              <a:ahLst/>
+              <a:cxnLst/>
+              <a:rect r="r" b="b" t="t" l="l"/>
+              <a:pathLst>
+                <a:path h="863680" w="4816592">
+                  <a:moveTo>
+                    <a:pt x="0" y="0"/>
+                  </a:moveTo>
+                  <a:lnTo>
+                    <a:pt x="4816592" y="0"/>
+                  </a:lnTo>
+                  <a:lnTo>
+                    <a:pt x="4816592" y="863680"/>
+                  </a:lnTo>
+                  <a:lnTo>
+                    <a:pt x="0" y="863680"/>
+                  </a:lnTo>
+                  <a:close/>
+                </a:path>
+              </a:pathLst>
+            </a:custGeom>
+            <a:solidFill>
+              <a:srgbClr val="132232"/>
+            </a:solidFill>
+          </p:spPr>
+        </p:sp>
+        <p:sp>
+          <p:nvSpPr>
+            <p:cNvPr name="TextBox 4" id="4"/>
+            <p:cNvSpPr txBox="true"/>
+            <p:nvPr/>
+          </p:nvSpPr>
+          <p:spPr>
+            <a:xfrm>
+              <a:off x="0" y="-66675"/>
+              <a:ext cx="4816593" cy="930355"/>
+            </a:xfrm>
+            <a:prstGeom prst="rect">
+              <a:avLst/>
+            </a:prstGeom>
+          </p:spPr>
+          <p:txBody>
+            <a:bodyPr anchor="ctr" rtlCol="false" tIns="50800" lIns="50800" bIns="50800" rIns="50800"/>
+            <a:lstStyle/>
+            <a:p>
+              <a:pPr algn="ctr">
+                <a:lnSpc>
+                  <a:spcPts val="3624"/>
+                </a:lnSpc>
+              </a:pPr>
+            </a:p>
+          </p:txBody>
+        </p:sp>
+      </p:grpSp>
+      <p:sp>
+        <p:nvSpPr>
+          <p:cNvPr name="TextBox 5" id="5"/>
+          <p:cNvSpPr txBox="true"/>
+          <p:nvPr/>
+        </p:nvSpPr>
+        <p:spPr>
+          <a:xfrm rot="0">
+            <a:off x="1028700" y="1066763"/>
+            <a:ext cx="13103867" cy="1174750"/>
+          </a:xfrm>
+          <a:prstGeom prst="rect">
+            <a:avLst/>
+          </a:prstGeom>
+        </p:spPr>
+        <p:txBody>
+          <a:bodyPr anchor="t" rtlCol="false" tIns="0" lIns="0" bIns="0" rIns="0">
             <a:spAutoFit/>
           </a:bodyPr>
           <a:lstStyle/>
@@ -7857,36 +6061,6 @@
               </a:rPr>
               <a:t>RESULTADOS</a:t>
             </a:r>
-          </a:p>
-        </p:txBody>
-      </p:sp>
-      <p:sp>
-        <p:nvSpPr>
-          <p:cNvPr id="6" name="Marcador de número de diapositiva 5">
-            <a:extLst>
-              <a:ext uri="{FF2B5EF4-FFF2-40B4-BE49-F238E27FC236}">
-                <a16:creationId xmlns:a16="http://schemas.microsoft.com/office/drawing/2014/main" id="{CC87CF37-5F02-BC13-1158-BC1EDBFCA41C}"/>
-              </a:ext>
-            </a:extLst>
-          </p:cNvPr>
-          <p:cNvSpPr>
-            <a:spLocks noGrp="1"/>
-          </p:cNvSpPr>
-          <p:nvPr>
-            <p:ph type="sldNum" sz="quarter" idx="12"/>
-          </p:nvPr>
-        </p:nvSpPr>
-        <p:spPr/>
-        <p:txBody>
-          <a:bodyPr/>
-          <a:lstStyle/>
-          <a:p>
-            <a:fld id="{B6F15528-21DE-4FAA-801E-634DDDAF4B2B}" type="slidenum">
-              <a:rPr lang="en-US" smtClean="0"/>
-              <a:pPr/>
-              <a:t>5</a:t>
-            </a:fld>
-            <a:endParaRPr lang="en-US"/>
           </a:p>
         </p:txBody>
       </p:sp>
@@ -8179,319 +6353,4 @@
   <a:objectDefaults/>
   <a:extraClrSchemeLst/>
 </a:theme>
-</file>
-
-<file path=ppt/theme/theme2.xml><?xml version="1.0" encoding="utf-8"?>
-<a:theme xmlns:a="http://schemas.openxmlformats.org/drawingml/2006/main" name="Tema de Office">
-  <a:themeElements>
-    <a:clrScheme name="Office">
-      <a:dk1>
-        <a:sysClr val="windowText" lastClr="000000"/>
-      </a:dk1>
-      <a:lt1>
-        <a:sysClr val="window" lastClr="FFFFFF"/>
-      </a:lt1>
-      <a:dk2>
-        <a:srgbClr val="0E2841"/>
-      </a:dk2>
-      <a:lt2>
-        <a:srgbClr val="E8E8E8"/>
-      </a:lt2>
-      <a:accent1>
-        <a:srgbClr val="156082"/>
-      </a:accent1>
-      <a:accent2>
-        <a:srgbClr val="E97132"/>
-      </a:accent2>
-      <a:accent3>
-        <a:srgbClr val="196B24"/>
-      </a:accent3>
-      <a:accent4>
-        <a:srgbClr val="0F9ED5"/>
-      </a:accent4>
-      <a:accent5>
-        <a:srgbClr val="A02B93"/>
-      </a:accent5>
-      <a:accent6>
-        <a:srgbClr val="4EA72E"/>
-      </a:accent6>
-      <a:hlink>
-        <a:srgbClr val="467886"/>
-      </a:hlink>
-      <a:folHlink>
-        <a:srgbClr val="96607D"/>
-      </a:folHlink>
-    </a:clrScheme>
-    <a:fontScheme name="Office">
-      <a:majorFont>
-        <a:latin typeface="Aptos Display" panose="02110004020202020204"/>
-        <a:ea typeface=""/>
-        <a:cs typeface=""/>
-        <a:font script="Jpan" typeface="游ゴシック Light"/>
-        <a:font script="Hang" typeface="맑은 고딕"/>
-        <a:font script="Hans" typeface="等线 Light"/>
-        <a:font script="Hant" typeface="新細明體"/>
-        <a:font script="Arab" typeface="Times New Roman"/>
-        <a:font script="Hebr" typeface="Times New Roman"/>
-        <a:font script="Thai" typeface="Angsana New"/>
-        <a:font script="Ethi" typeface="Nyala"/>
-        <a:font script="Beng" typeface="Vrinda"/>
-        <a:font script="Gujr" typeface="Shruti"/>
-        <a:font script="Khmr" typeface="MoolBoran"/>
-        <a:font script="Knda" typeface="Tunga"/>
-        <a:font script="Guru" typeface="Raavi"/>
-        <a:font script="Cans" typeface="Euphemia"/>
-        <a:font script="Cher" typeface="Plantagenet Cherokee"/>
-        <a:font script="Yiii" typeface="Microsoft Yi Baiti"/>
-        <a:font script="Tibt" typeface="Microsoft Himalaya"/>
-        <a:font script="Thaa" typeface="MV Boli"/>
-        <a:font script="Deva" typeface="Mangal"/>
-        <a:font script="Telu" typeface="Gautami"/>
-        <a:font script="Taml" typeface="Latha"/>
-        <a:font script="Syrc" typeface="Estrangelo Edessa"/>
-        <a:font script="Orya" typeface="Kalinga"/>
-        <a:font script="Mlym" typeface="Kartika"/>
-        <a:font script="Laoo" typeface="DokChampa"/>
-        <a:font script="Sinh" typeface="Iskoola Pota"/>
-        <a:font script="Mong" typeface="Mongolian Baiti"/>
-        <a:font script="Viet" typeface="Times New Roman"/>
-        <a:font script="Uigh" typeface="Microsoft Uighur"/>
-        <a:font script="Geor" typeface="Sylfaen"/>
-        <a:font script="Armn" typeface="Arial"/>
-        <a:font script="Bugi" typeface="Leelawadee UI"/>
-        <a:font script="Bopo" typeface="Microsoft JhengHei"/>
-        <a:font script="Java" typeface="Javanese Text"/>
-        <a:font script="Lisu" typeface="Segoe UI"/>
-        <a:font script="Mymr" typeface="Myanmar Text"/>
-        <a:font script="Nkoo" typeface="Ebrima"/>
-        <a:font script="Olck" typeface="Nirmala UI"/>
-        <a:font script="Osma" typeface="Ebrima"/>
-        <a:font script="Phag" typeface="Phagspa"/>
-        <a:font script="Syrn" typeface="Estrangelo Edessa"/>
-        <a:font script="Syrj" typeface="Estrangelo Edessa"/>
-        <a:font script="Syre" typeface="Estrangelo Edessa"/>
-        <a:font script="Sora" typeface="Nirmala UI"/>
-        <a:font script="Tale" typeface="Microsoft Tai Le"/>
-        <a:font script="Talu" typeface="Microsoft New Tai Lue"/>
-        <a:font script="Tfng" typeface="Ebrima"/>
-      </a:majorFont>
-      <a:minorFont>
-        <a:latin typeface="Aptos" panose="02110004020202020204"/>
-        <a:ea typeface=""/>
-        <a:cs typeface=""/>
-        <a:font script="Jpan" typeface="游ゴシック"/>
-        <a:font script="Hang" typeface="맑은 고딕"/>
-        <a:font script="Hans" typeface="等线"/>
-        <a:font script="Hant" typeface="新細明體"/>
-        <a:font script="Arab" typeface="Arial"/>
-        <a:font script="Hebr" typeface="Arial"/>
-        <a:font script="Thai" typeface="Cordia New"/>
-        <a:font script="Ethi" typeface="Nyala"/>
-        <a:font script="Beng" typeface="Vrinda"/>
-        <a:font script="Gujr" typeface="Shruti"/>
-        <a:font script="Khmr" typeface="DaunPenh"/>
-        <a:font script="Knda" typeface="Tunga"/>
-        <a:font script="Guru" typeface="Raavi"/>
-        <a:font script="Cans" typeface="Euphemia"/>
-        <a:font script="Cher" typeface="Plantagenet Cherokee"/>
-        <a:font script="Yiii" typeface="Microsoft Yi Baiti"/>
-        <a:font script="Tibt" typeface="Microsoft Himalaya"/>
-        <a:font script="Thaa" typeface="MV Boli"/>
-        <a:font script="Deva" typeface="Mangal"/>
-        <a:font script="Telu" typeface="Gautami"/>
-        <a:font script="Taml" typeface="Latha"/>
-        <a:font script="Syrc" typeface="Estrangelo Edessa"/>
-        <a:font script="Orya" typeface="Kalinga"/>
-        <a:font script="Mlym" typeface="Kartika"/>
-        <a:font script="Laoo" typeface="DokChampa"/>
-        <a:font script="Sinh" typeface="Iskoola Pota"/>
-        <a:font script="Mong" typeface="Mongolian Baiti"/>
-        <a:font script="Viet" typeface="Arial"/>
-        <a:font script="Uigh" typeface="Microsoft Uighur"/>
-        <a:font script="Geor" typeface="Sylfaen"/>
-        <a:font script="Armn" typeface="Arial"/>
-        <a:font script="Bugi" typeface="Leelawadee UI"/>
-        <a:font script="Bopo" typeface="Microsoft JhengHei"/>
-        <a:font script="Java" typeface="Javanese Text"/>
-        <a:font script="Lisu" typeface="Segoe UI"/>
-        <a:font script="Mymr" typeface="Myanmar Text"/>
-        <a:font script="Nkoo" typeface="Ebrima"/>
-        <a:font script="Olck" typeface="Nirmala UI"/>
-        <a:font script="Osma" typeface="Ebrima"/>
-        <a:font script="Phag" typeface="Phagspa"/>
-        <a:font script="Syrn" typeface="Estrangelo Edessa"/>
-        <a:font script="Syrj" typeface="Estrangelo Edessa"/>
-        <a:font script="Syre" typeface="Estrangelo Edessa"/>
-        <a:font script="Sora" typeface="Nirmala UI"/>
-        <a:font script="Tale" typeface="Microsoft Tai Le"/>
-        <a:font script="Talu" typeface="Microsoft New Tai Lue"/>
-        <a:font script="Tfng" typeface="Ebrima"/>
-      </a:minorFont>
-    </a:fontScheme>
-    <a:fmtScheme name="Office">
-      <a:fillStyleLst>
-        <a:solidFill>
-          <a:schemeClr val="phClr"/>
-        </a:solidFill>
-        <a:gradFill rotWithShape="1">
-          <a:gsLst>
-            <a:gs pos="0">
-              <a:schemeClr val="phClr">
-                <a:lumMod val="110000"/>
-                <a:satMod val="105000"/>
-                <a:tint val="67000"/>
-              </a:schemeClr>
-            </a:gs>
-            <a:gs pos="50000">
-              <a:schemeClr val="phClr">
-                <a:lumMod val="105000"/>
-                <a:satMod val="103000"/>
-                <a:tint val="73000"/>
-              </a:schemeClr>
-            </a:gs>
-            <a:gs pos="100000">
-              <a:schemeClr val="phClr">
-                <a:lumMod val="105000"/>
-                <a:satMod val="109000"/>
-                <a:tint val="81000"/>
-              </a:schemeClr>
-            </a:gs>
-          </a:gsLst>
-          <a:lin ang="5400000" scaled="0"/>
-        </a:gradFill>
-        <a:gradFill rotWithShape="1">
-          <a:gsLst>
-            <a:gs pos="0">
-              <a:schemeClr val="phClr">
-                <a:satMod val="103000"/>
-                <a:lumMod val="102000"/>
-                <a:tint val="94000"/>
-              </a:schemeClr>
-            </a:gs>
-            <a:gs pos="50000">
-              <a:schemeClr val="phClr">
-                <a:satMod val="110000"/>
-                <a:lumMod val="100000"/>
-                <a:shade val="100000"/>
-              </a:schemeClr>
-            </a:gs>
-            <a:gs pos="100000">
-              <a:schemeClr val="phClr">
-                <a:lumMod val="99000"/>
-                <a:satMod val="120000"/>
-                <a:shade val="78000"/>
-              </a:schemeClr>
-            </a:gs>
-          </a:gsLst>
-          <a:lin ang="5400000" scaled="0"/>
-        </a:gradFill>
-      </a:fillStyleLst>
-      <a:lnStyleLst>
-        <a:ln w="12700" cap="flat" cmpd="sng" algn="ctr">
-          <a:solidFill>
-            <a:schemeClr val="phClr"/>
-          </a:solidFill>
-          <a:prstDash val="solid"/>
-          <a:miter lim="800000"/>
-        </a:ln>
-        <a:ln w="19050" cap="flat" cmpd="sng" algn="ctr">
-          <a:solidFill>
-            <a:schemeClr val="phClr"/>
-          </a:solidFill>
-          <a:prstDash val="solid"/>
-          <a:miter lim="800000"/>
-        </a:ln>
-        <a:ln w="25400" cap="flat" cmpd="sng" algn="ctr">
-          <a:solidFill>
-            <a:schemeClr val="phClr"/>
-          </a:solidFill>
-          <a:prstDash val="solid"/>
-          <a:miter lim="800000"/>
-        </a:ln>
-      </a:lnStyleLst>
-      <a:effectStyleLst>
-        <a:effectStyle>
-          <a:effectLst/>
-        </a:effectStyle>
-        <a:effectStyle>
-          <a:effectLst/>
-        </a:effectStyle>
-        <a:effectStyle>
-          <a:effectLst>
-            <a:outerShdw blurRad="57150" dist="19050" dir="5400000" algn="ctr" rotWithShape="0">
-              <a:srgbClr val="000000">
-                <a:alpha val="63000"/>
-              </a:srgbClr>
-            </a:outerShdw>
-          </a:effectLst>
-        </a:effectStyle>
-      </a:effectStyleLst>
-      <a:bgFillStyleLst>
-        <a:solidFill>
-          <a:schemeClr val="phClr"/>
-        </a:solidFill>
-        <a:solidFill>
-          <a:schemeClr val="phClr">
-            <a:tint val="95000"/>
-            <a:satMod val="170000"/>
-          </a:schemeClr>
-        </a:solidFill>
-        <a:gradFill rotWithShape="1">
-          <a:gsLst>
-            <a:gs pos="0">
-              <a:schemeClr val="phClr">
-                <a:tint val="93000"/>
-                <a:satMod val="150000"/>
-                <a:shade val="98000"/>
-                <a:lumMod val="102000"/>
-              </a:schemeClr>
-            </a:gs>
-            <a:gs pos="50000">
-              <a:schemeClr val="phClr">
-                <a:tint val="98000"/>
-                <a:satMod val="130000"/>
-                <a:shade val="90000"/>
-                <a:lumMod val="103000"/>
-              </a:schemeClr>
-            </a:gs>
-            <a:gs pos="100000">
-              <a:schemeClr val="phClr">
-                <a:shade val="63000"/>
-                <a:satMod val="120000"/>
-              </a:schemeClr>
-            </a:gs>
-          </a:gsLst>
-          <a:lin ang="5400000" scaled="0"/>
-        </a:gradFill>
-      </a:bgFillStyleLst>
-    </a:fmtScheme>
-  </a:themeElements>
-  <a:objectDefaults>
-    <a:lnDef>
-      <a:spPr/>
-      <a:bodyPr/>
-      <a:lstStyle/>
-      <a:style>
-        <a:lnRef idx="2">
-          <a:schemeClr val="accent1"/>
-        </a:lnRef>
-        <a:fillRef idx="0">
-          <a:schemeClr val="accent1"/>
-        </a:fillRef>
-        <a:effectRef idx="1">
-          <a:schemeClr val="accent1"/>
-        </a:effectRef>
-        <a:fontRef idx="minor">
-          <a:schemeClr val="tx1"/>
-        </a:fontRef>
-      </a:style>
-    </a:lnDef>
-  </a:objectDefaults>
-  <a:extraClrSchemeLst/>
-  <a:extLst>
-    <a:ext uri="{05A4C25C-085E-4340-85A3-A5531E510DB2}">
-      <thm15:themeFamily xmlns:thm15="http://schemas.microsoft.com/office/thememl/2012/main" name="Office Theme" id="{2E142A2C-CD16-42D6-873A-C26D2A0506FA}" vid="{1BDDFF52-6CD6-40A5-AB3C-68EB2F1E4D0A}"/>
-    </a:ext>
-  </a:extLst>
-</a:theme>
 </file>